--- a/ece407/407-4562870-2026/lc3.pptx
+++ b/ece407/407-4562870-2026/lc3.pptx
@@ -3,42 +3,40 @@
 <p:presentation xmlns:a="http://schemas.openxmlformats.org/drawingml/2006/main" xmlns:r="http://schemas.openxmlformats.org/officeDocument/2006/relationships" xmlns:p="http://schemas.openxmlformats.org/presentationml/2006/main" saveSubsetFonts="1" autoCompressPictures="0">
   <p:sldMasterIdLst>
     <p:sldMasterId id="2147483648" r:id="rId1"/>
+    <p:sldMasterId id="2147483660" r:id="rId2"/>
   </p:sldMasterIdLst>
   <p:notesMasterIdLst>
-    <p:notesMasterId r:id="rId33"/>
+    <p:notesMasterId r:id="rId31"/>
   </p:notesMasterIdLst>
   <p:sldIdLst>
-    <p:sldId id="256" r:id="rId2"/>
-    <p:sldId id="272" r:id="rId3"/>
-    <p:sldId id="458" r:id="rId4"/>
-    <p:sldId id="592" r:id="rId5"/>
-    <p:sldId id="383" r:id="rId6"/>
-    <p:sldId id="634" r:id="rId7"/>
-    <p:sldId id="636" r:id="rId8"/>
-    <p:sldId id="382" r:id="rId9"/>
-    <p:sldId id="635" r:id="rId10"/>
-    <p:sldId id="637" r:id="rId11"/>
-    <p:sldId id="627" r:id="rId12"/>
-    <p:sldId id="630" r:id="rId13"/>
-    <p:sldId id="628" r:id="rId14"/>
-    <p:sldId id="641" r:id="rId15"/>
-    <p:sldId id="640" r:id="rId16"/>
-    <p:sldId id="642" r:id="rId17"/>
-    <p:sldId id="643" r:id="rId18"/>
-    <p:sldId id="645" r:id="rId19"/>
+    <p:sldId id="647" r:id="rId3"/>
+    <p:sldId id="272" r:id="rId4"/>
+    <p:sldId id="458" r:id="rId5"/>
+    <p:sldId id="592" r:id="rId6"/>
+    <p:sldId id="383" r:id="rId7"/>
+    <p:sldId id="649" r:id="rId8"/>
+    <p:sldId id="636" r:id="rId9"/>
+    <p:sldId id="382" r:id="rId10"/>
+    <p:sldId id="635" r:id="rId11"/>
+    <p:sldId id="637" r:id="rId12"/>
+    <p:sldId id="627" r:id="rId13"/>
+    <p:sldId id="630" r:id="rId14"/>
+    <p:sldId id="628" r:id="rId15"/>
+    <p:sldId id="641" r:id="rId16"/>
+    <p:sldId id="640" r:id="rId17"/>
+    <p:sldId id="642" r:id="rId18"/>
+    <p:sldId id="643" r:id="rId19"/>
     <p:sldId id="626" r:id="rId20"/>
-    <p:sldId id="593" r:id="rId21"/>
-    <p:sldId id="594" r:id="rId22"/>
-    <p:sldId id="464" r:id="rId23"/>
-    <p:sldId id="465" r:id="rId24"/>
-    <p:sldId id="631" r:id="rId25"/>
-    <p:sldId id="632" r:id="rId26"/>
-    <p:sldId id="638" r:id="rId27"/>
-    <p:sldId id="646" r:id="rId28"/>
-    <p:sldId id="460" r:id="rId29"/>
-    <p:sldId id="639" r:id="rId30"/>
-    <p:sldId id="644" r:id="rId31"/>
-    <p:sldId id="466" r:id="rId32"/>
+    <p:sldId id="594" r:id="rId21"/>
+    <p:sldId id="464" r:id="rId22"/>
+    <p:sldId id="465" r:id="rId23"/>
+    <p:sldId id="631" r:id="rId24"/>
+    <p:sldId id="632" r:id="rId25"/>
+    <p:sldId id="638" r:id="rId26"/>
+    <p:sldId id="460" r:id="rId27"/>
+    <p:sldId id="639" r:id="rId28"/>
+    <p:sldId id="644" r:id="rId29"/>
+    <p:sldId id="466" r:id="rId30"/>
   </p:sldIdLst>
   <p:sldSz cx="12192000" cy="6858000"/>
   <p:notesSz cx="6858000" cy="9144000"/>
@@ -1467,7 +1465,7 @@
                 <a:tabLst/>
                 <a:defRPr/>
               </a:pPr>
-              <a:t>22</a:t>
+              <a:t>20</a:t>
             </a:fld>
             <a:endParaRPr kumimoji="0" lang="en-US" sz="1200" b="0" i="0" u="none" strike="noStrike" kern="1200" cap="none" spc="0" normalizeH="0" baseline="0" noProof="0">
               <a:ln>
@@ -1562,9 +1560,93 @@
           <a:bodyPr/>
           <a:lstStyle/>
           <a:p>
+            <a:fld id="{D060847B-3320-4D43-9AE9-B9425C6AC529}" type="slidenum">
+              <a:rPr lang="en-US" smtClean="0"/>
+              <a:t>21</a:t>
+            </a:fld>
+            <a:endParaRPr lang="en-US"/>
+          </a:p>
+        </p:txBody>
+      </p:sp>
+    </p:spTree>
+    <p:extLst>
+      <p:ext uri="{BB962C8B-B14F-4D97-AF65-F5344CB8AC3E}">
+        <p14:creationId xmlns:p14="http://schemas.microsoft.com/office/powerpoint/2010/main" val="1261686023"/>
+      </p:ext>
+    </p:extLst>
+  </p:cSld>
+  <p:clrMapOvr>
+    <a:masterClrMapping/>
+  </p:clrMapOvr>
+</p:notes>
+</file>
+
+<file path=ppt/notesSlides/notesSlide8.xml><?xml version="1.0" encoding="utf-8"?>
+<p:notes xmlns:a="http://schemas.openxmlformats.org/drawingml/2006/main" xmlns:r="http://schemas.openxmlformats.org/officeDocument/2006/relationships" xmlns:p="http://schemas.openxmlformats.org/presentationml/2006/main">
+  <p:cSld>
+    <p:spTree>
+      <p:nvGrpSpPr>
+        <p:cNvPr id="1" name=""/>
+        <p:cNvGrpSpPr/>
+        <p:nvPr/>
+      </p:nvGrpSpPr>
+      <p:grpSpPr>
+        <a:xfrm>
+          <a:off x="0" y="0"/>
+          <a:ext cx="0" cy="0"/>
+          <a:chOff x="0" y="0"/>
+          <a:chExt cx="0" cy="0"/>
+        </a:xfrm>
+      </p:grpSpPr>
+      <p:sp>
+        <p:nvSpPr>
+          <p:cNvPr id="2" name="Slide Image Placeholder 1"/>
+          <p:cNvSpPr>
+            <a:spLocks noGrp="1" noRot="1" noChangeAspect="1"/>
+          </p:cNvSpPr>
+          <p:nvPr>
+            <p:ph type="sldImg"/>
+          </p:nvPr>
+        </p:nvSpPr>
+        <p:spPr/>
+      </p:sp>
+      <p:sp>
+        <p:nvSpPr>
+          <p:cNvPr id="3" name="Notes Placeholder 2"/>
+          <p:cNvSpPr>
+            <a:spLocks noGrp="1"/>
+          </p:cNvSpPr>
+          <p:nvPr>
+            <p:ph type="body" idx="1"/>
+          </p:nvPr>
+        </p:nvSpPr>
+        <p:spPr/>
+        <p:txBody>
+          <a:bodyPr/>
+          <a:lstStyle/>
+          <a:p>
+            <a:endParaRPr lang="en-US" dirty="0"/>
+          </a:p>
+        </p:txBody>
+      </p:sp>
+      <p:sp>
+        <p:nvSpPr>
+          <p:cNvPr id="4" name="Slide Number Placeholder 3"/>
+          <p:cNvSpPr>
+            <a:spLocks noGrp="1"/>
+          </p:cNvSpPr>
+          <p:nvPr>
+            <p:ph type="sldNum" sz="quarter" idx="5"/>
+          </p:nvPr>
+        </p:nvSpPr>
+        <p:spPr/>
+        <p:txBody>
+          <a:bodyPr/>
+          <a:lstStyle/>
+          <a:p>
             <a:fld id="{E41E8587-C61B-49BA-BD3C-A9EE353D70EB}" type="slidenum">
               <a:rPr lang="en-US" smtClean="0"/>
-              <a:t>28</a:t>
+              <a:t>25</a:t>
             </a:fld>
             <a:endParaRPr lang="en-US"/>
           </a:p>
@@ -2209,6 +2291,1941 @@
 </p:sldLayout>
 </file>
 
+<file path=ppt/slideLayouts/slideLayout12.xml><?xml version="1.0" encoding="utf-8"?>
+<p:sldLayout xmlns:a="http://schemas.openxmlformats.org/drawingml/2006/main" xmlns:r="http://schemas.openxmlformats.org/officeDocument/2006/relationships" xmlns:p="http://schemas.openxmlformats.org/presentationml/2006/main" type="title" preserve="1">
+  <p:cSld name="Title Slide">
+    <p:spTree>
+      <p:nvGrpSpPr>
+        <p:cNvPr id="1" name=""/>
+        <p:cNvGrpSpPr/>
+        <p:nvPr/>
+      </p:nvGrpSpPr>
+      <p:grpSpPr>
+        <a:xfrm>
+          <a:off x="0" y="0"/>
+          <a:ext cx="0" cy="0"/>
+          <a:chOff x="0" y="0"/>
+          <a:chExt cx="0" cy="0"/>
+        </a:xfrm>
+      </p:grpSpPr>
+      <p:sp>
+        <p:nvSpPr>
+          <p:cNvPr id="2" name="Title 1">
+            <a:extLst>
+              <a:ext uri="{FF2B5EF4-FFF2-40B4-BE49-F238E27FC236}">
+                <a16:creationId xmlns:a16="http://schemas.microsoft.com/office/drawing/2014/main" id="{FBC09EF2-C916-54F8-B80E-5AD7FF6779E7}"/>
+              </a:ext>
+            </a:extLst>
+          </p:cNvPr>
+          <p:cNvSpPr>
+            <a:spLocks noGrp="1"/>
+          </p:cNvSpPr>
+          <p:nvPr>
+            <p:ph type="ctrTitle"/>
+          </p:nvPr>
+        </p:nvSpPr>
+        <p:spPr>
+          <a:xfrm>
+            <a:off x="1524000" y="1122363"/>
+            <a:ext cx="9144000" cy="2387600"/>
+          </a:xfrm>
+        </p:spPr>
+        <p:txBody>
+          <a:bodyPr anchor="b"/>
+          <a:lstStyle>
+            <a:lvl1pPr algn="ctr">
+              <a:defRPr sz="6000"/>
+            </a:lvl1pPr>
+          </a:lstStyle>
+          <a:p>
+            <a:r>
+              <a:rPr lang="en-US"/>
+              <a:t>Click to edit Master title style</a:t>
+            </a:r>
+          </a:p>
+        </p:txBody>
+      </p:sp>
+      <p:sp>
+        <p:nvSpPr>
+          <p:cNvPr id="3" name="Subtitle 2">
+            <a:extLst>
+              <a:ext uri="{FF2B5EF4-FFF2-40B4-BE49-F238E27FC236}">
+                <a16:creationId xmlns:a16="http://schemas.microsoft.com/office/drawing/2014/main" id="{3188DD5D-898C-DA4C-25B3-C4AA7CAD4D18}"/>
+              </a:ext>
+            </a:extLst>
+          </p:cNvPr>
+          <p:cNvSpPr>
+            <a:spLocks noGrp="1"/>
+          </p:cNvSpPr>
+          <p:nvPr>
+            <p:ph type="subTitle" idx="1"/>
+          </p:nvPr>
+        </p:nvSpPr>
+        <p:spPr>
+          <a:xfrm>
+            <a:off x="1524000" y="3602038"/>
+            <a:ext cx="9144000" cy="1655762"/>
+          </a:xfrm>
+        </p:spPr>
+        <p:txBody>
+          <a:bodyPr/>
+          <a:lstStyle>
+            <a:lvl1pPr marL="0" indent="0" algn="ctr">
+              <a:buNone/>
+              <a:defRPr sz="2400"/>
+            </a:lvl1pPr>
+            <a:lvl2pPr marL="457200" indent="0" algn="ctr">
+              <a:buNone/>
+              <a:defRPr sz="2000"/>
+            </a:lvl2pPr>
+            <a:lvl3pPr marL="914400" indent="0" algn="ctr">
+              <a:buNone/>
+              <a:defRPr sz="1800"/>
+            </a:lvl3pPr>
+            <a:lvl4pPr marL="1371600" indent="0" algn="ctr">
+              <a:buNone/>
+              <a:defRPr sz="1600"/>
+            </a:lvl4pPr>
+            <a:lvl5pPr marL="1828800" indent="0" algn="ctr">
+              <a:buNone/>
+              <a:defRPr sz="1600"/>
+            </a:lvl5pPr>
+            <a:lvl6pPr marL="2286000" indent="0" algn="ctr">
+              <a:buNone/>
+              <a:defRPr sz="1600"/>
+            </a:lvl6pPr>
+            <a:lvl7pPr marL="2743200" indent="0" algn="ctr">
+              <a:buNone/>
+              <a:defRPr sz="1600"/>
+            </a:lvl7pPr>
+            <a:lvl8pPr marL="3200400" indent="0" algn="ctr">
+              <a:buNone/>
+              <a:defRPr sz="1600"/>
+            </a:lvl8pPr>
+            <a:lvl9pPr marL="3657600" indent="0" algn="ctr">
+              <a:buNone/>
+              <a:defRPr sz="1600"/>
+            </a:lvl9pPr>
+          </a:lstStyle>
+          <a:p>
+            <a:r>
+              <a:rPr lang="en-US"/>
+              <a:t>Click to edit Master subtitle style</a:t>
+            </a:r>
+          </a:p>
+        </p:txBody>
+      </p:sp>
+      <p:sp>
+        <p:nvSpPr>
+          <p:cNvPr id="4" name="Date Placeholder 3">
+            <a:extLst>
+              <a:ext uri="{FF2B5EF4-FFF2-40B4-BE49-F238E27FC236}">
+                <a16:creationId xmlns:a16="http://schemas.microsoft.com/office/drawing/2014/main" id="{CCD1A6FA-101A-39C9-0B02-F2E0DAFC901E}"/>
+              </a:ext>
+            </a:extLst>
+          </p:cNvPr>
+          <p:cNvSpPr>
+            <a:spLocks noGrp="1"/>
+          </p:cNvSpPr>
+          <p:nvPr>
+            <p:ph type="dt" sz="half" idx="10"/>
+          </p:nvPr>
+        </p:nvSpPr>
+        <p:spPr/>
+        <p:txBody>
+          <a:bodyPr/>
+          <a:lstStyle/>
+          <a:p>
+            <a:fld id="{F10F4B33-885B-F040-8A46-CBE76B527417}" type="datetimeFigureOut">
+              <a:rPr lang="en-US" smtClean="0"/>
+              <a:t>8/31/26</a:t>
+            </a:fld>
+            <a:endParaRPr lang="en-US"/>
+          </a:p>
+        </p:txBody>
+      </p:sp>
+      <p:sp>
+        <p:nvSpPr>
+          <p:cNvPr id="5" name="Footer Placeholder 4">
+            <a:extLst>
+              <a:ext uri="{FF2B5EF4-FFF2-40B4-BE49-F238E27FC236}">
+                <a16:creationId xmlns:a16="http://schemas.microsoft.com/office/drawing/2014/main" id="{81D37998-BD1B-DAFF-3A57-9CA6EC69A8FD}"/>
+              </a:ext>
+            </a:extLst>
+          </p:cNvPr>
+          <p:cNvSpPr>
+            <a:spLocks noGrp="1"/>
+          </p:cNvSpPr>
+          <p:nvPr>
+            <p:ph type="ftr" sz="quarter" idx="11"/>
+          </p:nvPr>
+        </p:nvSpPr>
+        <p:spPr/>
+        <p:txBody>
+          <a:bodyPr/>
+          <a:lstStyle/>
+          <a:p>
+            <a:endParaRPr lang="en-US"/>
+          </a:p>
+        </p:txBody>
+      </p:sp>
+      <p:sp>
+        <p:nvSpPr>
+          <p:cNvPr id="6" name="Slide Number Placeholder 5">
+            <a:extLst>
+              <a:ext uri="{FF2B5EF4-FFF2-40B4-BE49-F238E27FC236}">
+                <a16:creationId xmlns:a16="http://schemas.microsoft.com/office/drawing/2014/main" id="{A76B318C-A8A1-7CAC-0426-721806F9289A}"/>
+              </a:ext>
+            </a:extLst>
+          </p:cNvPr>
+          <p:cNvSpPr>
+            <a:spLocks noGrp="1"/>
+          </p:cNvSpPr>
+          <p:nvPr>
+            <p:ph type="sldNum" sz="quarter" idx="12"/>
+          </p:nvPr>
+        </p:nvSpPr>
+        <p:spPr/>
+        <p:txBody>
+          <a:bodyPr/>
+          <a:lstStyle/>
+          <a:p>
+            <a:fld id="{B8A4611B-8B6E-6E4B-B112-D5042F8FC322}" type="slidenum">
+              <a:rPr lang="en-US" smtClean="0"/>
+              <a:t>‹#›</a:t>
+            </a:fld>
+            <a:endParaRPr lang="en-US"/>
+          </a:p>
+        </p:txBody>
+      </p:sp>
+    </p:spTree>
+    <p:extLst>
+      <p:ext uri="{BB962C8B-B14F-4D97-AF65-F5344CB8AC3E}">
+        <p14:creationId xmlns:p14="http://schemas.microsoft.com/office/powerpoint/2010/main" val="1220059704"/>
+      </p:ext>
+    </p:extLst>
+  </p:cSld>
+  <p:clrMapOvr>
+    <a:masterClrMapping/>
+  </p:clrMapOvr>
+</p:sldLayout>
+</file>
+
+<file path=ppt/slideLayouts/slideLayout13.xml><?xml version="1.0" encoding="utf-8"?>
+<p:sldLayout xmlns:a="http://schemas.openxmlformats.org/drawingml/2006/main" xmlns:r="http://schemas.openxmlformats.org/officeDocument/2006/relationships" xmlns:p="http://schemas.openxmlformats.org/presentationml/2006/main" type="obj" preserve="1">
+  <p:cSld name="Title and Content">
+    <p:spTree>
+      <p:nvGrpSpPr>
+        <p:cNvPr id="1" name=""/>
+        <p:cNvGrpSpPr/>
+        <p:nvPr/>
+      </p:nvGrpSpPr>
+      <p:grpSpPr>
+        <a:xfrm>
+          <a:off x="0" y="0"/>
+          <a:ext cx="0" cy="0"/>
+          <a:chOff x="0" y="0"/>
+          <a:chExt cx="0" cy="0"/>
+        </a:xfrm>
+      </p:grpSpPr>
+      <p:sp>
+        <p:nvSpPr>
+          <p:cNvPr id="2" name="Title 1">
+            <a:extLst>
+              <a:ext uri="{FF2B5EF4-FFF2-40B4-BE49-F238E27FC236}">
+                <a16:creationId xmlns:a16="http://schemas.microsoft.com/office/drawing/2014/main" id="{BBAA2F53-8566-F771-23D1-3E5C065307D5}"/>
+              </a:ext>
+            </a:extLst>
+          </p:cNvPr>
+          <p:cNvSpPr>
+            <a:spLocks noGrp="1"/>
+          </p:cNvSpPr>
+          <p:nvPr>
+            <p:ph type="title"/>
+          </p:nvPr>
+        </p:nvSpPr>
+        <p:spPr/>
+        <p:txBody>
+          <a:bodyPr/>
+          <a:lstStyle/>
+          <a:p>
+            <a:r>
+              <a:rPr lang="en-US"/>
+              <a:t>Click to edit Master title style</a:t>
+            </a:r>
+          </a:p>
+        </p:txBody>
+      </p:sp>
+      <p:sp>
+        <p:nvSpPr>
+          <p:cNvPr id="3" name="Content Placeholder 2">
+            <a:extLst>
+              <a:ext uri="{FF2B5EF4-FFF2-40B4-BE49-F238E27FC236}">
+                <a16:creationId xmlns:a16="http://schemas.microsoft.com/office/drawing/2014/main" id="{4E54455E-F303-CC1D-5D33-E533F88391BE}"/>
+              </a:ext>
+            </a:extLst>
+          </p:cNvPr>
+          <p:cNvSpPr>
+            <a:spLocks noGrp="1"/>
+          </p:cNvSpPr>
+          <p:nvPr>
+            <p:ph idx="1"/>
+          </p:nvPr>
+        </p:nvSpPr>
+        <p:spPr/>
+        <p:txBody>
+          <a:bodyPr/>
+          <a:lstStyle/>
+          <a:p>
+            <a:pPr lvl="0"/>
+            <a:r>
+              <a:rPr lang="en-US"/>
+              <a:t>Click to edit Master text styles</a:t>
+            </a:r>
+          </a:p>
+          <a:p>
+            <a:pPr lvl="1"/>
+            <a:r>
+              <a:rPr lang="en-US"/>
+              <a:t>Second level</a:t>
+            </a:r>
+          </a:p>
+          <a:p>
+            <a:pPr lvl="2"/>
+            <a:r>
+              <a:rPr lang="en-US"/>
+              <a:t>Third level</a:t>
+            </a:r>
+          </a:p>
+          <a:p>
+            <a:pPr lvl="3"/>
+            <a:r>
+              <a:rPr lang="en-US"/>
+              <a:t>Fourth level</a:t>
+            </a:r>
+          </a:p>
+          <a:p>
+            <a:pPr lvl="4"/>
+            <a:r>
+              <a:rPr lang="en-US"/>
+              <a:t>Fifth level</a:t>
+            </a:r>
+          </a:p>
+        </p:txBody>
+      </p:sp>
+      <p:sp>
+        <p:nvSpPr>
+          <p:cNvPr id="4" name="Date Placeholder 3">
+            <a:extLst>
+              <a:ext uri="{FF2B5EF4-FFF2-40B4-BE49-F238E27FC236}">
+                <a16:creationId xmlns:a16="http://schemas.microsoft.com/office/drawing/2014/main" id="{141AAA6C-07F4-7FB3-9571-C06A9D4E53D4}"/>
+              </a:ext>
+            </a:extLst>
+          </p:cNvPr>
+          <p:cNvSpPr>
+            <a:spLocks noGrp="1"/>
+          </p:cNvSpPr>
+          <p:nvPr>
+            <p:ph type="dt" sz="half" idx="10"/>
+          </p:nvPr>
+        </p:nvSpPr>
+        <p:spPr/>
+        <p:txBody>
+          <a:bodyPr/>
+          <a:lstStyle/>
+          <a:p>
+            <a:fld id="{F10F4B33-885B-F040-8A46-CBE76B527417}" type="datetimeFigureOut">
+              <a:rPr lang="en-US" smtClean="0"/>
+              <a:t>8/31/26</a:t>
+            </a:fld>
+            <a:endParaRPr lang="en-US"/>
+          </a:p>
+        </p:txBody>
+      </p:sp>
+      <p:sp>
+        <p:nvSpPr>
+          <p:cNvPr id="5" name="Footer Placeholder 4">
+            <a:extLst>
+              <a:ext uri="{FF2B5EF4-FFF2-40B4-BE49-F238E27FC236}">
+                <a16:creationId xmlns:a16="http://schemas.microsoft.com/office/drawing/2014/main" id="{02CDD49F-3D09-73AD-E55E-BF0287D06CD1}"/>
+              </a:ext>
+            </a:extLst>
+          </p:cNvPr>
+          <p:cNvSpPr>
+            <a:spLocks noGrp="1"/>
+          </p:cNvSpPr>
+          <p:nvPr>
+            <p:ph type="ftr" sz="quarter" idx="11"/>
+          </p:nvPr>
+        </p:nvSpPr>
+        <p:spPr/>
+        <p:txBody>
+          <a:bodyPr/>
+          <a:lstStyle/>
+          <a:p>
+            <a:endParaRPr lang="en-US"/>
+          </a:p>
+        </p:txBody>
+      </p:sp>
+      <p:sp>
+        <p:nvSpPr>
+          <p:cNvPr id="6" name="Slide Number Placeholder 5">
+            <a:extLst>
+              <a:ext uri="{FF2B5EF4-FFF2-40B4-BE49-F238E27FC236}">
+                <a16:creationId xmlns:a16="http://schemas.microsoft.com/office/drawing/2014/main" id="{1C8F7D02-D853-3998-4D51-BF53EAF5F1AE}"/>
+              </a:ext>
+            </a:extLst>
+          </p:cNvPr>
+          <p:cNvSpPr>
+            <a:spLocks noGrp="1"/>
+          </p:cNvSpPr>
+          <p:nvPr>
+            <p:ph type="sldNum" sz="quarter" idx="12"/>
+          </p:nvPr>
+        </p:nvSpPr>
+        <p:spPr/>
+        <p:txBody>
+          <a:bodyPr/>
+          <a:lstStyle/>
+          <a:p>
+            <a:fld id="{B8A4611B-8B6E-6E4B-B112-D5042F8FC322}" type="slidenum">
+              <a:rPr lang="en-US" smtClean="0"/>
+              <a:t>‹#›</a:t>
+            </a:fld>
+            <a:endParaRPr lang="en-US"/>
+          </a:p>
+        </p:txBody>
+      </p:sp>
+    </p:spTree>
+    <p:extLst>
+      <p:ext uri="{BB962C8B-B14F-4D97-AF65-F5344CB8AC3E}">
+        <p14:creationId xmlns:p14="http://schemas.microsoft.com/office/powerpoint/2010/main" val="3888852957"/>
+      </p:ext>
+    </p:extLst>
+  </p:cSld>
+  <p:clrMapOvr>
+    <a:masterClrMapping/>
+  </p:clrMapOvr>
+</p:sldLayout>
+</file>
+
+<file path=ppt/slideLayouts/slideLayout14.xml><?xml version="1.0" encoding="utf-8"?>
+<p:sldLayout xmlns:a="http://schemas.openxmlformats.org/drawingml/2006/main" xmlns:r="http://schemas.openxmlformats.org/officeDocument/2006/relationships" xmlns:p="http://schemas.openxmlformats.org/presentationml/2006/main" type="secHead" preserve="1">
+  <p:cSld name="Section Header">
+    <p:spTree>
+      <p:nvGrpSpPr>
+        <p:cNvPr id="1" name=""/>
+        <p:cNvGrpSpPr/>
+        <p:nvPr/>
+      </p:nvGrpSpPr>
+      <p:grpSpPr>
+        <a:xfrm>
+          <a:off x="0" y="0"/>
+          <a:ext cx="0" cy="0"/>
+          <a:chOff x="0" y="0"/>
+          <a:chExt cx="0" cy="0"/>
+        </a:xfrm>
+      </p:grpSpPr>
+      <p:sp>
+        <p:nvSpPr>
+          <p:cNvPr id="2" name="Title 1">
+            <a:extLst>
+              <a:ext uri="{FF2B5EF4-FFF2-40B4-BE49-F238E27FC236}">
+                <a16:creationId xmlns:a16="http://schemas.microsoft.com/office/drawing/2014/main" id="{54D48979-7F4C-2595-2996-B00AC9F26F20}"/>
+              </a:ext>
+            </a:extLst>
+          </p:cNvPr>
+          <p:cNvSpPr>
+            <a:spLocks noGrp="1"/>
+          </p:cNvSpPr>
+          <p:nvPr>
+            <p:ph type="title"/>
+          </p:nvPr>
+        </p:nvSpPr>
+        <p:spPr>
+          <a:xfrm>
+            <a:off x="831850" y="1709738"/>
+            <a:ext cx="10515600" cy="2852737"/>
+          </a:xfrm>
+        </p:spPr>
+        <p:txBody>
+          <a:bodyPr anchor="b"/>
+          <a:lstStyle>
+            <a:lvl1pPr>
+              <a:defRPr sz="6000"/>
+            </a:lvl1pPr>
+          </a:lstStyle>
+          <a:p>
+            <a:r>
+              <a:rPr lang="en-US"/>
+              <a:t>Click to edit Master title style</a:t>
+            </a:r>
+          </a:p>
+        </p:txBody>
+      </p:sp>
+      <p:sp>
+        <p:nvSpPr>
+          <p:cNvPr id="3" name="Text Placeholder 2">
+            <a:extLst>
+              <a:ext uri="{FF2B5EF4-FFF2-40B4-BE49-F238E27FC236}">
+                <a16:creationId xmlns:a16="http://schemas.microsoft.com/office/drawing/2014/main" id="{0012C948-ED9A-5E7E-BA85-320C4DA95A99}"/>
+              </a:ext>
+            </a:extLst>
+          </p:cNvPr>
+          <p:cNvSpPr>
+            <a:spLocks noGrp="1"/>
+          </p:cNvSpPr>
+          <p:nvPr>
+            <p:ph type="body" idx="1"/>
+          </p:nvPr>
+        </p:nvSpPr>
+        <p:spPr>
+          <a:xfrm>
+            <a:off x="831850" y="4589463"/>
+            <a:ext cx="10515600" cy="1500187"/>
+          </a:xfrm>
+        </p:spPr>
+        <p:txBody>
+          <a:bodyPr/>
+          <a:lstStyle>
+            <a:lvl1pPr marL="0" indent="0">
+              <a:buNone/>
+              <a:defRPr sz="2400">
+                <a:solidFill>
+                  <a:schemeClr val="tx1">
+                    <a:tint val="82000"/>
+                  </a:schemeClr>
+                </a:solidFill>
+              </a:defRPr>
+            </a:lvl1pPr>
+            <a:lvl2pPr marL="457200" indent="0">
+              <a:buNone/>
+              <a:defRPr sz="2000">
+                <a:solidFill>
+                  <a:schemeClr val="tx1">
+                    <a:tint val="82000"/>
+                  </a:schemeClr>
+                </a:solidFill>
+              </a:defRPr>
+            </a:lvl2pPr>
+            <a:lvl3pPr marL="914400" indent="0">
+              <a:buNone/>
+              <a:defRPr sz="1800">
+                <a:solidFill>
+                  <a:schemeClr val="tx1">
+                    <a:tint val="82000"/>
+                  </a:schemeClr>
+                </a:solidFill>
+              </a:defRPr>
+            </a:lvl3pPr>
+            <a:lvl4pPr marL="1371600" indent="0">
+              <a:buNone/>
+              <a:defRPr sz="1600">
+                <a:solidFill>
+                  <a:schemeClr val="tx1">
+                    <a:tint val="82000"/>
+                  </a:schemeClr>
+                </a:solidFill>
+              </a:defRPr>
+            </a:lvl4pPr>
+            <a:lvl5pPr marL="1828800" indent="0">
+              <a:buNone/>
+              <a:defRPr sz="1600">
+                <a:solidFill>
+                  <a:schemeClr val="tx1">
+                    <a:tint val="82000"/>
+                  </a:schemeClr>
+                </a:solidFill>
+              </a:defRPr>
+            </a:lvl5pPr>
+            <a:lvl6pPr marL="2286000" indent="0">
+              <a:buNone/>
+              <a:defRPr sz="1600">
+                <a:solidFill>
+                  <a:schemeClr val="tx1">
+                    <a:tint val="82000"/>
+                  </a:schemeClr>
+                </a:solidFill>
+              </a:defRPr>
+            </a:lvl6pPr>
+            <a:lvl7pPr marL="2743200" indent="0">
+              <a:buNone/>
+              <a:defRPr sz="1600">
+                <a:solidFill>
+                  <a:schemeClr val="tx1">
+                    <a:tint val="82000"/>
+                  </a:schemeClr>
+                </a:solidFill>
+              </a:defRPr>
+            </a:lvl7pPr>
+            <a:lvl8pPr marL="3200400" indent="0">
+              <a:buNone/>
+              <a:defRPr sz="1600">
+                <a:solidFill>
+                  <a:schemeClr val="tx1">
+                    <a:tint val="82000"/>
+                  </a:schemeClr>
+                </a:solidFill>
+              </a:defRPr>
+            </a:lvl8pPr>
+            <a:lvl9pPr marL="3657600" indent="0">
+              <a:buNone/>
+              <a:defRPr sz="1600">
+                <a:solidFill>
+                  <a:schemeClr val="tx1">
+                    <a:tint val="82000"/>
+                  </a:schemeClr>
+                </a:solidFill>
+              </a:defRPr>
+            </a:lvl9pPr>
+          </a:lstStyle>
+          <a:p>
+            <a:pPr lvl="0"/>
+            <a:r>
+              <a:rPr lang="en-US"/>
+              <a:t>Click to edit Master text styles</a:t>
+            </a:r>
+          </a:p>
+        </p:txBody>
+      </p:sp>
+      <p:sp>
+        <p:nvSpPr>
+          <p:cNvPr id="4" name="Date Placeholder 3">
+            <a:extLst>
+              <a:ext uri="{FF2B5EF4-FFF2-40B4-BE49-F238E27FC236}">
+                <a16:creationId xmlns:a16="http://schemas.microsoft.com/office/drawing/2014/main" id="{35E1EFDC-6287-61F0-C3BD-0651B158436C}"/>
+              </a:ext>
+            </a:extLst>
+          </p:cNvPr>
+          <p:cNvSpPr>
+            <a:spLocks noGrp="1"/>
+          </p:cNvSpPr>
+          <p:nvPr>
+            <p:ph type="dt" sz="half" idx="10"/>
+          </p:nvPr>
+        </p:nvSpPr>
+        <p:spPr/>
+        <p:txBody>
+          <a:bodyPr/>
+          <a:lstStyle/>
+          <a:p>
+            <a:fld id="{F10F4B33-885B-F040-8A46-CBE76B527417}" type="datetimeFigureOut">
+              <a:rPr lang="en-US" smtClean="0"/>
+              <a:t>8/31/26</a:t>
+            </a:fld>
+            <a:endParaRPr lang="en-US"/>
+          </a:p>
+        </p:txBody>
+      </p:sp>
+      <p:sp>
+        <p:nvSpPr>
+          <p:cNvPr id="5" name="Footer Placeholder 4">
+            <a:extLst>
+              <a:ext uri="{FF2B5EF4-FFF2-40B4-BE49-F238E27FC236}">
+                <a16:creationId xmlns:a16="http://schemas.microsoft.com/office/drawing/2014/main" id="{F21D00AE-992F-1EDF-2D24-99D69165A5C9}"/>
+              </a:ext>
+            </a:extLst>
+          </p:cNvPr>
+          <p:cNvSpPr>
+            <a:spLocks noGrp="1"/>
+          </p:cNvSpPr>
+          <p:nvPr>
+            <p:ph type="ftr" sz="quarter" idx="11"/>
+          </p:nvPr>
+        </p:nvSpPr>
+        <p:spPr/>
+        <p:txBody>
+          <a:bodyPr/>
+          <a:lstStyle/>
+          <a:p>
+            <a:endParaRPr lang="en-US"/>
+          </a:p>
+        </p:txBody>
+      </p:sp>
+      <p:sp>
+        <p:nvSpPr>
+          <p:cNvPr id="6" name="Slide Number Placeholder 5">
+            <a:extLst>
+              <a:ext uri="{FF2B5EF4-FFF2-40B4-BE49-F238E27FC236}">
+                <a16:creationId xmlns:a16="http://schemas.microsoft.com/office/drawing/2014/main" id="{A43377B7-C3D4-FEAC-C9CC-3A23DF6E3650}"/>
+              </a:ext>
+            </a:extLst>
+          </p:cNvPr>
+          <p:cNvSpPr>
+            <a:spLocks noGrp="1"/>
+          </p:cNvSpPr>
+          <p:nvPr>
+            <p:ph type="sldNum" sz="quarter" idx="12"/>
+          </p:nvPr>
+        </p:nvSpPr>
+        <p:spPr/>
+        <p:txBody>
+          <a:bodyPr/>
+          <a:lstStyle/>
+          <a:p>
+            <a:fld id="{B8A4611B-8B6E-6E4B-B112-D5042F8FC322}" type="slidenum">
+              <a:rPr lang="en-US" smtClean="0"/>
+              <a:t>‹#›</a:t>
+            </a:fld>
+            <a:endParaRPr lang="en-US"/>
+          </a:p>
+        </p:txBody>
+      </p:sp>
+    </p:spTree>
+    <p:extLst>
+      <p:ext uri="{BB962C8B-B14F-4D97-AF65-F5344CB8AC3E}">
+        <p14:creationId xmlns:p14="http://schemas.microsoft.com/office/powerpoint/2010/main" val="1924172834"/>
+      </p:ext>
+    </p:extLst>
+  </p:cSld>
+  <p:clrMapOvr>
+    <a:masterClrMapping/>
+  </p:clrMapOvr>
+</p:sldLayout>
+</file>
+
+<file path=ppt/slideLayouts/slideLayout15.xml><?xml version="1.0" encoding="utf-8"?>
+<p:sldLayout xmlns:a="http://schemas.openxmlformats.org/drawingml/2006/main" xmlns:r="http://schemas.openxmlformats.org/officeDocument/2006/relationships" xmlns:p="http://schemas.openxmlformats.org/presentationml/2006/main" type="twoObj" preserve="1">
+  <p:cSld name="Two Content">
+    <p:spTree>
+      <p:nvGrpSpPr>
+        <p:cNvPr id="1" name=""/>
+        <p:cNvGrpSpPr/>
+        <p:nvPr/>
+      </p:nvGrpSpPr>
+      <p:grpSpPr>
+        <a:xfrm>
+          <a:off x="0" y="0"/>
+          <a:ext cx="0" cy="0"/>
+          <a:chOff x="0" y="0"/>
+          <a:chExt cx="0" cy="0"/>
+        </a:xfrm>
+      </p:grpSpPr>
+      <p:sp>
+        <p:nvSpPr>
+          <p:cNvPr id="2" name="Title 1">
+            <a:extLst>
+              <a:ext uri="{FF2B5EF4-FFF2-40B4-BE49-F238E27FC236}">
+                <a16:creationId xmlns:a16="http://schemas.microsoft.com/office/drawing/2014/main" id="{0CB30BCA-D01B-1FC9-8DBF-09C6EFD20625}"/>
+              </a:ext>
+            </a:extLst>
+          </p:cNvPr>
+          <p:cNvSpPr>
+            <a:spLocks noGrp="1"/>
+          </p:cNvSpPr>
+          <p:nvPr>
+            <p:ph type="title"/>
+          </p:nvPr>
+        </p:nvSpPr>
+        <p:spPr/>
+        <p:txBody>
+          <a:bodyPr/>
+          <a:lstStyle/>
+          <a:p>
+            <a:r>
+              <a:rPr lang="en-US"/>
+              <a:t>Click to edit Master title style</a:t>
+            </a:r>
+          </a:p>
+        </p:txBody>
+      </p:sp>
+      <p:sp>
+        <p:nvSpPr>
+          <p:cNvPr id="3" name="Content Placeholder 2">
+            <a:extLst>
+              <a:ext uri="{FF2B5EF4-FFF2-40B4-BE49-F238E27FC236}">
+                <a16:creationId xmlns:a16="http://schemas.microsoft.com/office/drawing/2014/main" id="{E83BAF0E-57A4-67C0-B8E2-797F9A98DBCF}"/>
+              </a:ext>
+            </a:extLst>
+          </p:cNvPr>
+          <p:cNvSpPr>
+            <a:spLocks noGrp="1"/>
+          </p:cNvSpPr>
+          <p:nvPr>
+            <p:ph sz="half" idx="1"/>
+          </p:nvPr>
+        </p:nvSpPr>
+        <p:spPr>
+          <a:xfrm>
+            <a:off x="838200" y="1825625"/>
+            <a:ext cx="5181600" cy="4351338"/>
+          </a:xfrm>
+        </p:spPr>
+        <p:txBody>
+          <a:bodyPr/>
+          <a:lstStyle/>
+          <a:p>
+            <a:pPr lvl="0"/>
+            <a:r>
+              <a:rPr lang="en-US"/>
+              <a:t>Click to edit Master text styles</a:t>
+            </a:r>
+          </a:p>
+          <a:p>
+            <a:pPr lvl="1"/>
+            <a:r>
+              <a:rPr lang="en-US"/>
+              <a:t>Second level</a:t>
+            </a:r>
+          </a:p>
+          <a:p>
+            <a:pPr lvl="2"/>
+            <a:r>
+              <a:rPr lang="en-US"/>
+              <a:t>Third level</a:t>
+            </a:r>
+          </a:p>
+          <a:p>
+            <a:pPr lvl="3"/>
+            <a:r>
+              <a:rPr lang="en-US"/>
+              <a:t>Fourth level</a:t>
+            </a:r>
+          </a:p>
+          <a:p>
+            <a:pPr lvl="4"/>
+            <a:r>
+              <a:rPr lang="en-US"/>
+              <a:t>Fifth level</a:t>
+            </a:r>
+          </a:p>
+        </p:txBody>
+      </p:sp>
+      <p:sp>
+        <p:nvSpPr>
+          <p:cNvPr id="4" name="Content Placeholder 3">
+            <a:extLst>
+              <a:ext uri="{FF2B5EF4-FFF2-40B4-BE49-F238E27FC236}">
+                <a16:creationId xmlns:a16="http://schemas.microsoft.com/office/drawing/2014/main" id="{9C2F989A-37D6-C944-88B4-363F3008AD67}"/>
+              </a:ext>
+            </a:extLst>
+          </p:cNvPr>
+          <p:cNvSpPr>
+            <a:spLocks noGrp="1"/>
+          </p:cNvSpPr>
+          <p:nvPr>
+            <p:ph sz="half" idx="2"/>
+          </p:nvPr>
+        </p:nvSpPr>
+        <p:spPr>
+          <a:xfrm>
+            <a:off x="6172200" y="1825625"/>
+            <a:ext cx="5181600" cy="4351338"/>
+          </a:xfrm>
+        </p:spPr>
+        <p:txBody>
+          <a:bodyPr/>
+          <a:lstStyle/>
+          <a:p>
+            <a:pPr lvl="0"/>
+            <a:r>
+              <a:rPr lang="en-US"/>
+              <a:t>Click to edit Master text styles</a:t>
+            </a:r>
+          </a:p>
+          <a:p>
+            <a:pPr lvl="1"/>
+            <a:r>
+              <a:rPr lang="en-US"/>
+              <a:t>Second level</a:t>
+            </a:r>
+          </a:p>
+          <a:p>
+            <a:pPr lvl="2"/>
+            <a:r>
+              <a:rPr lang="en-US"/>
+              <a:t>Third level</a:t>
+            </a:r>
+          </a:p>
+          <a:p>
+            <a:pPr lvl="3"/>
+            <a:r>
+              <a:rPr lang="en-US"/>
+              <a:t>Fourth level</a:t>
+            </a:r>
+          </a:p>
+          <a:p>
+            <a:pPr lvl="4"/>
+            <a:r>
+              <a:rPr lang="en-US"/>
+              <a:t>Fifth level</a:t>
+            </a:r>
+          </a:p>
+        </p:txBody>
+      </p:sp>
+      <p:sp>
+        <p:nvSpPr>
+          <p:cNvPr id="5" name="Date Placeholder 4">
+            <a:extLst>
+              <a:ext uri="{FF2B5EF4-FFF2-40B4-BE49-F238E27FC236}">
+                <a16:creationId xmlns:a16="http://schemas.microsoft.com/office/drawing/2014/main" id="{4AD61E06-B099-71E6-EF12-6B1B83F5A636}"/>
+              </a:ext>
+            </a:extLst>
+          </p:cNvPr>
+          <p:cNvSpPr>
+            <a:spLocks noGrp="1"/>
+          </p:cNvSpPr>
+          <p:nvPr>
+            <p:ph type="dt" sz="half" idx="10"/>
+          </p:nvPr>
+        </p:nvSpPr>
+        <p:spPr/>
+        <p:txBody>
+          <a:bodyPr/>
+          <a:lstStyle/>
+          <a:p>
+            <a:fld id="{F10F4B33-885B-F040-8A46-CBE76B527417}" type="datetimeFigureOut">
+              <a:rPr lang="en-US" smtClean="0"/>
+              <a:t>8/31/26</a:t>
+            </a:fld>
+            <a:endParaRPr lang="en-US"/>
+          </a:p>
+        </p:txBody>
+      </p:sp>
+      <p:sp>
+        <p:nvSpPr>
+          <p:cNvPr id="6" name="Footer Placeholder 5">
+            <a:extLst>
+              <a:ext uri="{FF2B5EF4-FFF2-40B4-BE49-F238E27FC236}">
+                <a16:creationId xmlns:a16="http://schemas.microsoft.com/office/drawing/2014/main" id="{DC0A8325-9D50-B0F3-8CAC-307FA6013BB5}"/>
+              </a:ext>
+            </a:extLst>
+          </p:cNvPr>
+          <p:cNvSpPr>
+            <a:spLocks noGrp="1"/>
+          </p:cNvSpPr>
+          <p:nvPr>
+            <p:ph type="ftr" sz="quarter" idx="11"/>
+          </p:nvPr>
+        </p:nvSpPr>
+        <p:spPr/>
+        <p:txBody>
+          <a:bodyPr/>
+          <a:lstStyle/>
+          <a:p>
+            <a:endParaRPr lang="en-US"/>
+          </a:p>
+        </p:txBody>
+      </p:sp>
+      <p:sp>
+        <p:nvSpPr>
+          <p:cNvPr id="7" name="Slide Number Placeholder 6">
+            <a:extLst>
+              <a:ext uri="{FF2B5EF4-FFF2-40B4-BE49-F238E27FC236}">
+                <a16:creationId xmlns:a16="http://schemas.microsoft.com/office/drawing/2014/main" id="{0BE3F35B-9D8B-38F4-356A-880F8F7B07EE}"/>
+              </a:ext>
+            </a:extLst>
+          </p:cNvPr>
+          <p:cNvSpPr>
+            <a:spLocks noGrp="1"/>
+          </p:cNvSpPr>
+          <p:nvPr>
+            <p:ph type="sldNum" sz="quarter" idx="12"/>
+          </p:nvPr>
+        </p:nvSpPr>
+        <p:spPr/>
+        <p:txBody>
+          <a:bodyPr/>
+          <a:lstStyle/>
+          <a:p>
+            <a:fld id="{B8A4611B-8B6E-6E4B-B112-D5042F8FC322}" type="slidenum">
+              <a:rPr lang="en-US" smtClean="0"/>
+              <a:t>‹#›</a:t>
+            </a:fld>
+            <a:endParaRPr lang="en-US"/>
+          </a:p>
+        </p:txBody>
+      </p:sp>
+    </p:spTree>
+    <p:extLst>
+      <p:ext uri="{BB962C8B-B14F-4D97-AF65-F5344CB8AC3E}">
+        <p14:creationId xmlns:p14="http://schemas.microsoft.com/office/powerpoint/2010/main" val="658624053"/>
+      </p:ext>
+    </p:extLst>
+  </p:cSld>
+  <p:clrMapOvr>
+    <a:masterClrMapping/>
+  </p:clrMapOvr>
+</p:sldLayout>
+</file>
+
+<file path=ppt/slideLayouts/slideLayout16.xml><?xml version="1.0" encoding="utf-8"?>
+<p:sldLayout xmlns:a="http://schemas.openxmlformats.org/drawingml/2006/main" xmlns:r="http://schemas.openxmlformats.org/officeDocument/2006/relationships" xmlns:p="http://schemas.openxmlformats.org/presentationml/2006/main" type="twoTxTwoObj" preserve="1">
+  <p:cSld name="Comparison">
+    <p:spTree>
+      <p:nvGrpSpPr>
+        <p:cNvPr id="1" name=""/>
+        <p:cNvGrpSpPr/>
+        <p:nvPr/>
+      </p:nvGrpSpPr>
+      <p:grpSpPr>
+        <a:xfrm>
+          <a:off x="0" y="0"/>
+          <a:ext cx="0" cy="0"/>
+          <a:chOff x="0" y="0"/>
+          <a:chExt cx="0" cy="0"/>
+        </a:xfrm>
+      </p:grpSpPr>
+      <p:sp>
+        <p:nvSpPr>
+          <p:cNvPr id="2" name="Title 1">
+            <a:extLst>
+              <a:ext uri="{FF2B5EF4-FFF2-40B4-BE49-F238E27FC236}">
+                <a16:creationId xmlns:a16="http://schemas.microsoft.com/office/drawing/2014/main" id="{9403BC45-AAE6-A166-7E39-32AC24169DDE}"/>
+              </a:ext>
+            </a:extLst>
+          </p:cNvPr>
+          <p:cNvSpPr>
+            <a:spLocks noGrp="1"/>
+          </p:cNvSpPr>
+          <p:nvPr>
+            <p:ph type="title"/>
+          </p:nvPr>
+        </p:nvSpPr>
+        <p:spPr>
+          <a:xfrm>
+            <a:off x="839788" y="365125"/>
+            <a:ext cx="10515600" cy="1325563"/>
+          </a:xfrm>
+        </p:spPr>
+        <p:txBody>
+          <a:bodyPr/>
+          <a:lstStyle/>
+          <a:p>
+            <a:r>
+              <a:rPr lang="en-US"/>
+              <a:t>Click to edit Master title style</a:t>
+            </a:r>
+          </a:p>
+        </p:txBody>
+      </p:sp>
+      <p:sp>
+        <p:nvSpPr>
+          <p:cNvPr id="3" name="Text Placeholder 2">
+            <a:extLst>
+              <a:ext uri="{FF2B5EF4-FFF2-40B4-BE49-F238E27FC236}">
+                <a16:creationId xmlns:a16="http://schemas.microsoft.com/office/drawing/2014/main" id="{2285A810-A7EF-932C-10DD-FC9F75C245B8}"/>
+              </a:ext>
+            </a:extLst>
+          </p:cNvPr>
+          <p:cNvSpPr>
+            <a:spLocks noGrp="1"/>
+          </p:cNvSpPr>
+          <p:nvPr>
+            <p:ph type="body" idx="1"/>
+          </p:nvPr>
+        </p:nvSpPr>
+        <p:spPr>
+          <a:xfrm>
+            <a:off x="839788" y="1681163"/>
+            <a:ext cx="5157787" cy="823912"/>
+          </a:xfrm>
+        </p:spPr>
+        <p:txBody>
+          <a:bodyPr anchor="b"/>
+          <a:lstStyle>
+            <a:lvl1pPr marL="0" indent="0">
+              <a:buNone/>
+              <a:defRPr sz="2400" b="1"/>
+            </a:lvl1pPr>
+            <a:lvl2pPr marL="457200" indent="0">
+              <a:buNone/>
+              <a:defRPr sz="2000" b="1"/>
+            </a:lvl2pPr>
+            <a:lvl3pPr marL="914400" indent="0">
+              <a:buNone/>
+              <a:defRPr sz="1800" b="1"/>
+            </a:lvl3pPr>
+            <a:lvl4pPr marL="1371600" indent="0">
+              <a:buNone/>
+              <a:defRPr sz="1600" b="1"/>
+            </a:lvl4pPr>
+            <a:lvl5pPr marL="1828800" indent="0">
+              <a:buNone/>
+              <a:defRPr sz="1600" b="1"/>
+            </a:lvl5pPr>
+            <a:lvl6pPr marL="2286000" indent="0">
+              <a:buNone/>
+              <a:defRPr sz="1600" b="1"/>
+            </a:lvl6pPr>
+            <a:lvl7pPr marL="2743200" indent="0">
+              <a:buNone/>
+              <a:defRPr sz="1600" b="1"/>
+            </a:lvl7pPr>
+            <a:lvl8pPr marL="3200400" indent="0">
+              <a:buNone/>
+              <a:defRPr sz="1600" b="1"/>
+            </a:lvl8pPr>
+            <a:lvl9pPr marL="3657600" indent="0">
+              <a:buNone/>
+              <a:defRPr sz="1600" b="1"/>
+            </a:lvl9pPr>
+          </a:lstStyle>
+          <a:p>
+            <a:pPr lvl="0"/>
+            <a:r>
+              <a:rPr lang="en-US"/>
+              <a:t>Click to edit Master text styles</a:t>
+            </a:r>
+          </a:p>
+        </p:txBody>
+      </p:sp>
+      <p:sp>
+        <p:nvSpPr>
+          <p:cNvPr id="4" name="Content Placeholder 3">
+            <a:extLst>
+              <a:ext uri="{FF2B5EF4-FFF2-40B4-BE49-F238E27FC236}">
+                <a16:creationId xmlns:a16="http://schemas.microsoft.com/office/drawing/2014/main" id="{2EF0C13B-29C0-E891-0C3E-C2A28EF89069}"/>
+              </a:ext>
+            </a:extLst>
+          </p:cNvPr>
+          <p:cNvSpPr>
+            <a:spLocks noGrp="1"/>
+          </p:cNvSpPr>
+          <p:nvPr>
+            <p:ph sz="half" idx="2"/>
+          </p:nvPr>
+        </p:nvSpPr>
+        <p:spPr>
+          <a:xfrm>
+            <a:off x="839788" y="2505075"/>
+            <a:ext cx="5157787" cy="3684588"/>
+          </a:xfrm>
+        </p:spPr>
+        <p:txBody>
+          <a:bodyPr/>
+          <a:lstStyle/>
+          <a:p>
+            <a:pPr lvl="0"/>
+            <a:r>
+              <a:rPr lang="en-US"/>
+              <a:t>Click to edit Master text styles</a:t>
+            </a:r>
+          </a:p>
+          <a:p>
+            <a:pPr lvl="1"/>
+            <a:r>
+              <a:rPr lang="en-US"/>
+              <a:t>Second level</a:t>
+            </a:r>
+          </a:p>
+          <a:p>
+            <a:pPr lvl="2"/>
+            <a:r>
+              <a:rPr lang="en-US"/>
+              <a:t>Third level</a:t>
+            </a:r>
+          </a:p>
+          <a:p>
+            <a:pPr lvl="3"/>
+            <a:r>
+              <a:rPr lang="en-US"/>
+              <a:t>Fourth level</a:t>
+            </a:r>
+          </a:p>
+          <a:p>
+            <a:pPr lvl="4"/>
+            <a:r>
+              <a:rPr lang="en-US"/>
+              <a:t>Fifth level</a:t>
+            </a:r>
+          </a:p>
+        </p:txBody>
+      </p:sp>
+      <p:sp>
+        <p:nvSpPr>
+          <p:cNvPr id="5" name="Text Placeholder 4">
+            <a:extLst>
+              <a:ext uri="{FF2B5EF4-FFF2-40B4-BE49-F238E27FC236}">
+                <a16:creationId xmlns:a16="http://schemas.microsoft.com/office/drawing/2014/main" id="{6E475A01-7B0F-28C4-F2D9-EAFC9BEFA893}"/>
+              </a:ext>
+            </a:extLst>
+          </p:cNvPr>
+          <p:cNvSpPr>
+            <a:spLocks noGrp="1"/>
+          </p:cNvSpPr>
+          <p:nvPr>
+            <p:ph type="body" sz="quarter" idx="3"/>
+          </p:nvPr>
+        </p:nvSpPr>
+        <p:spPr>
+          <a:xfrm>
+            <a:off x="6172200" y="1681163"/>
+            <a:ext cx="5183188" cy="823912"/>
+          </a:xfrm>
+        </p:spPr>
+        <p:txBody>
+          <a:bodyPr anchor="b"/>
+          <a:lstStyle>
+            <a:lvl1pPr marL="0" indent="0">
+              <a:buNone/>
+              <a:defRPr sz="2400" b="1"/>
+            </a:lvl1pPr>
+            <a:lvl2pPr marL="457200" indent="0">
+              <a:buNone/>
+              <a:defRPr sz="2000" b="1"/>
+            </a:lvl2pPr>
+            <a:lvl3pPr marL="914400" indent="0">
+              <a:buNone/>
+              <a:defRPr sz="1800" b="1"/>
+            </a:lvl3pPr>
+            <a:lvl4pPr marL="1371600" indent="0">
+              <a:buNone/>
+              <a:defRPr sz="1600" b="1"/>
+            </a:lvl4pPr>
+            <a:lvl5pPr marL="1828800" indent="0">
+              <a:buNone/>
+              <a:defRPr sz="1600" b="1"/>
+            </a:lvl5pPr>
+            <a:lvl6pPr marL="2286000" indent="0">
+              <a:buNone/>
+              <a:defRPr sz="1600" b="1"/>
+            </a:lvl6pPr>
+            <a:lvl7pPr marL="2743200" indent="0">
+              <a:buNone/>
+              <a:defRPr sz="1600" b="1"/>
+            </a:lvl7pPr>
+            <a:lvl8pPr marL="3200400" indent="0">
+              <a:buNone/>
+              <a:defRPr sz="1600" b="1"/>
+            </a:lvl8pPr>
+            <a:lvl9pPr marL="3657600" indent="0">
+              <a:buNone/>
+              <a:defRPr sz="1600" b="1"/>
+            </a:lvl9pPr>
+          </a:lstStyle>
+          <a:p>
+            <a:pPr lvl="0"/>
+            <a:r>
+              <a:rPr lang="en-US"/>
+              <a:t>Click to edit Master text styles</a:t>
+            </a:r>
+          </a:p>
+        </p:txBody>
+      </p:sp>
+      <p:sp>
+        <p:nvSpPr>
+          <p:cNvPr id="6" name="Content Placeholder 5">
+            <a:extLst>
+              <a:ext uri="{FF2B5EF4-FFF2-40B4-BE49-F238E27FC236}">
+                <a16:creationId xmlns:a16="http://schemas.microsoft.com/office/drawing/2014/main" id="{84EFDC8D-2C2C-552D-73CE-A57A34AE50FA}"/>
+              </a:ext>
+            </a:extLst>
+          </p:cNvPr>
+          <p:cNvSpPr>
+            <a:spLocks noGrp="1"/>
+          </p:cNvSpPr>
+          <p:nvPr>
+            <p:ph sz="quarter" idx="4"/>
+          </p:nvPr>
+        </p:nvSpPr>
+        <p:spPr>
+          <a:xfrm>
+            <a:off x="6172200" y="2505075"/>
+            <a:ext cx="5183188" cy="3684588"/>
+          </a:xfrm>
+        </p:spPr>
+        <p:txBody>
+          <a:bodyPr/>
+          <a:lstStyle/>
+          <a:p>
+            <a:pPr lvl="0"/>
+            <a:r>
+              <a:rPr lang="en-US"/>
+              <a:t>Click to edit Master text styles</a:t>
+            </a:r>
+          </a:p>
+          <a:p>
+            <a:pPr lvl="1"/>
+            <a:r>
+              <a:rPr lang="en-US"/>
+              <a:t>Second level</a:t>
+            </a:r>
+          </a:p>
+          <a:p>
+            <a:pPr lvl="2"/>
+            <a:r>
+              <a:rPr lang="en-US"/>
+              <a:t>Third level</a:t>
+            </a:r>
+          </a:p>
+          <a:p>
+            <a:pPr lvl="3"/>
+            <a:r>
+              <a:rPr lang="en-US"/>
+              <a:t>Fourth level</a:t>
+            </a:r>
+          </a:p>
+          <a:p>
+            <a:pPr lvl="4"/>
+            <a:r>
+              <a:rPr lang="en-US"/>
+              <a:t>Fifth level</a:t>
+            </a:r>
+          </a:p>
+        </p:txBody>
+      </p:sp>
+      <p:sp>
+        <p:nvSpPr>
+          <p:cNvPr id="7" name="Date Placeholder 6">
+            <a:extLst>
+              <a:ext uri="{FF2B5EF4-FFF2-40B4-BE49-F238E27FC236}">
+                <a16:creationId xmlns:a16="http://schemas.microsoft.com/office/drawing/2014/main" id="{CD2FBDC0-615C-3226-8F00-016A9CD46732}"/>
+              </a:ext>
+            </a:extLst>
+          </p:cNvPr>
+          <p:cNvSpPr>
+            <a:spLocks noGrp="1"/>
+          </p:cNvSpPr>
+          <p:nvPr>
+            <p:ph type="dt" sz="half" idx="10"/>
+          </p:nvPr>
+        </p:nvSpPr>
+        <p:spPr/>
+        <p:txBody>
+          <a:bodyPr/>
+          <a:lstStyle/>
+          <a:p>
+            <a:fld id="{F10F4B33-885B-F040-8A46-CBE76B527417}" type="datetimeFigureOut">
+              <a:rPr lang="en-US" smtClean="0"/>
+              <a:t>8/31/26</a:t>
+            </a:fld>
+            <a:endParaRPr lang="en-US"/>
+          </a:p>
+        </p:txBody>
+      </p:sp>
+      <p:sp>
+        <p:nvSpPr>
+          <p:cNvPr id="8" name="Footer Placeholder 7">
+            <a:extLst>
+              <a:ext uri="{FF2B5EF4-FFF2-40B4-BE49-F238E27FC236}">
+                <a16:creationId xmlns:a16="http://schemas.microsoft.com/office/drawing/2014/main" id="{76FADCC2-7B0D-2AD0-EC23-4E9A2004DE18}"/>
+              </a:ext>
+            </a:extLst>
+          </p:cNvPr>
+          <p:cNvSpPr>
+            <a:spLocks noGrp="1"/>
+          </p:cNvSpPr>
+          <p:nvPr>
+            <p:ph type="ftr" sz="quarter" idx="11"/>
+          </p:nvPr>
+        </p:nvSpPr>
+        <p:spPr/>
+        <p:txBody>
+          <a:bodyPr/>
+          <a:lstStyle/>
+          <a:p>
+            <a:endParaRPr lang="en-US"/>
+          </a:p>
+        </p:txBody>
+      </p:sp>
+      <p:sp>
+        <p:nvSpPr>
+          <p:cNvPr id="9" name="Slide Number Placeholder 8">
+            <a:extLst>
+              <a:ext uri="{FF2B5EF4-FFF2-40B4-BE49-F238E27FC236}">
+                <a16:creationId xmlns:a16="http://schemas.microsoft.com/office/drawing/2014/main" id="{9B2DA72C-8EF8-2AEE-0393-D4AEE69EBCAA}"/>
+              </a:ext>
+            </a:extLst>
+          </p:cNvPr>
+          <p:cNvSpPr>
+            <a:spLocks noGrp="1"/>
+          </p:cNvSpPr>
+          <p:nvPr>
+            <p:ph type="sldNum" sz="quarter" idx="12"/>
+          </p:nvPr>
+        </p:nvSpPr>
+        <p:spPr/>
+        <p:txBody>
+          <a:bodyPr/>
+          <a:lstStyle/>
+          <a:p>
+            <a:fld id="{B8A4611B-8B6E-6E4B-B112-D5042F8FC322}" type="slidenum">
+              <a:rPr lang="en-US" smtClean="0"/>
+              <a:t>‹#›</a:t>
+            </a:fld>
+            <a:endParaRPr lang="en-US"/>
+          </a:p>
+        </p:txBody>
+      </p:sp>
+    </p:spTree>
+    <p:extLst>
+      <p:ext uri="{BB962C8B-B14F-4D97-AF65-F5344CB8AC3E}">
+        <p14:creationId xmlns:p14="http://schemas.microsoft.com/office/powerpoint/2010/main" val="928515578"/>
+      </p:ext>
+    </p:extLst>
+  </p:cSld>
+  <p:clrMapOvr>
+    <a:masterClrMapping/>
+  </p:clrMapOvr>
+</p:sldLayout>
+</file>
+
+<file path=ppt/slideLayouts/slideLayout17.xml><?xml version="1.0" encoding="utf-8"?>
+<p:sldLayout xmlns:a="http://schemas.openxmlformats.org/drawingml/2006/main" xmlns:r="http://schemas.openxmlformats.org/officeDocument/2006/relationships" xmlns:p="http://schemas.openxmlformats.org/presentationml/2006/main" type="titleOnly" preserve="1">
+  <p:cSld name="Title Only">
+    <p:spTree>
+      <p:nvGrpSpPr>
+        <p:cNvPr id="1" name=""/>
+        <p:cNvGrpSpPr/>
+        <p:nvPr/>
+      </p:nvGrpSpPr>
+      <p:grpSpPr>
+        <a:xfrm>
+          <a:off x="0" y="0"/>
+          <a:ext cx="0" cy="0"/>
+          <a:chOff x="0" y="0"/>
+          <a:chExt cx="0" cy="0"/>
+        </a:xfrm>
+      </p:grpSpPr>
+      <p:sp>
+        <p:nvSpPr>
+          <p:cNvPr id="2" name="Title 1">
+            <a:extLst>
+              <a:ext uri="{FF2B5EF4-FFF2-40B4-BE49-F238E27FC236}">
+                <a16:creationId xmlns:a16="http://schemas.microsoft.com/office/drawing/2014/main" id="{658EB817-E4E6-D4F8-DDC1-E7793E5854FC}"/>
+              </a:ext>
+            </a:extLst>
+          </p:cNvPr>
+          <p:cNvSpPr>
+            <a:spLocks noGrp="1"/>
+          </p:cNvSpPr>
+          <p:nvPr>
+            <p:ph type="title"/>
+          </p:nvPr>
+        </p:nvSpPr>
+        <p:spPr/>
+        <p:txBody>
+          <a:bodyPr/>
+          <a:lstStyle/>
+          <a:p>
+            <a:r>
+              <a:rPr lang="en-US"/>
+              <a:t>Click to edit Master title style</a:t>
+            </a:r>
+          </a:p>
+        </p:txBody>
+      </p:sp>
+      <p:sp>
+        <p:nvSpPr>
+          <p:cNvPr id="3" name="Date Placeholder 2">
+            <a:extLst>
+              <a:ext uri="{FF2B5EF4-FFF2-40B4-BE49-F238E27FC236}">
+                <a16:creationId xmlns:a16="http://schemas.microsoft.com/office/drawing/2014/main" id="{5C3E3F73-655D-0064-5200-4B794E539DDB}"/>
+              </a:ext>
+            </a:extLst>
+          </p:cNvPr>
+          <p:cNvSpPr>
+            <a:spLocks noGrp="1"/>
+          </p:cNvSpPr>
+          <p:nvPr>
+            <p:ph type="dt" sz="half" idx="10"/>
+          </p:nvPr>
+        </p:nvSpPr>
+        <p:spPr/>
+        <p:txBody>
+          <a:bodyPr/>
+          <a:lstStyle/>
+          <a:p>
+            <a:fld id="{F10F4B33-885B-F040-8A46-CBE76B527417}" type="datetimeFigureOut">
+              <a:rPr lang="en-US" smtClean="0"/>
+              <a:t>8/31/26</a:t>
+            </a:fld>
+            <a:endParaRPr lang="en-US"/>
+          </a:p>
+        </p:txBody>
+      </p:sp>
+      <p:sp>
+        <p:nvSpPr>
+          <p:cNvPr id="4" name="Footer Placeholder 3">
+            <a:extLst>
+              <a:ext uri="{FF2B5EF4-FFF2-40B4-BE49-F238E27FC236}">
+                <a16:creationId xmlns:a16="http://schemas.microsoft.com/office/drawing/2014/main" id="{C2B8D2AF-F6EF-9955-C49C-B90B6C6D03D4}"/>
+              </a:ext>
+            </a:extLst>
+          </p:cNvPr>
+          <p:cNvSpPr>
+            <a:spLocks noGrp="1"/>
+          </p:cNvSpPr>
+          <p:nvPr>
+            <p:ph type="ftr" sz="quarter" idx="11"/>
+          </p:nvPr>
+        </p:nvSpPr>
+        <p:spPr/>
+        <p:txBody>
+          <a:bodyPr/>
+          <a:lstStyle/>
+          <a:p>
+            <a:endParaRPr lang="en-US"/>
+          </a:p>
+        </p:txBody>
+      </p:sp>
+      <p:sp>
+        <p:nvSpPr>
+          <p:cNvPr id="5" name="Slide Number Placeholder 4">
+            <a:extLst>
+              <a:ext uri="{FF2B5EF4-FFF2-40B4-BE49-F238E27FC236}">
+                <a16:creationId xmlns:a16="http://schemas.microsoft.com/office/drawing/2014/main" id="{F1321A23-6266-B6F3-0C39-B6347FDC8516}"/>
+              </a:ext>
+            </a:extLst>
+          </p:cNvPr>
+          <p:cNvSpPr>
+            <a:spLocks noGrp="1"/>
+          </p:cNvSpPr>
+          <p:nvPr>
+            <p:ph type="sldNum" sz="quarter" idx="12"/>
+          </p:nvPr>
+        </p:nvSpPr>
+        <p:spPr/>
+        <p:txBody>
+          <a:bodyPr/>
+          <a:lstStyle/>
+          <a:p>
+            <a:fld id="{B8A4611B-8B6E-6E4B-B112-D5042F8FC322}" type="slidenum">
+              <a:rPr lang="en-US" smtClean="0"/>
+              <a:t>‹#›</a:t>
+            </a:fld>
+            <a:endParaRPr lang="en-US"/>
+          </a:p>
+        </p:txBody>
+      </p:sp>
+    </p:spTree>
+    <p:extLst>
+      <p:ext uri="{BB962C8B-B14F-4D97-AF65-F5344CB8AC3E}">
+        <p14:creationId xmlns:p14="http://schemas.microsoft.com/office/powerpoint/2010/main" val="1529666280"/>
+      </p:ext>
+    </p:extLst>
+  </p:cSld>
+  <p:clrMapOvr>
+    <a:masterClrMapping/>
+  </p:clrMapOvr>
+</p:sldLayout>
+</file>
+
+<file path=ppt/slideLayouts/slideLayout18.xml><?xml version="1.0" encoding="utf-8"?>
+<p:sldLayout xmlns:a="http://schemas.openxmlformats.org/drawingml/2006/main" xmlns:r="http://schemas.openxmlformats.org/officeDocument/2006/relationships" xmlns:p="http://schemas.openxmlformats.org/presentationml/2006/main" type="blank" preserve="1">
+  <p:cSld name="Blank">
+    <p:spTree>
+      <p:nvGrpSpPr>
+        <p:cNvPr id="1" name=""/>
+        <p:cNvGrpSpPr/>
+        <p:nvPr/>
+      </p:nvGrpSpPr>
+      <p:grpSpPr>
+        <a:xfrm>
+          <a:off x="0" y="0"/>
+          <a:ext cx="0" cy="0"/>
+          <a:chOff x="0" y="0"/>
+          <a:chExt cx="0" cy="0"/>
+        </a:xfrm>
+      </p:grpSpPr>
+      <p:sp>
+        <p:nvSpPr>
+          <p:cNvPr id="2" name="Date Placeholder 1">
+            <a:extLst>
+              <a:ext uri="{FF2B5EF4-FFF2-40B4-BE49-F238E27FC236}">
+                <a16:creationId xmlns:a16="http://schemas.microsoft.com/office/drawing/2014/main" id="{B1839FF6-7C63-F67D-C72F-B33A233BF14A}"/>
+              </a:ext>
+            </a:extLst>
+          </p:cNvPr>
+          <p:cNvSpPr>
+            <a:spLocks noGrp="1"/>
+          </p:cNvSpPr>
+          <p:nvPr>
+            <p:ph type="dt" sz="half" idx="10"/>
+          </p:nvPr>
+        </p:nvSpPr>
+        <p:spPr/>
+        <p:txBody>
+          <a:bodyPr/>
+          <a:lstStyle/>
+          <a:p>
+            <a:fld id="{F10F4B33-885B-F040-8A46-CBE76B527417}" type="datetimeFigureOut">
+              <a:rPr lang="en-US" smtClean="0"/>
+              <a:t>8/31/26</a:t>
+            </a:fld>
+            <a:endParaRPr lang="en-US"/>
+          </a:p>
+        </p:txBody>
+      </p:sp>
+      <p:sp>
+        <p:nvSpPr>
+          <p:cNvPr id="3" name="Footer Placeholder 2">
+            <a:extLst>
+              <a:ext uri="{FF2B5EF4-FFF2-40B4-BE49-F238E27FC236}">
+                <a16:creationId xmlns:a16="http://schemas.microsoft.com/office/drawing/2014/main" id="{3D37A911-213C-2298-1E0F-4952B2B3FEF2}"/>
+              </a:ext>
+            </a:extLst>
+          </p:cNvPr>
+          <p:cNvSpPr>
+            <a:spLocks noGrp="1"/>
+          </p:cNvSpPr>
+          <p:nvPr>
+            <p:ph type="ftr" sz="quarter" idx="11"/>
+          </p:nvPr>
+        </p:nvSpPr>
+        <p:spPr/>
+        <p:txBody>
+          <a:bodyPr/>
+          <a:lstStyle/>
+          <a:p>
+            <a:endParaRPr lang="en-US"/>
+          </a:p>
+        </p:txBody>
+      </p:sp>
+      <p:sp>
+        <p:nvSpPr>
+          <p:cNvPr id="4" name="Slide Number Placeholder 3">
+            <a:extLst>
+              <a:ext uri="{FF2B5EF4-FFF2-40B4-BE49-F238E27FC236}">
+                <a16:creationId xmlns:a16="http://schemas.microsoft.com/office/drawing/2014/main" id="{BA034F35-6595-5F92-049C-3DEA7F8854FF}"/>
+              </a:ext>
+            </a:extLst>
+          </p:cNvPr>
+          <p:cNvSpPr>
+            <a:spLocks noGrp="1"/>
+          </p:cNvSpPr>
+          <p:nvPr>
+            <p:ph type="sldNum" sz="quarter" idx="12"/>
+          </p:nvPr>
+        </p:nvSpPr>
+        <p:spPr/>
+        <p:txBody>
+          <a:bodyPr/>
+          <a:lstStyle/>
+          <a:p>
+            <a:fld id="{B8A4611B-8B6E-6E4B-B112-D5042F8FC322}" type="slidenum">
+              <a:rPr lang="en-US" smtClean="0"/>
+              <a:t>‹#›</a:t>
+            </a:fld>
+            <a:endParaRPr lang="en-US"/>
+          </a:p>
+        </p:txBody>
+      </p:sp>
+    </p:spTree>
+    <p:extLst>
+      <p:ext uri="{BB962C8B-B14F-4D97-AF65-F5344CB8AC3E}">
+        <p14:creationId xmlns:p14="http://schemas.microsoft.com/office/powerpoint/2010/main" val="2858237202"/>
+      </p:ext>
+    </p:extLst>
+  </p:cSld>
+  <p:clrMapOvr>
+    <a:masterClrMapping/>
+  </p:clrMapOvr>
+</p:sldLayout>
+</file>
+
+<file path=ppt/slideLayouts/slideLayout19.xml><?xml version="1.0" encoding="utf-8"?>
+<p:sldLayout xmlns:a="http://schemas.openxmlformats.org/drawingml/2006/main" xmlns:r="http://schemas.openxmlformats.org/officeDocument/2006/relationships" xmlns:p="http://schemas.openxmlformats.org/presentationml/2006/main" type="objTx" preserve="1">
+  <p:cSld name="Content with Caption">
+    <p:spTree>
+      <p:nvGrpSpPr>
+        <p:cNvPr id="1" name=""/>
+        <p:cNvGrpSpPr/>
+        <p:nvPr/>
+      </p:nvGrpSpPr>
+      <p:grpSpPr>
+        <a:xfrm>
+          <a:off x="0" y="0"/>
+          <a:ext cx="0" cy="0"/>
+          <a:chOff x="0" y="0"/>
+          <a:chExt cx="0" cy="0"/>
+        </a:xfrm>
+      </p:grpSpPr>
+      <p:sp>
+        <p:nvSpPr>
+          <p:cNvPr id="2" name="Title 1">
+            <a:extLst>
+              <a:ext uri="{FF2B5EF4-FFF2-40B4-BE49-F238E27FC236}">
+                <a16:creationId xmlns:a16="http://schemas.microsoft.com/office/drawing/2014/main" id="{A7510A22-CB8B-38AF-2C12-76319530F547}"/>
+              </a:ext>
+            </a:extLst>
+          </p:cNvPr>
+          <p:cNvSpPr>
+            <a:spLocks noGrp="1"/>
+          </p:cNvSpPr>
+          <p:nvPr>
+            <p:ph type="title"/>
+          </p:nvPr>
+        </p:nvSpPr>
+        <p:spPr>
+          <a:xfrm>
+            <a:off x="839788" y="457200"/>
+            <a:ext cx="3932237" cy="1600200"/>
+          </a:xfrm>
+        </p:spPr>
+        <p:txBody>
+          <a:bodyPr anchor="b"/>
+          <a:lstStyle>
+            <a:lvl1pPr>
+              <a:defRPr sz="3200"/>
+            </a:lvl1pPr>
+          </a:lstStyle>
+          <a:p>
+            <a:r>
+              <a:rPr lang="en-US"/>
+              <a:t>Click to edit Master title style</a:t>
+            </a:r>
+          </a:p>
+        </p:txBody>
+      </p:sp>
+      <p:sp>
+        <p:nvSpPr>
+          <p:cNvPr id="3" name="Content Placeholder 2">
+            <a:extLst>
+              <a:ext uri="{FF2B5EF4-FFF2-40B4-BE49-F238E27FC236}">
+                <a16:creationId xmlns:a16="http://schemas.microsoft.com/office/drawing/2014/main" id="{91A0E481-E6B6-69E8-7FF3-F8B16FA234F5}"/>
+              </a:ext>
+            </a:extLst>
+          </p:cNvPr>
+          <p:cNvSpPr>
+            <a:spLocks noGrp="1"/>
+          </p:cNvSpPr>
+          <p:nvPr>
+            <p:ph idx="1"/>
+          </p:nvPr>
+        </p:nvSpPr>
+        <p:spPr>
+          <a:xfrm>
+            <a:off x="5183188" y="987425"/>
+            <a:ext cx="6172200" cy="4873625"/>
+          </a:xfrm>
+        </p:spPr>
+        <p:txBody>
+          <a:bodyPr/>
+          <a:lstStyle>
+            <a:lvl1pPr>
+              <a:defRPr sz="3200"/>
+            </a:lvl1pPr>
+            <a:lvl2pPr>
+              <a:defRPr sz="2800"/>
+            </a:lvl2pPr>
+            <a:lvl3pPr>
+              <a:defRPr sz="2400"/>
+            </a:lvl3pPr>
+            <a:lvl4pPr>
+              <a:defRPr sz="2000"/>
+            </a:lvl4pPr>
+            <a:lvl5pPr>
+              <a:defRPr sz="2000"/>
+            </a:lvl5pPr>
+            <a:lvl6pPr>
+              <a:defRPr sz="2000"/>
+            </a:lvl6pPr>
+            <a:lvl7pPr>
+              <a:defRPr sz="2000"/>
+            </a:lvl7pPr>
+            <a:lvl8pPr>
+              <a:defRPr sz="2000"/>
+            </a:lvl8pPr>
+            <a:lvl9pPr>
+              <a:defRPr sz="2000"/>
+            </a:lvl9pPr>
+          </a:lstStyle>
+          <a:p>
+            <a:pPr lvl="0"/>
+            <a:r>
+              <a:rPr lang="en-US"/>
+              <a:t>Click to edit Master text styles</a:t>
+            </a:r>
+          </a:p>
+          <a:p>
+            <a:pPr lvl="1"/>
+            <a:r>
+              <a:rPr lang="en-US"/>
+              <a:t>Second level</a:t>
+            </a:r>
+          </a:p>
+          <a:p>
+            <a:pPr lvl="2"/>
+            <a:r>
+              <a:rPr lang="en-US"/>
+              <a:t>Third level</a:t>
+            </a:r>
+          </a:p>
+          <a:p>
+            <a:pPr lvl="3"/>
+            <a:r>
+              <a:rPr lang="en-US"/>
+              <a:t>Fourth level</a:t>
+            </a:r>
+          </a:p>
+          <a:p>
+            <a:pPr lvl="4"/>
+            <a:r>
+              <a:rPr lang="en-US"/>
+              <a:t>Fifth level</a:t>
+            </a:r>
+          </a:p>
+        </p:txBody>
+      </p:sp>
+      <p:sp>
+        <p:nvSpPr>
+          <p:cNvPr id="4" name="Text Placeholder 3">
+            <a:extLst>
+              <a:ext uri="{FF2B5EF4-FFF2-40B4-BE49-F238E27FC236}">
+                <a16:creationId xmlns:a16="http://schemas.microsoft.com/office/drawing/2014/main" id="{9B7AEEB1-E93E-D994-B37B-1A3630E3526E}"/>
+              </a:ext>
+            </a:extLst>
+          </p:cNvPr>
+          <p:cNvSpPr>
+            <a:spLocks noGrp="1"/>
+          </p:cNvSpPr>
+          <p:nvPr>
+            <p:ph type="body" sz="half" idx="2"/>
+          </p:nvPr>
+        </p:nvSpPr>
+        <p:spPr>
+          <a:xfrm>
+            <a:off x="839788" y="2057400"/>
+            <a:ext cx="3932237" cy="3811588"/>
+          </a:xfrm>
+        </p:spPr>
+        <p:txBody>
+          <a:bodyPr/>
+          <a:lstStyle>
+            <a:lvl1pPr marL="0" indent="0">
+              <a:buNone/>
+              <a:defRPr sz="1600"/>
+            </a:lvl1pPr>
+            <a:lvl2pPr marL="457200" indent="0">
+              <a:buNone/>
+              <a:defRPr sz="1400"/>
+            </a:lvl2pPr>
+            <a:lvl3pPr marL="914400" indent="0">
+              <a:buNone/>
+              <a:defRPr sz="1200"/>
+            </a:lvl3pPr>
+            <a:lvl4pPr marL="1371600" indent="0">
+              <a:buNone/>
+              <a:defRPr sz="1000"/>
+            </a:lvl4pPr>
+            <a:lvl5pPr marL="1828800" indent="0">
+              <a:buNone/>
+              <a:defRPr sz="1000"/>
+            </a:lvl5pPr>
+            <a:lvl6pPr marL="2286000" indent="0">
+              <a:buNone/>
+              <a:defRPr sz="1000"/>
+            </a:lvl6pPr>
+            <a:lvl7pPr marL="2743200" indent="0">
+              <a:buNone/>
+              <a:defRPr sz="1000"/>
+            </a:lvl7pPr>
+            <a:lvl8pPr marL="3200400" indent="0">
+              <a:buNone/>
+              <a:defRPr sz="1000"/>
+            </a:lvl8pPr>
+            <a:lvl9pPr marL="3657600" indent="0">
+              <a:buNone/>
+              <a:defRPr sz="1000"/>
+            </a:lvl9pPr>
+          </a:lstStyle>
+          <a:p>
+            <a:pPr lvl="0"/>
+            <a:r>
+              <a:rPr lang="en-US"/>
+              <a:t>Click to edit Master text styles</a:t>
+            </a:r>
+          </a:p>
+        </p:txBody>
+      </p:sp>
+      <p:sp>
+        <p:nvSpPr>
+          <p:cNvPr id="5" name="Date Placeholder 4">
+            <a:extLst>
+              <a:ext uri="{FF2B5EF4-FFF2-40B4-BE49-F238E27FC236}">
+                <a16:creationId xmlns:a16="http://schemas.microsoft.com/office/drawing/2014/main" id="{DC571D4A-43E6-75F0-CA49-B7BEBFE7E152}"/>
+              </a:ext>
+            </a:extLst>
+          </p:cNvPr>
+          <p:cNvSpPr>
+            <a:spLocks noGrp="1"/>
+          </p:cNvSpPr>
+          <p:nvPr>
+            <p:ph type="dt" sz="half" idx="10"/>
+          </p:nvPr>
+        </p:nvSpPr>
+        <p:spPr/>
+        <p:txBody>
+          <a:bodyPr/>
+          <a:lstStyle/>
+          <a:p>
+            <a:fld id="{F10F4B33-885B-F040-8A46-CBE76B527417}" type="datetimeFigureOut">
+              <a:rPr lang="en-US" smtClean="0"/>
+              <a:t>8/31/26</a:t>
+            </a:fld>
+            <a:endParaRPr lang="en-US"/>
+          </a:p>
+        </p:txBody>
+      </p:sp>
+      <p:sp>
+        <p:nvSpPr>
+          <p:cNvPr id="6" name="Footer Placeholder 5">
+            <a:extLst>
+              <a:ext uri="{FF2B5EF4-FFF2-40B4-BE49-F238E27FC236}">
+                <a16:creationId xmlns:a16="http://schemas.microsoft.com/office/drawing/2014/main" id="{0389EA1A-8430-4F62-3734-C2A69AA3FE0C}"/>
+              </a:ext>
+            </a:extLst>
+          </p:cNvPr>
+          <p:cNvSpPr>
+            <a:spLocks noGrp="1"/>
+          </p:cNvSpPr>
+          <p:nvPr>
+            <p:ph type="ftr" sz="quarter" idx="11"/>
+          </p:nvPr>
+        </p:nvSpPr>
+        <p:spPr/>
+        <p:txBody>
+          <a:bodyPr/>
+          <a:lstStyle/>
+          <a:p>
+            <a:endParaRPr lang="en-US"/>
+          </a:p>
+        </p:txBody>
+      </p:sp>
+      <p:sp>
+        <p:nvSpPr>
+          <p:cNvPr id="7" name="Slide Number Placeholder 6">
+            <a:extLst>
+              <a:ext uri="{FF2B5EF4-FFF2-40B4-BE49-F238E27FC236}">
+                <a16:creationId xmlns:a16="http://schemas.microsoft.com/office/drawing/2014/main" id="{0DDE5DC2-50A1-5E32-4844-E68DA4049A4F}"/>
+              </a:ext>
+            </a:extLst>
+          </p:cNvPr>
+          <p:cNvSpPr>
+            <a:spLocks noGrp="1"/>
+          </p:cNvSpPr>
+          <p:nvPr>
+            <p:ph type="sldNum" sz="quarter" idx="12"/>
+          </p:nvPr>
+        </p:nvSpPr>
+        <p:spPr/>
+        <p:txBody>
+          <a:bodyPr/>
+          <a:lstStyle/>
+          <a:p>
+            <a:fld id="{B8A4611B-8B6E-6E4B-B112-D5042F8FC322}" type="slidenum">
+              <a:rPr lang="en-US" smtClean="0"/>
+              <a:t>‹#›</a:t>
+            </a:fld>
+            <a:endParaRPr lang="en-US"/>
+          </a:p>
+        </p:txBody>
+      </p:sp>
+    </p:spTree>
+    <p:extLst>
+      <p:ext uri="{BB962C8B-B14F-4D97-AF65-F5344CB8AC3E}">
+        <p14:creationId xmlns:p14="http://schemas.microsoft.com/office/powerpoint/2010/main" val="3286897741"/>
+      </p:ext>
+    </p:extLst>
+  </p:cSld>
+  <p:clrMapOvr>
+    <a:masterClrMapping/>
+  </p:clrMapOvr>
+</p:sldLayout>
+</file>
+
 <file path=ppt/slideLayouts/slideLayout2.xml><?xml version="1.0" encoding="utf-8"?>
 <p:sldLayout xmlns:a="http://schemas.openxmlformats.org/drawingml/2006/main" xmlns:r="http://schemas.openxmlformats.org/officeDocument/2006/relationships" xmlns:p="http://schemas.openxmlformats.org/presentationml/2006/main" type="obj" preserve="1">
   <p:cSld name="Title and Content">
@@ -2398,6 +4415,700 @@
     <p:extLst>
       <p:ext uri="{BB962C8B-B14F-4D97-AF65-F5344CB8AC3E}">
         <p14:creationId xmlns:p14="http://schemas.microsoft.com/office/powerpoint/2010/main" val="3888852957"/>
+      </p:ext>
+    </p:extLst>
+  </p:cSld>
+  <p:clrMapOvr>
+    <a:masterClrMapping/>
+  </p:clrMapOvr>
+</p:sldLayout>
+</file>
+
+<file path=ppt/slideLayouts/slideLayout20.xml><?xml version="1.0" encoding="utf-8"?>
+<p:sldLayout xmlns:a="http://schemas.openxmlformats.org/drawingml/2006/main" xmlns:r="http://schemas.openxmlformats.org/officeDocument/2006/relationships" xmlns:p="http://schemas.openxmlformats.org/presentationml/2006/main" type="picTx" preserve="1">
+  <p:cSld name="Picture with Caption">
+    <p:spTree>
+      <p:nvGrpSpPr>
+        <p:cNvPr id="1" name=""/>
+        <p:cNvGrpSpPr/>
+        <p:nvPr/>
+      </p:nvGrpSpPr>
+      <p:grpSpPr>
+        <a:xfrm>
+          <a:off x="0" y="0"/>
+          <a:ext cx="0" cy="0"/>
+          <a:chOff x="0" y="0"/>
+          <a:chExt cx="0" cy="0"/>
+        </a:xfrm>
+      </p:grpSpPr>
+      <p:sp>
+        <p:nvSpPr>
+          <p:cNvPr id="2" name="Title 1">
+            <a:extLst>
+              <a:ext uri="{FF2B5EF4-FFF2-40B4-BE49-F238E27FC236}">
+                <a16:creationId xmlns:a16="http://schemas.microsoft.com/office/drawing/2014/main" id="{93EABAE4-7B47-485D-2FBB-DDCC7AB1F006}"/>
+              </a:ext>
+            </a:extLst>
+          </p:cNvPr>
+          <p:cNvSpPr>
+            <a:spLocks noGrp="1"/>
+          </p:cNvSpPr>
+          <p:nvPr>
+            <p:ph type="title"/>
+          </p:nvPr>
+        </p:nvSpPr>
+        <p:spPr>
+          <a:xfrm>
+            <a:off x="839788" y="457200"/>
+            <a:ext cx="3932237" cy="1600200"/>
+          </a:xfrm>
+        </p:spPr>
+        <p:txBody>
+          <a:bodyPr anchor="b"/>
+          <a:lstStyle>
+            <a:lvl1pPr>
+              <a:defRPr sz="3200"/>
+            </a:lvl1pPr>
+          </a:lstStyle>
+          <a:p>
+            <a:r>
+              <a:rPr lang="en-US"/>
+              <a:t>Click to edit Master title style</a:t>
+            </a:r>
+          </a:p>
+        </p:txBody>
+      </p:sp>
+      <p:sp>
+        <p:nvSpPr>
+          <p:cNvPr id="3" name="Picture Placeholder 2">
+            <a:extLst>
+              <a:ext uri="{FF2B5EF4-FFF2-40B4-BE49-F238E27FC236}">
+                <a16:creationId xmlns:a16="http://schemas.microsoft.com/office/drawing/2014/main" id="{834E2F96-2FFA-A0B7-4B18-EF12FCB90F2C}"/>
+              </a:ext>
+            </a:extLst>
+          </p:cNvPr>
+          <p:cNvSpPr>
+            <a:spLocks noGrp="1"/>
+          </p:cNvSpPr>
+          <p:nvPr>
+            <p:ph type="pic" idx="1"/>
+          </p:nvPr>
+        </p:nvSpPr>
+        <p:spPr>
+          <a:xfrm>
+            <a:off x="5183188" y="987425"/>
+            <a:ext cx="6172200" cy="4873625"/>
+          </a:xfrm>
+        </p:spPr>
+        <p:txBody>
+          <a:bodyPr/>
+          <a:lstStyle>
+            <a:lvl1pPr marL="0" indent="0">
+              <a:buNone/>
+              <a:defRPr sz="3200"/>
+            </a:lvl1pPr>
+            <a:lvl2pPr marL="457200" indent="0">
+              <a:buNone/>
+              <a:defRPr sz="2800"/>
+            </a:lvl2pPr>
+            <a:lvl3pPr marL="914400" indent="0">
+              <a:buNone/>
+              <a:defRPr sz="2400"/>
+            </a:lvl3pPr>
+            <a:lvl4pPr marL="1371600" indent="0">
+              <a:buNone/>
+              <a:defRPr sz="2000"/>
+            </a:lvl4pPr>
+            <a:lvl5pPr marL="1828800" indent="0">
+              <a:buNone/>
+              <a:defRPr sz="2000"/>
+            </a:lvl5pPr>
+            <a:lvl6pPr marL="2286000" indent="0">
+              <a:buNone/>
+              <a:defRPr sz="2000"/>
+            </a:lvl6pPr>
+            <a:lvl7pPr marL="2743200" indent="0">
+              <a:buNone/>
+              <a:defRPr sz="2000"/>
+            </a:lvl7pPr>
+            <a:lvl8pPr marL="3200400" indent="0">
+              <a:buNone/>
+              <a:defRPr sz="2000"/>
+            </a:lvl8pPr>
+            <a:lvl9pPr marL="3657600" indent="0">
+              <a:buNone/>
+              <a:defRPr sz="2000"/>
+            </a:lvl9pPr>
+          </a:lstStyle>
+          <a:p>
+            <a:endParaRPr lang="en-US"/>
+          </a:p>
+        </p:txBody>
+      </p:sp>
+      <p:sp>
+        <p:nvSpPr>
+          <p:cNvPr id="4" name="Text Placeholder 3">
+            <a:extLst>
+              <a:ext uri="{FF2B5EF4-FFF2-40B4-BE49-F238E27FC236}">
+                <a16:creationId xmlns:a16="http://schemas.microsoft.com/office/drawing/2014/main" id="{CA3C1D7F-47E4-222F-ED64-59B5220C60E2}"/>
+              </a:ext>
+            </a:extLst>
+          </p:cNvPr>
+          <p:cNvSpPr>
+            <a:spLocks noGrp="1"/>
+          </p:cNvSpPr>
+          <p:nvPr>
+            <p:ph type="body" sz="half" idx="2"/>
+          </p:nvPr>
+        </p:nvSpPr>
+        <p:spPr>
+          <a:xfrm>
+            <a:off x="839788" y="2057400"/>
+            <a:ext cx="3932237" cy="3811588"/>
+          </a:xfrm>
+        </p:spPr>
+        <p:txBody>
+          <a:bodyPr/>
+          <a:lstStyle>
+            <a:lvl1pPr marL="0" indent="0">
+              <a:buNone/>
+              <a:defRPr sz="1600"/>
+            </a:lvl1pPr>
+            <a:lvl2pPr marL="457200" indent="0">
+              <a:buNone/>
+              <a:defRPr sz="1400"/>
+            </a:lvl2pPr>
+            <a:lvl3pPr marL="914400" indent="0">
+              <a:buNone/>
+              <a:defRPr sz="1200"/>
+            </a:lvl3pPr>
+            <a:lvl4pPr marL="1371600" indent="0">
+              <a:buNone/>
+              <a:defRPr sz="1000"/>
+            </a:lvl4pPr>
+            <a:lvl5pPr marL="1828800" indent="0">
+              <a:buNone/>
+              <a:defRPr sz="1000"/>
+            </a:lvl5pPr>
+            <a:lvl6pPr marL="2286000" indent="0">
+              <a:buNone/>
+              <a:defRPr sz="1000"/>
+            </a:lvl6pPr>
+            <a:lvl7pPr marL="2743200" indent="0">
+              <a:buNone/>
+              <a:defRPr sz="1000"/>
+            </a:lvl7pPr>
+            <a:lvl8pPr marL="3200400" indent="0">
+              <a:buNone/>
+              <a:defRPr sz="1000"/>
+            </a:lvl8pPr>
+            <a:lvl9pPr marL="3657600" indent="0">
+              <a:buNone/>
+              <a:defRPr sz="1000"/>
+            </a:lvl9pPr>
+          </a:lstStyle>
+          <a:p>
+            <a:pPr lvl="0"/>
+            <a:r>
+              <a:rPr lang="en-US"/>
+              <a:t>Click to edit Master text styles</a:t>
+            </a:r>
+          </a:p>
+        </p:txBody>
+      </p:sp>
+      <p:sp>
+        <p:nvSpPr>
+          <p:cNvPr id="5" name="Date Placeholder 4">
+            <a:extLst>
+              <a:ext uri="{FF2B5EF4-FFF2-40B4-BE49-F238E27FC236}">
+                <a16:creationId xmlns:a16="http://schemas.microsoft.com/office/drawing/2014/main" id="{6E07A9FF-CF1E-3BF4-58F2-2482C2436528}"/>
+              </a:ext>
+            </a:extLst>
+          </p:cNvPr>
+          <p:cNvSpPr>
+            <a:spLocks noGrp="1"/>
+          </p:cNvSpPr>
+          <p:nvPr>
+            <p:ph type="dt" sz="half" idx="10"/>
+          </p:nvPr>
+        </p:nvSpPr>
+        <p:spPr/>
+        <p:txBody>
+          <a:bodyPr/>
+          <a:lstStyle/>
+          <a:p>
+            <a:fld id="{F10F4B33-885B-F040-8A46-CBE76B527417}" type="datetimeFigureOut">
+              <a:rPr lang="en-US" smtClean="0"/>
+              <a:t>8/31/26</a:t>
+            </a:fld>
+            <a:endParaRPr lang="en-US"/>
+          </a:p>
+        </p:txBody>
+      </p:sp>
+      <p:sp>
+        <p:nvSpPr>
+          <p:cNvPr id="6" name="Footer Placeholder 5">
+            <a:extLst>
+              <a:ext uri="{FF2B5EF4-FFF2-40B4-BE49-F238E27FC236}">
+                <a16:creationId xmlns:a16="http://schemas.microsoft.com/office/drawing/2014/main" id="{2F5C95FC-76E2-1BD3-BCD4-DE4AF3AF8161}"/>
+              </a:ext>
+            </a:extLst>
+          </p:cNvPr>
+          <p:cNvSpPr>
+            <a:spLocks noGrp="1"/>
+          </p:cNvSpPr>
+          <p:nvPr>
+            <p:ph type="ftr" sz="quarter" idx="11"/>
+          </p:nvPr>
+        </p:nvSpPr>
+        <p:spPr/>
+        <p:txBody>
+          <a:bodyPr/>
+          <a:lstStyle/>
+          <a:p>
+            <a:endParaRPr lang="en-US"/>
+          </a:p>
+        </p:txBody>
+      </p:sp>
+      <p:sp>
+        <p:nvSpPr>
+          <p:cNvPr id="7" name="Slide Number Placeholder 6">
+            <a:extLst>
+              <a:ext uri="{FF2B5EF4-FFF2-40B4-BE49-F238E27FC236}">
+                <a16:creationId xmlns:a16="http://schemas.microsoft.com/office/drawing/2014/main" id="{AC204EA8-5590-C03E-8F83-FDFEDC38CDFC}"/>
+              </a:ext>
+            </a:extLst>
+          </p:cNvPr>
+          <p:cNvSpPr>
+            <a:spLocks noGrp="1"/>
+          </p:cNvSpPr>
+          <p:nvPr>
+            <p:ph type="sldNum" sz="quarter" idx="12"/>
+          </p:nvPr>
+        </p:nvSpPr>
+        <p:spPr/>
+        <p:txBody>
+          <a:bodyPr/>
+          <a:lstStyle/>
+          <a:p>
+            <a:fld id="{B8A4611B-8B6E-6E4B-B112-D5042F8FC322}" type="slidenum">
+              <a:rPr lang="en-US" smtClean="0"/>
+              <a:t>‹#›</a:t>
+            </a:fld>
+            <a:endParaRPr lang="en-US"/>
+          </a:p>
+        </p:txBody>
+      </p:sp>
+    </p:spTree>
+    <p:extLst>
+      <p:ext uri="{BB962C8B-B14F-4D97-AF65-F5344CB8AC3E}">
+        <p14:creationId xmlns:p14="http://schemas.microsoft.com/office/powerpoint/2010/main" val="3681116097"/>
+      </p:ext>
+    </p:extLst>
+  </p:cSld>
+  <p:clrMapOvr>
+    <a:masterClrMapping/>
+  </p:clrMapOvr>
+</p:sldLayout>
+</file>
+
+<file path=ppt/slideLayouts/slideLayout21.xml><?xml version="1.0" encoding="utf-8"?>
+<p:sldLayout xmlns:a="http://schemas.openxmlformats.org/drawingml/2006/main" xmlns:r="http://schemas.openxmlformats.org/officeDocument/2006/relationships" xmlns:p="http://schemas.openxmlformats.org/presentationml/2006/main" type="vertTx" preserve="1">
+  <p:cSld name="Title and Vertical Text">
+    <p:spTree>
+      <p:nvGrpSpPr>
+        <p:cNvPr id="1" name=""/>
+        <p:cNvGrpSpPr/>
+        <p:nvPr/>
+      </p:nvGrpSpPr>
+      <p:grpSpPr>
+        <a:xfrm>
+          <a:off x="0" y="0"/>
+          <a:ext cx="0" cy="0"/>
+          <a:chOff x="0" y="0"/>
+          <a:chExt cx="0" cy="0"/>
+        </a:xfrm>
+      </p:grpSpPr>
+      <p:sp>
+        <p:nvSpPr>
+          <p:cNvPr id="2" name="Title 1">
+            <a:extLst>
+              <a:ext uri="{FF2B5EF4-FFF2-40B4-BE49-F238E27FC236}">
+                <a16:creationId xmlns:a16="http://schemas.microsoft.com/office/drawing/2014/main" id="{2CC7AF94-EB0D-FBAC-D309-8373E2DD7B0B}"/>
+              </a:ext>
+            </a:extLst>
+          </p:cNvPr>
+          <p:cNvSpPr>
+            <a:spLocks noGrp="1"/>
+          </p:cNvSpPr>
+          <p:nvPr>
+            <p:ph type="title"/>
+          </p:nvPr>
+        </p:nvSpPr>
+        <p:spPr/>
+        <p:txBody>
+          <a:bodyPr/>
+          <a:lstStyle/>
+          <a:p>
+            <a:r>
+              <a:rPr lang="en-US"/>
+              <a:t>Click to edit Master title style</a:t>
+            </a:r>
+          </a:p>
+        </p:txBody>
+      </p:sp>
+      <p:sp>
+        <p:nvSpPr>
+          <p:cNvPr id="3" name="Vertical Text Placeholder 2">
+            <a:extLst>
+              <a:ext uri="{FF2B5EF4-FFF2-40B4-BE49-F238E27FC236}">
+                <a16:creationId xmlns:a16="http://schemas.microsoft.com/office/drawing/2014/main" id="{718EF8D8-3F7D-EE98-6B00-AA9047481AA4}"/>
+              </a:ext>
+            </a:extLst>
+          </p:cNvPr>
+          <p:cNvSpPr>
+            <a:spLocks noGrp="1"/>
+          </p:cNvSpPr>
+          <p:nvPr>
+            <p:ph type="body" orient="vert" idx="1"/>
+          </p:nvPr>
+        </p:nvSpPr>
+        <p:spPr/>
+        <p:txBody>
+          <a:bodyPr vert="eaVert"/>
+          <a:lstStyle/>
+          <a:p>
+            <a:pPr lvl="0"/>
+            <a:r>
+              <a:rPr lang="en-US"/>
+              <a:t>Click to edit Master text styles</a:t>
+            </a:r>
+          </a:p>
+          <a:p>
+            <a:pPr lvl="1"/>
+            <a:r>
+              <a:rPr lang="en-US"/>
+              <a:t>Second level</a:t>
+            </a:r>
+          </a:p>
+          <a:p>
+            <a:pPr lvl="2"/>
+            <a:r>
+              <a:rPr lang="en-US"/>
+              <a:t>Third level</a:t>
+            </a:r>
+          </a:p>
+          <a:p>
+            <a:pPr lvl="3"/>
+            <a:r>
+              <a:rPr lang="en-US"/>
+              <a:t>Fourth level</a:t>
+            </a:r>
+          </a:p>
+          <a:p>
+            <a:pPr lvl="4"/>
+            <a:r>
+              <a:rPr lang="en-US"/>
+              <a:t>Fifth level</a:t>
+            </a:r>
+          </a:p>
+        </p:txBody>
+      </p:sp>
+      <p:sp>
+        <p:nvSpPr>
+          <p:cNvPr id="4" name="Date Placeholder 3">
+            <a:extLst>
+              <a:ext uri="{FF2B5EF4-FFF2-40B4-BE49-F238E27FC236}">
+                <a16:creationId xmlns:a16="http://schemas.microsoft.com/office/drawing/2014/main" id="{D869403C-B406-79A5-B6AE-4C1064C8377B}"/>
+              </a:ext>
+            </a:extLst>
+          </p:cNvPr>
+          <p:cNvSpPr>
+            <a:spLocks noGrp="1"/>
+          </p:cNvSpPr>
+          <p:nvPr>
+            <p:ph type="dt" sz="half" idx="10"/>
+          </p:nvPr>
+        </p:nvSpPr>
+        <p:spPr/>
+        <p:txBody>
+          <a:bodyPr/>
+          <a:lstStyle/>
+          <a:p>
+            <a:fld id="{F10F4B33-885B-F040-8A46-CBE76B527417}" type="datetimeFigureOut">
+              <a:rPr lang="en-US" smtClean="0"/>
+              <a:t>8/31/26</a:t>
+            </a:fld>
+            <a:endParaRPr lang="en-US"/>
+          </a:p>
+        </p:txBody>
+      </p:sp>
+      <p:sp>
+        <p:nvSpPr>
+          <p:cNvPr id="5" name="Footer Placeholder 4">
+            <a:extLst>
+              <a:ext uri="{FF2B5EF4-FFF2-40B4-BE49-F238E27FC236}">
+                <a16:creationId xmlns:a16="http://schemas.microsoft.com/office/drawing/2014/main" id="{BC94AD6D-05C1-F98A-F8FF-434A05C1144E}"/>
+              </a:ext>
+            </a:extLst>
+          </p:cNvPr>
+          <p:cNvSpPr>
+            <a:spLocks noGrp="1"/>
+          </p:cNvSpPr>
+          <p:nvPr>
+            <p:ph type="ftr" sz="quarter" idx="11"/>
+          </p:nvPr>
+        </p:nvSpPr>
+        <p:spPr/>
+        <p:txBody>
+          <a:bodyPr/>
+          <a:lstStyle/>
+          <a:p>
+            <a:endParaRPr lang="en-US"/>
+          </a:p>
+        </p:txBody>
+      </p:sp>
+      <p:sp>
+        <p:nvSpPr>
+          <p:cNvPr id="6" name="Slide Number Placeholder 5">
+            <a:extLst>
+              <a:ext uri="{FF2B5EF4-FFF2-40B4-BE49-F238E27FC236}">
+                <a16:creationId xmlns:a16="http://schemas.microsoft.com/office/drawing/2014/main" id="{2EC7E25A-E552-BFE6-052E-233B46A428CF}"/>
+              </a:ext>
+            </a:extLst>
+          </p:cNvPr>
+          <p:cNvSpPr>
+            <a:spLocks noGrp="1"/>
+          </p:cNvSpPr>
+          <p:nvPr>
+            <p:ph type="sldNum" sz="quarter" idx="12"/>
+          </p:nvPr>
+        </p:nvSpPr>
+        <p:spPr/>
+        <p:txBody>
+          <a:bodyPr/>
+          <a:lstStyle/>
+          <a:p>
+            <a:fld id="{B8A4611B-8B6E-6E4B-B112-D5042F8FC322}" type="slidenum">
+              <a:rPr lang="en-US" smtClean="0"/>
+              <a:t>‹#›</a:t>
+            </a:fld>
+            <a:endParaRPr lang="en-US"/>
+          </a:p>
+        </p:txBody>
+      </p:sp>
+    </p:spTree>
+    <p:extLst>
+      <p:ext uri="{BB962C8B-B14F-4D97-AF65-F5344CB8AC3E}">
+        <p14:creationId xmlns:p14="http://schemas.microsoft.com/office/powerpoint/2010/main" val="3333911477"/>
+      </p:ext>
+    </p:extLst>
+  </p:cSld>
+  <p:clrMapOvr>
+    <a:masterClrMapping/>
+  </p:clrMapOvr>
+</p:sldLayout>
+</file>
+
+<file path=ppt/slideLayouts/slideLayout22.xml><?xml version="1.0" encoding="utf-8"?>
+<p:sldLayout xmlns:a="http://schemas.openxmlformats.org/drawingml/2006/main" xmlns:r="http://schemas.openxmlformats.org/officeDocument/2006/relationships" xmlns:p="http://schemas.openxmlformats.org/presentationml/2006/main" type="vertTitleAndTx" preserve="1">
+  <p:cSld name="Vertical Title and Text">
+    <p:spTree>
+      <p:nvGrpSpPr>
+        <p:cNvPr id="1" name=""/>
+        <p:cNvGrpSpPr/>
+        <p:nvPr/>
+      </p:nvGrpSpPr>
+      <p:grpSpPr>
+        <a:xfrm>
+          <a:off x="0" y="0"/>
+          <a:ext cx="0" cy="0"/>
+          <a:chOff x="0" y="0"/>
+          <a:chExt cx="0" cy="0"/>
+        </a:xfrm>
+      </p:grpSpPr>
+      <p:sp>
+        <p:nvSpPr>
+          <p:cNvPr id="2" name="Vertical Title 1">
+            <a:extLst>
+              <a:ext uri="{FF2B5EF4-FFF2-40B4-BE49-F238E27FC236}">
+                <a16:creationId xmlns:a16="http://schemas.microsoft.com/office/drawing/2014/main" id="{E6F515E3-EFC6-4E7A-0571-2B8DF847F7CD}"/>
+              </a:ext>
+            </a:extLst>
+          </p:cNvPr>
+          <p:cNvSpPr>
+            <a:spLocks noGrp="1"/>
+          </p:cNvSpPr>
+          <p:nvPr>
+            <p:ph type="title" orient="vert"/>
+          </p:nvPr>
+        </p:nvSpPr>
+        <p:spPr>
+          <a:xfrm>
+            <a:off x="8724900" y="365125"/>
+            <a:ext cx="2628900" cy="5811838"/>
+          </a:xfrm>
+        </p:spPr>
+        <p:txBody>
+          <a:bodyPr vert="eaVert"/>
+          <a:lstStyle/>
+          <a:p>
+            <a:r>
+              <a:rPr lang="en-US"/>
+              <a:t>Click to edit Master title style</a:t>
+            </a:r>
+          </a:p>
+        </p:txBody>
+      </p:sp>
+      <p:sp>
+        <p:nvSpPr>
+          <p:cNvPr id="3" name="Vertical Text Placeholder 2">
+            <a:extLst>
+              <a:ext uri="{FF2B5EF4-FFF2-40B4-BE49-F238E27FC236}">
+                <a16:creationId xmlns:a16="http://schemas.microsoft.com/office/drawing/2014/main" id="{D4A8279F-B157-80CC-E582-86F2C139F919}"/>
+              </a:ext>
+            </a:extLst>
+          </p:cNvPr>
+          <p:cNvSpPr>
+            <a:spLocks noGrp="1"/>
+          </p:cNvSpPr>
+          <p:nvPr>
+            <p:ph type="body" orient="vert" idx="1"/>
+          </p:nvPr>
+        </p:nvSpPr>
+        <p:spPr>
+          <a:xfrm>
+            <a:off x="838200" y="365125"/>
+            <a:ext cx="7734300" cy="5811838"/>
+          </a:xfrm>
+        </p:spPr>
+        <p:txBody>
+          <a:bodyPr vert="eaVert"/>
+          <a:lstStyle/>
+          <a:p>
+            <a:pPr lvl="0"/>
+            <a:r>
+              <a:rPr lang="en-US"/>
+              <a:t>Click to edit Master text styles</a:t>
+            </a:r>
+          </a:p>
+          <a:p>
+            <a:pPr lvl="1"/>
+            <a:r>
+              <a:rPr lang="en-US"/>
+              <a:t>Second level</a:t>
+            </a:r>
+          </a:p>
+          <a:p>
+            <a:pPr lvl="2"/>
+            <a:r>
+              <a:rPr lang="en-US"/>
+              <a:t>Third level</a:t>
+            </a:r>
+          </a:p>
+          <a:p>
+            <a:pPr lvl="3"/>
+            <a:r>
+              <a:rPr lang="en-US"/>
+              <a:t>Fourth level</a:t>
+            </a:r>
+          </a:p>
+          <a:p>
+            <a:pPr lvl="4"/>
+            <a:r>
+              <a:rPr lang="en-US"/>
+              <a:t>Fifth level</a:t>
+            </a:r>
+          </a:p>
+        </p:txBody>
+      </p:sp>
+      <p:sp>
+        <p:nvSpPr>
+          <p:cNvPr id="4" name="Date Placeholder 3">
+            <a:extLst>
+              <a:ext uri="{FF2B5EF4-FFF2-40B4-BE49-F238E27FC236}">
+                <a16:creationId xmlns:a16="http://schemas.microsoft.com/office/drawing/2014/main" id="{C896D02B-85C2-3C9B-E22B-0F6705AF704E}"/>
+              </a:ext>
+            </a:extLst>
+          </p:cNvPr>
+          <p:cNvSpPr>
+            <a:spLocks noGrp="1"/>
+          </p:cNvSpPr>
+          <p:nvPr>
+            <p:ph type="dt" sz="half" idx="10"/>
+          </p:nvPr>
+        </p:nvSpPr>
+        <p:spPr/>
+        <p:txBody>
+          <a:bodyPr/>
+          <a:lstStyle/>
+          <a:p>
+            <a:fld id="{F10F4B33-885B-F040-8A46-CBE76B527417}" type="datetimeFigureOut">
+              <a:rPr lang="en-US" smtClean="0"/>
+              <a:t>8/31/26</a:t>
+            </a:fld>
+            <a:endParaRPr lang="en-US"/>
+          </a:p>
+        </p:txBody>
+      </p:sp>
+      <p:sp>
+        <p:nvSpPr>
+          <p:cNvPr id="5" name="Footer Placeholder 4">
+            <a:extLst>
+              <a:ext uri="{FF2B5EF4-FFF2-40B4-BE49-F238E27FC236}">
+                <a16:creationId xmlns:a16="http://schemas.microsoft.com/office/drawing/2014/main" id="{8955C653-7D84-4A7F-73B4-600FDB0EBD4A}"/>
+              </a:ext>
+            </a:extLst>
+          </p:cNvPr>
+          <p:cNvSpPr>
+            <a:spLocks noGrp="1"/>
+          </p:cNvSpPr>
+          <p:nvPr>
+            <p:ph type="ftr" sz="quarter" idx="11"/>
+          </p:nvPr>
+        </p:nvSpPr>
+        <p:spPr/>
+        <p:txBody>
+          <a:bodyPr/>
+          <a:lstStyle/>
+          <a:p>
+            <a:endParaRPr lang="en-US"/>
+          </a:p>
+        </p:txBody>
+      </p:sp>
+      <p:sp>
+        <p:nvSpPr>
+          <p:cNvPr id="6" name="Slide Number Placeholder 5">
+            <a:extLst>
+              <a:ext uri="{FF2B5EF4-FFF2-40B4-BE49-F238E27FC236}">
+                <a16:creationId xmlns:a16="http://schemas.microsoft.com/office/drawing/2014/main" id="{BC2398D8-9868-35A9-45E0-096FA05AA3D6}"/>
+              </a:ext>
+            </a:extLst>
+          </p:cNvPr>
+          <p:cNvSpPr>
+            <a:spLocks noGrp="1"/>
+          </p:cNvSpPr>
+          <p:nvPr>
+            <p:ph type="sldNum" sz="quarter" idx="12"/>
+          </p:nvPr>
+        </p:nvSpPr>
+        <p:spPr/>
+        <p:txBody>
+          <a:bodyPr/>
+          <a:lstStyle/>
+          <a:p>
+            <a:fld id="{B8A4611B-8B6E-6E4B-B112-D5042F8FC322}" type="slidenum">
+              <a:rPr lang="en-US" smtClean="0"/>
+              <a:t>‹#›</a:t>
+            </a:fld>
+            <a:endParaRPr lang="en-US"/>
+          </a:p>
+        </p:txBody>
+      </p:sp>
+    </p:spTree>
+    <p:extLst>
+      <p:ext uri="{BB962C8B-B14F-4D97-AF65-F5344CB8AC3E}">
+        <p14:creationId xmlns:p14="http://schemas.microsoft.com/office/powerpoint/2010/main" val="3445433439"/>
       </p:ext>
     </p:extLst>
   </p:cSld>
@@ -4780,6 +7491,632 @@
 </p:sldMaster>
 </file>
 
+<file path=ppt/slideMasters/slideMaster2.xml><?xml version="1.0" encoding="utf-8"?>
+<p:sldMaster xmlns:a="http://schemas.openxmlformats.org/drawingml/2006/main" xmlns:r="http://schemas.openxmlformats.org/officeDocument/2006/relationships" xmlns:p="http://schemas.openxmlformats.org/presentationml/2006/main">
+  <p:cSld>
+    <p:bg>
+      <p:bgRef idx="1001">
+        <a:schemeClr val="bg1"/>
+      </p:bgRef>
+    </p:bg>
+    <p:spTree>
+      <p:nvGrpSpPr>
+        <p:cNvPr id="1" name=""/>
+        <p:cNvGrpSpPr/>
+        <p:nvPr/>
+      </p:nvGrpSpPr>
+      <p:grpSpPr>
+        <a:xfrm>
+          <a:off x="0" y="0"/>
+          <a:ext cx="0" cy="0"/>
+          <a:chOff x="0" y="0"/>
+          <a:chExt cx="0" cy="0"/>
+        </a:xfrm>
+      </p:grpSpPr>
+      <p:sp>
+        <p:nvSpPr>
+          <p:cNvPr id="2" name="Title Placeholder 1">
+            <a:extLst>
+              <a:ext uri="{FF2B5EF4-FFF2-40B4-BE49-F238E27FC236}">
+                <a16:creationId xmlns:a16="http://schemas.microsoft.com/office/drawing/2014/main" id="{593E39A3-CB7B-F2F2-BB80-D809AD51F369}"/>
+              </a:ext>
+            </a:extLst>
+          </p:cNvPr>
+          <p:cNvSpPr>
+            <a:spLocks noGrp="1"/>
+          </p:cNvSpPr>
+          <p:nvPr>
+            <p:ph type="title"/>
+          </p:nvPr>
+        </p:nvSpPr>
+        <p:spPr>
+          <a:xfrm>
+            <a:off x="838200" y="365125"/>
+            <a:ext cx="10515600" cy="1325563"/>
+          </a:xfrm>
+          <a:prstGeom prst="rect">
+            <a:avLst/>
+          </a:prstGeom>
+        </p:spPr>
+        <p:txBody>
+          <a:bodyPr vert="horz" lIns="91440" tIns="45720" rIns="91440" bIns="45720" rtlCol="0" anchor="ctr">
+            <a:normAutofit/>
+          </a:bodyPr>
+          <a:lstStyle/>
+          <a:p>
+            <a:r>
+              <a:rPr lang="en-US"/>
+              <a:t>Click to edit Master title style</a:t>
+            </a:r>
+          </a:p>
+        </p:txBody>
+      </p:sp>
+      <p:sp>
+        <p:nvSpPr>
+          <p:cNvPr id="3" name="Text Placeholder 2">
+            <a:extLst>
+              <a:ext uri="{FF2B5EF4-FFF2-40B4-BE49-F238E27FC236}">
+                <a16:creationId xmlns:a16="http://schemas.microsoft.com/office/drawing/2014/main" id="{02444E6C-9DDE-E23D-AC40-949D8113ED0A}"/>
+              </a:ext>
+            </a:extLst>
+          </p:cNvPr>
+          <p:cNvSpPr>
+            <a:spLocks noGrp="1"/>
+          </p:cNvSpPr>
+          <p:nvPr>
+            <p:ph type="body" idx="1"/>
+          </p:nvPr>
+        </p:nvSpPr>
+        <p:spPr>
+          <a:xfrm>
+            <a:off x="838200" y="1825625"/>
+            <a:ext cx="10515600" cy="4351338"/>
+          </a:xfrm>
+          <a:prstGeom prst="rect">
+            <a:avLst/>
+          </a:prstGeom>
+        </p:spPr>
+        <p:txBody>
+          <a:bodyPr vert="horz" lIns="91440" tIns="45720" rIns="91440" bIns="45720" rtlCol="0">
+            <a:normAutofit/>
+          </a:bodyPr>
+          <a:lstStyle/>
+          <a:p>
+            <a:pPr lvl="0"/>
+            <a:r>
+              <a:rPr lang="en-US"/>
+              <a:t>Click to edit Master text styles</a:t>
+            </a:r>
+          </a:p>
+          <a:p>
+            <a:pPr lvl="1"/>
+            <a:r>
+              <a:rPr lang="en-US"/>
+              <a:t>Second level</a:t>
+            </a:r>
+          </a:p>
+          <a:p>
+            <a:pPr lvl="2"/>
+            <a:r>
+              <a:rPr lang="en-US"/>
+              <a:t>Third level</a:t>
+            </a:r>
+          </a:p>
+          <a:p>
+            <a:pPr lvl="3"/>
+            <a:r>
+              <a:rPr lang="en-US"/>
+              <a:t>Fourth level</a:t>
+            </a:r>
+          </a:p>
+          <a:p>
+            <a:pPr lvl="4"/>
+            <a:r>
+              <a:rPr lang="en-US"/>
+              <a:t>Fifth level</a:t>
+            </a:r>
+          </a:p>
+        </p:txBody>
+      </p:sp>
+      <p:sp>
+        <p:nvSpPr>
+          <p:cNvPr id="4" name="Date Placeholder 3">
+            <a:extLst>
+              <a:ext uri="{FF2B5EF4-FFF2-40B4-BE49-F238E27FC236}">
+                <a16:creationId xmlns:a16="http://schemas.microsoft.com/office/drawing/2014/main" id="{2B63700D-6204-838A-FFA2-4BF3516A8476}"/>
+              </a:ext>
+            </a:extLst>
+          </p:cNvPr>
+          <p:cNvSpPr>
+            <a:spLocks noGrp="1"/>
+          </p:cNvSpPr>
+          <p:nvPr>
+            <p:ph type="dt" sz="half" idx="2"/>
+          </p:nvPr>
+        </p:nvSpPr>
+        <p:spPr>
+          <a:xfrm>
+            <a:off x="838200" y="6356350"/>
+            <a:ext cx="2743200" cy="365125"/>
+          </a:xfrm>
+          <a:prstGeom prst="rect">
+            <a:avLst/>
+          </a:prstGeom>
+        </p:spPr>
+        <p:txBody>
+          <a:bodyPr vert="horz" lIns="91440" tIns="45720" rIns="91440" bIns="45720" rtlCol="0" anchor="ctr"/>
+          <a:lstStyle>
+            <a:lvl1pPr algn="l">
+              <a:defRPr sz="1200">
+                <a:solidFill>
+                  <a:schemeClr val="tx1">
+                    <a:tint val="82000"/>
+                  </a:schemeClr>
+                </a:solidFill>
+              </a:defRPr>
+            </a:lvl1pPr>
+          </a:lstStyle>
+          <a:p>
+            <a:fld id="{F10F4B33-885B-F040-8A46-CBE76B527417}" type="datetimeFigureOut">
+              <a:rPr lang="en-US" smtClean="0"/>
+              <a:t>8/31/26</a:t>
+            </a:fld>
+            <a:endParaRPr lang="en-US"/>
+          </a:p>
+        </p:txBody>
+      </p:sp>
+      <p:sp>
+        <p:nvSpPr>
+          <p:cNvPr id="5" name="Footer Placeholder 4">
+            <a:extLst>
+              <a:ext uri="{FF2B5EF4-FFF2-40B4-BE49-F238E27FC236}">
+                <a16:creationId xmlns:a16="http://schemas.microsoft.com/office/drawing/2014/main" id="{EABAADD7-624B-3173-23BB-78C9EE730D44}"/>
+              </a:ext>
+            </a:extLst>
+          </p:cNvPr>
+          <p:cNvSpPr>
+            <a:spLocks noGrp="1"/>
+          </p:cNvSpPr>
+          <p:nvPr>
+            <p:ph type="ftr" sz="quarter" idx="3"/>
+          </p:nvPr>
+        </p:nvSpPr>
+        <p:spPr>
+          <a:xfrm>
+            <a:off x="4038600" y="6356350"/>
+            <a:ext cx="4114800" cy="365125"/>
+          </a:xfrm>
+          <a:prstGeom prst="rect">
+            <a:avLst/>
+          </a:prstGeom>
+        </p:spPr>
+        <p:txBody>
+          <a:bodyPr vert="horz" lIns="91440" tIns="45720" rIns="91440" bIns="45720" rtlCol="0" anchor="ctr"/>
+          <a:lstStyle>
+            <a:lvl1pPr algn="ctr">
+              <a:defRPr sz="1200">
+                <a:solidFill>
+                  <a:schemeClr val="tx1">
+                    <a:tint val="82000"/>
+                  </a:schemeClr>
+                </a:solidFill>
+              </a:defRPr>
+            </a:lvl1pPr>
+          </a:lstStyle>
+          <a:p>
+            <a:endParaRPr lang="en-US"/>
+          </a:p>
+        </p:txBody>
+      </p:sp>
+      <p:sp>
+        <p:nvSpPr>
+          <p:cNvPr id="6" name="Slide Number Placeholder 5">
+            <a:extLst>
+              <a:ext uri="{FF2B5EF4-FFF2-40B4-BE49-F238E27FC236}">
+                <a16:creationId xmlns:a16="http://schemas.microsoft.com/office/drawing/2014/main" id="{ABDDD2E8-CFC8-F8AE-A9DF-EDCC727062BD}"/>
+              </a:ext>
+            </a:extLst>
+          </p:cNvPr>
+          <p:cNvSpPr>
+            <a:spLocks noGrp="1"/>
+          </p:cNvSpPr>
+          <p:nvPr>
+            <p:ph type="sldNum" sz="quarter" idx="4"/>
+          </p:nvPr>
+        </p:nvSpPr>
+        <p:spPr>
+          <a:xfrm>
+            <a:off x="8610600" y="6356350"/>
+            <a:ext cx="2743200" cy="365125"/>
+          </a:xfrm>
+          <a:prstGeom prst="rect">
+            <a:avLst/>
+          </a:prstGeom>
+        </p:spPr>
+        <p:txBody>
+          <a:bodyPr vert="horz" lIns="91440" tIns="45720" rIns="91440" bIns="45720" rtlCol="0" anchor="ctr"/>
+          <a:lstStyle>
+            <a:lvl1pPr algn="r">
+              <a:defRPr sz="1200">
+                <a:solidFill>
+                  <a:schemeClr val="tx1">
+                    <a:tint val="82000"/>
+                  </a:schemeClr>
+                </a:solidFill>
+              </a:defRPr>
+            </a:lvl1pPr>
+          </a:lstStyle>
+          <a:p>
+            <a:fld id="{B8A4611B-8B6E-6E4B-B112-D5042F8FC322}" type="slidenum">
+              <a:rPr lang="en-US" smtClean="0"/>
+              <a:t>‹#›</a:t>
+            </a:fld>
+            <a:endParaRPr lang="en-US"/>
+          </a:p>
+        </p:txBody>
+      </p:sp>
+      <p:sp>
+        <p:nvSpPr>
+          <p:cNvPr id="101" name="Footer Rule"/>
+          <p:cNvSpPr/>
+          <p:nvPr/>
+        </p:nvSpPr>
+        <p:spPr>
+          <a:xfrm>
+            <a:off x="0" y="6743700"/>
+            <a:ext cx="12192000" cy="50800"/>
+          </a:xfrm>
+          <a:prstGeom prst="rect">
+            <a:avLst/>
+          </a:prstGeom>
+          <a:solidFill>
+            <a:srgbClr val="DCE3EA"/>
+          </a:solidFill>
+          <a:ln>
+            <a:noFill/>
+          </a:ln>
+        </p:spPr>
+        <p:txBody>
+          <a:bodyPr/>
+          <a:lstStyle/>
+          <a:p>
+            <a:endParaRPr lang="en-US"/>
+          </a:p>
+        </p:txBody>
+      </p:sp>
+      <p:sp>
+        <p:nvSpPr>
+          <p:cNvPr id="102" name="Footer Accent"/>
+          <p:cNvSpPr/>
+          <p:nvPr/>
+        </p:nvSpPr>
+        <p:spPr>
+          <a:xfrm>
+            <a:off x="0" y="6743700"/>
+            <a:ext cx="2794000" cy="50800"/>
+          </a:xfrm>
+          <a:prstGeom prst="rect">
+            <a:avLst/>
+          </a:prstGeom>
+          <a:solidFill>
+            <a:srgbClr val="1F4E79"/>
+          </a:solidFill>
+          <a:ln>
+            <a:noFill/>
+          </a:ln>
+        </p:spPr>
+        <p:txBody>
+          <a:bodyPr/>
+          <a:lstStyle/>
+          <a:p>
+            <a:endParaRPr lang="en-US"/>
+          </a:p>
+        </p:txBody>
+      </p:sp>
+    </p:spTree>
+    <p:extLst>
+      <p:ext uri="{BB962C8B-B14F-4D97-AF65-F5344CB8AC3E}">
+        <p14:creationId xmlns:p14="http://schemas.microsoft.com/office/powerpoint/2010/main" val="1487335646"/>
+      </p:ext>
+    </p:extLst>
+  </p:cSld>
+  <p:clrMap bg1="lt1" tx1="dk1" bg2="lt2" tx2="dk2" accent1="accent1" accent2="accent2" accent3="accent3" accent4="accent4" accent5="accent5" accent6="accent6" hlink="hlink" folHlink="folHlink"/>
+  <p:sldLayoutIdLst>
+    <p:sldLayoutId id="2147483661" r:id="rId1"/>
+    <p:sldLayoutId id="2147483662" r:id="rId2"/>
+    <p:sldLayoutId id="2147483663" r:id="rId3"/>
+    <p:sldLayoutId id="2147483664" r:id="rId4"/>
+    <p:sldLayoutId id="2147483665" r:id="rId5"/>
+    <p:sldLayoutId id="2147483666" r:id="rId6"/>
+    <p:sldLayoutId id="2147483667" r:id="rId7"/>
+    <p:sldLayoutId id="2147483668" r:id="rId8"/>
+    <p:sldLayoutId id="2147483669" r:id="rId9"/>
+    <p:sldLayoutId id="2147483670" r:id="rId10"/>
+    <p:sldLayoutId id="2147483671" r:id="rId11"/>
+  </p:sldLayoutIdLst>
+  <p:txStyles>
+    <p:titleStyle>
+      <a:lvl1pPr algn="l" defTabSz="914400" rtl="0" eaLnBrk="1" latinLnBrk="0" hangingPunct="1">
+        <a:lnSpc>
+          <a:spcPct val="90000"/>
+        </a:lnSpc>
+        <a:spcBef>
+          <a:spcPct val="0"/>
+        </a:spcBef>
+        <a:buNone/>
+        <a:defRPr sz="4400" b="1" kern="1200">
+          <a:solidFill>
+            <a:srgbClr val="1F4E79"/>
+          </a:solidFill>
+          <a:latin typeface="+mj-lt"/>
+          <a:ea typeface="+mj-ea"/>
+          <a:cs typeface="+mj-cs"/>
+        </a:defRPr>
+      </a:lvl1pPr>
+    </p:titleStyle>
+    <p:bodyStyle>
+      <a:lvl1pPr marL="228600" indent="-228600" algn="l" defTabSz="914400" rtl="0" eaLnBrk="1" latinLnBrk="0" hangingPunct="1">
+        <a:lnSpc>
+          <a:spcPct val="90000"/>
+        </a:lnSpc>
+        <a:spcBef>
+          <a:spcPts val="1000"/>
+        </a:spcBef>
+        <a:buFont typeface="Arial" panose="020B0604020202020204" pitchFamily="34" charset="0"/>
+        <a:buChar char="•"/>
+        <a:defRPr sz="2800" kern="1200">
+          <a:solidFill>
+            <a:srgbClr val="16212E"/>
+          </a:solidFill>
+          <a:latin typeface="+mn-lt"/>
+          <a:ea typeface="+mn-ea"/>
+          <a:cs typeface="+mn-cs"/>
+        </a:defRPr>
+      </a:lvl1pPr>
+      <a:lvl2pPr marL="685800" indent="-228600" algn="l" defTabSz="914400" rtl="0" eaLnBrk="1" latinLnBrk="0" hangingPunct="1">
+        <a:lnSpc>
+          <a:spcPct val="90000"/>
+        </a:lnSpc>
+        <a:spcBef>
+          <a:spcPts val="500"/>
+        </a:spcBef>
+        <a:buFont typeface="Arial" panose="020B0604020202020204" pitchFamily="34" charset="0"/>
+        <a:buChar char="•"/>
+        <a:defRPr sz="2400" kern="1200">
+          <a:solidFill>
+            <a:schemeClr val="tx1"/>
+          </a:solidFill>
+          <a:latin typeface="+mn-lt"/>
+          <a:ea typeface="+mn-ea"/>
+          <a:cs typeface="+mn-cs"/>
+        </a:defRPr>
+      </a:lvl2pPr>
+      <a:lvl3pPr marL="1143000" indent="-228600" algn="l" defTabSz="914400" rtl="0" eaLnBrk="1" latinLnBrk="0" hangingPunct="1">
+        <a:lnSpc>
+          <a:spcPct val="90000"/>
+        </a:lnSpc>
+        <a:spcBef>
+          <a:spcPts val="500"/>
+        </a:spcBef>
+        <a:buFont typeface="Arial" panose="020B0604020202020204" pitchFamily="34" charset="0"/>
+        <a:buChar char="•"/>
+        <a:defRPr sz="2000" kern="1200">
+          <a:solidFill>
+            <a:schemeClr val="tx1"/>
+          </a:solidFill>
+          <a:latin typeface="+mn-lt"/>
+          <a:ea typeface="+mn-ea"/>
+          <a:cs typeface="+mn-cs"/>
+        </a:defRPr>
+      </a:lvl3pPr>
+      <a:lvl4pPr marL="1600200" indent="-228600" algn="l" defTabSz="914400" rtl="0" eaLnBrk="1" latinLnBrk="0" hangingPunct="1">
+        <a:lnSpc>
+          <a:spcPct val="90000"/>
+        </a:lnSpc>
+        <a:spcBef>
+          <a:spcPts val="500"/>
+        </a:spcBef>
+        <a:buFont typeface="Arial" panose="020B0604020202020204" pitchFamily="34" charset="0"/>
+        <a:buChar char="•"/>
+        <a:defRPr sz="1800" kern="1200">
+          <a:solidFill>
+            <a:schemeClr val="tx1"/>
+          </a:solidFill>
+          <a:latin typeface="+mn-lt"/>
+          <a:ea typeface="+mn-ea"/>
+          <a:cs typeface="+mn-cs"/>
+        </a:defRPr>
+      </a:lvl4pPr>
+      <a:lvl5pPr marL="2057400" indent="-228600" algn="l" defTabSz="914400" rtl="0" eaLnBrk="1" latinLnBrk="0" hangingPunct="1">
+        <a:lnSpc>
+          <a:spcPct val="90000"/>
+        </a:lnSpc>
+        <a:spcBef>
+          <a:spcPts val="500"/>
+        </a:spcBef>
+        <a:buFont typeface="Arial" panose="020B0604020202020204" pitchFamily="34" charset="0"/>
+        <a:buChar char="•"/>
+        <a:defRPr sz="1800" kern="1200">
+          <a:solidFill>
+            <a:schemeClr val="tx1"/>
+          </a:solidFill>
+          <a:latin typeface="+mn-lt"/>
+          <a:ea typeface="+mn-ea"/>
+          <a:cs typeface="+mn-cs"/>
+        </a:defRPr>
+      </a:lvl5pPr>
+      <a:lvl6pPr marL="2514600" indent="-228600" algn="l" defTabSz="914400" rtl="0" eaLnBrk="1" latinLnBrk="0" hangingPunct="1">
+        <a:lnSpc>
+          <a:spcPct val="90000"/>
+        </a:lnSpc>
+        <a:spcBef>
+          <a:spcPts val="500"/>
+        </a:spcBef>
+        <a:buFont typeface="Arial" panose="020B0604020202020204" pitchFamily="34" charset="0"/>
+        <a:buChar char="•"/>
+        <a:defRPr sz="1800" kern="1200">
+          <a:solidFill>
+            <a:schemeClr val="tx1"/>
+          </a:solidFill>
+          <a:latin typeface="+mn-lt"/>
+          <a:ea typeface="+mn-ea"/>
+          <a:cs typeface="+mn-cs"/>
+        </a:defRPr>
+      </a:lvl6pPr>
+      <a:lvl7pPr marL="2971800" indent="-228600" algn="l" defTabSz="914400" rtl="0" eaLnBrk="1" latinLnBrk="0" hangingPunct="1">
+        <a:lnSpc>
+          <a:spcPct val="90000"/>
+        </a:lnSpc>
+        <a:spcBef>
+          <a:spcPts val="500"/>
+        </a:spcBef>
+        <a:buFont typeface="Arial" panose="020B0604020202020204" pitchFamily="34" charset="0"/>
+        <a:buChar char="•"/>
+        <a:defRPr sz="1800" kern="1200">
+          <a:solidFill>
+            <a:schemeClr val="tx1"/>
+          </a:solidFill>
+          <a:latin typeface="+mn-lt"/>
+          <a:ea typeface="+mn-ea"/>
+          <a:cs typeface="+mn-cs"/>
+        </a:defRPr>
+      </a:lvl7pPr>
+      <a:lvl8pPr marL="3429000" indent="-228600" algn="l" defTabSz="914400" rtl="0" eaLnBrk="1" latinLnBrk="0" hangingPunct="1">
+        <a:lnSpc>
+          <a:spcPct val="90000"/>
+        </a:lnSpc>
+        <a:spcBef>
+          <a:spcPts val="500"/>
+        </a:spcBef>
+        <a:buFont typeface="Arial" panose="020B0604020202020204" pitchFamily="34" charset="0"/>
+        <a:buChar char="•"/>
+        <a:defRPr sz="1800" kern="1200">
+          <a:solidFill>
+            <a:schemeClr val="tx1"/>
+          </a:solidFill>
+          <a:latin typeface="+mn-lt"/>
+          <a:ea typeface="+mn-ea"/>
+          <a:cs typeface="+mn-cs"/>
+        </a:defRPr>
+      </a:lvl8pPr>
+      <a:lvl9pPr marL="3886200" indent="-228600" algn="l" defTabSz="914400" rtl="0" eaLnBrk="1" latinLnBrk="0" hangingPunct="1">
+        <a:lnSpc>
+          <a:spcPct val="90000"/>
+        </a:lnSpc>
+        <a:spcBef>
+          <a:spcPts val="500"/>
+        </a:spcBef>
+        <a:buFont typeface="Arial" panose="020B0604020202020204" pitchFamily="34" charset="0"/>
+        <a:buChar char="•"/>
+        <a:defRPr sz="1800" kern="1200">
+          <a:solidFill>
+            <a:schemeClr val="tx1"/>
+          </a:solidFill>
+          <a:latin typeface="+mn-lt"/>
+          <a:ea typeface="+mn-ea"/>
+          <a:cs typeface="+mn-cs"/>
+        </a:defRPr>
+      </a:lvl9pPr>
+    </p:bodyStyle>
+    <p:otherStyle>
+      <a:defPPr>
+        <a:defRPr lang="en-US"/>
+      </a:defPPr>
+      <a:lvl1pPr marL="0" algn="l" defTabSz="914400" rtl="0" eaLnBrk="1" latinLnBrk="0" hangingPunct="1">
+        <a:defRPr sz="1800" kern="1200">
+          <a:solidFill>
+            <a:schemeClr val="tx1"/>
+          </a:solidFill>
+          <a:latin typeface="+mn-lt"/>
+          <a:ea typeface="+mn-ea"/>
+          <a:cs typeface="+mn-cs"/>
+        </a:defRPr>
+      </a:lvl1pPr>
+      <a:lvl2pPr marL="457200" algn="l" defTabSz="914400" rtl="0" eaLnBrk="1" latinLnBrk="0" hangingPunct="1">
+        <a:defRPr sz="1800" kern="1200">
+          <a:solidFill>
+            <a:schemeClr val="tx1"/>
+          </a:solidFill>
+          <a:latin typeface="+mn-lt"/>
+          <a:ea typeface="+mn-ea"/>
+          <a:cs typeface="+mn-cs"/>
+        </a:defRPr>
+      </a:lvl2pPr>
+      <a:lvl3pPr marL="914400" algn="l" defTabSz="914400" rtl="0" eaLnBrk="1" latinLnBrk="0" hangingPunct="1">
+        <a:defRPr sz="1800" kern="1200">
+          <a:solidFill>
+            <a:schemeClr val="tx1"/>
+          </a:solidFill>
+          <a:latin typeface="+mn-lt"/>
+          <a:ea typeface="+mn-ea"/>
+          <a:cs typeface="+mn-cs"/>
+        </a:defRPr>
+      </a:lvl3pPr>
+      <a:lvl4pPr marL="1371600" algn="l" defTabSz="914400" rtl="0" eaLnBrk="1" latinLnBrk="0" hangingPunct="1">
+        <a:defRPr sz="1800" kern="1200">
+          <a:solidFill>
+            <a:schemeClr val="tx1"/>
+          </a:solidFill>
+          <a:latin typeface="+mn-lt"/>
+          <a:ea typeface="+mn-ea"/>
+          <a:cs typeface="+mn-cs"/>
+        </a:defRPr>
+      </a:lvl4pPr>
+      <a:lvl5pPr marL="1828800" algn="l" defTabSz="914400" rtl="0" eaLnBrk="1" latinLnBrk="0" hangingPunct="1">
+        <a:defRPr sz="1800" kern="1200">
+          <a:solidFill>
+            <a:schemeClr val="tx1"/>
+          </a:solidFill>
+          <a:latin typeface="+mn-lt"/>
+          <a:ea typeface="+mn-ea"/>
+          <a:cs typeface="+mn-cs"/>
+        </a:defRPr>
+      </a:lvl5pPr>
+      <a:lvl6pPr marL="2286000" algn="l" defTabSz="914400" rtl="0" eaLnBrk="1" latinLnBrk="0" hangingPunct="1">
+        <a:defRPr sz="1800" kern="1200">
+          <a:solidFill>
+            <a:schemeClr val="tx1"/>
+          </a:solidFill>
+          <a:latin typeface="+mn-lt"/>
+          <a:ea typeface="+mn-ea"/>
+          <a:cs typeface="+mn-cs"/>
+        </a:defRPr>
+      </a:lvl6pPr>
+      <a:lvl7pPr marL="2743200" algn="l" defTabSz="914400" rtl="0" eaLnBrk="1" latinLnBrk="0" hangingPunct="1">
+        <a:defRPr sz="1800" kern="1200">
+          <a:solidFill>
+            <a:schemeClr val="tx1"/>
+          </a:solidFill>
+          <a:latin typeface="+mn-lt"/>
+          <a:ea typeface="+mn-ea"/>
+          <a:cs typeface="+mn-cs"/>
+        </a:defRPr>
+      </a:lvl7pPr>
+      <a:lvl8pPr marL="3200400" algn="l" defTabSz="914400" rtl="0" eaLnBrk="1" latinLnBrk="0" hangingPunct="1">
+        <a:defRPr sz="1800" kern="1200">
+          <a:solidFill>
+            <a:schemeClr val="tx1"/>
+          </a:solidFill>
+          <a:latin typeface="+mn-lt"/>
+          <a:ea typeface="+mn-ea"/>
+          <a:cs typeface="+mn-cs"/>
+        </a:defRPr>
+      </a:lvl8pPr>
+      <a:lvl9pPr marL="3657600" algn="l" defTabSz="914400" rtl="0" eaLnBrk="1" latinLnBrk="0" hangingPunct="1">
+        <a:defRPr sz="1800" kern="1200">
+          <a:solidFill>
+            <a:schemeClr val="tx1"/>
+          </a:solidFill>
+          <a:latin typeface="+mn-lt"/>
+          <a:ea typeface="+mn-ea"/>
+          <a:cs typeface="+mn-cs"/>
+        </a:defRPr>
+      </a:lvl9pPr>
+    </p:otherStyle>
+  </p:txStyles>
+</p:sldMaster>
+</file>
+
 <file path=ppt/slides/slide1.xml><?xml version="1.0" encoding="utf-8"?>
 <p:sld xmlns:a="http://schemas.openxmlformats.org/drawingml/2006/main" xmlns:r="http://schemas.openxmlformats.org/officeDocument/2006/relationships" xmlns:p="http://schemas.openxmlformats.org/presentationml/2006/main">
   <p:cSld>
@@ -4857,7 +8194,7 @@
     </p:spTree>
     <p:extLst>
       <p:ext uri="{BB962C8B-B14F-4D97-AF65-F5344CB8AC3E}">
-        <p14:creationId xmlns:p14="http://schemas.microsoft.com/office/powerpoint/2010/main" val="691854567"/>
+        <p14:creationId xmlns:p14="http://schemas.microsoft.com/office/powerpoint/2010/main" val="558336464"/>
       </p:ext>
     </p:extLst>
   </p:cSld>
@@ -4912,8 +8249,8 @@
           </a:p>
         </p:txBody>
       </p:sp>
-      <mc:AlternateContent xmlns:mc="http://schemas.openxmlformats.org/markup-compatibility/2006" xmlns:a14="http://schemas.microsoft.com/office/drawing/2010/main">
-        <mc:Choice Requires="a14">
+      <mc:AlternateContent xmlns:mc="http://schemas.openxmlformats.org/markup-compatibility/2006">
+        <mc:Choice xmlns:a14="http://schemas.microsoft.com/office/drawing/2010/main" Requires="a14">
           <p:sp>
             <p:nvSpPr>
               <p:cNvPr id="3" name="Content Placeholder 2">
@@ -5389,7 +8726,7 @@
             </p:txBody>
           </p:sp>
         </mc:Choice>
-        <mc:Fallback xmlns="">
+        <mc:Fallback>
           <p:sp>
             <p:nvSpPr>
               <p:cNvPr id="3" name="Content Placeholder 2">
@@ -5410,7 +8747,7 @@
               <a:blipFill>
                 <a:blip r:embed="rId2"/>
                 <a:stretch>
-                  <a:fillRect l="-754" t="-1961"/>
+                  <a:fillRect l="-844" t="-1744" r="-121"/>
                 </a:stretch>
               </a:blipFill>
             </p:spPr>
@@ -5475,12 +8812,7 @@
             <p:ph type="title"/>
           </p:nvPr>
         </p:nvSpPr>
-        <p:spPr>
-          <a:xfrm>
-            <a:off x="445477" y="286726"/>
-            <a:ext cx="11031588" cy="1325563"/>
-          </a:xfrm>
-        </p:spPr>
+        <p:spPr/>
         <p:txBody>
           <a:bodyPr/>
           <a:lstStyle/>
@@ -5492,8 +8824,8 @@
           </a:p>
         </p:txBody>
       </p:sp>
-      <mc:AlternateContent xmlns:mc="http://schemas.openxmlformats.org/markup-compatibility/2006" xmlns:a14="http://schemas.microsoft.com/office/drawing/2010/main">
-        <mc:Choice Requires="a14">
+      <mc:AlternateContent xmlns:mc="http://schemas.openxmlformats.org/markup-compatibility/2006">
+        <mc:Choice xmlns:a14="http://schemas.microsoft.com/office/drawing/2010/main" Requires="a14">
           <p:sp>
             <p:nvSpPr>
               <p:cNvPr id="3" name="Content Placeholder 2">
@@ -5654,7 +8986,7 @@
             </p:txBody>
           </p:sp>
         </mc:Choice>
-        <mc:Fallback xmlns="">
+        <mc:Fallback>
           <p:sp>
             <p:nvSpPr>
               <p:cNvPr id="3" name="Content Placeholder 2">
@@ -5675,7 +9007,7 @@
               <a:blipFill>
                 <a:blip r:embed="rId3"/>
                 <a:stretch>
-                  <a:fillRect l="-1043" t="-2521"/>
+                  <a:fillRect l="-1086" t="-2326"/>
                 </a:stretch>
               </a:blipFill>
             </p:spPr>
@@ -5831,8 +9163,8 @@
           </a:p>
         </p:txBody>
       </p:sp>
-      <mc:AlternateContent xmlns:mc="http://schemas.openxmlformats.org/markup-compatibility/2006" xmlns:a14="http://schemas.microsoft.com/office/drawing/2010/main">
-        <mc:Choice Requires="a14">
+      <mc:AlternateContent xmlns:mc="http://schemas.openxmlformats.org/markup-compatibility/2006">
+        <mc:Choice xmlns:a14="http://schemas.microsoft.com/office/drawing/2010/main" Requires="a14">
           <p:sp>
             <p:nvSpPr>
               <p:cNvPr id="4" name="Content Placeholder 2">
@@ -5849,12 +9181,7 @@
                 <p:ph idx="1"/>
               </p:nvPr>
             </p:nvSpPr>
-            <p:spPr>
-              <a:xfrm>
-                <a:off x="551329" y="1524000"/>
-                <a:ext cx="10152529" cy="4876800"/>
-              </a:xfrm>
-            </p:spPr>
+            <p:spPr/>
             <p:txBody>
               <a:bodyPr>
                 <a:normAutofit/>
@@ -6283,7 +9610,7 @@
             </p:txBody>
           </p:sp>
         </mc:Choice>
-        <mc:Fallback xmlns="">
+        <mc:Fallback>
           <p:sp>
             <p:nvSpPr>
               <p:cNvPr id="4" name="Content Placeholder 2">
@@ -6301,14 +9628,10 @@
               </p:nvPr>
             </p:nvSpPr>
             <p:spPr>
-              <a:xfrm>
-                <a:off x="551329" y="1524000"/>
-                <a:ext cx="10152529" cy="4876800"/>
-              </a:xfrm>
               <a:blipFill>
                 <a:blip r:embed="rId2"/>
                 <a:stretch>
-                  <a:fillRect l="-1000" t="-2338"/>
+                  <a:fillRect l="-1086" t="-2326"/>
                 </a:stretch>
               </a:blipFill>
             </p:spPr>
@@ -6385,8 +9708,8 @@
           </a:p>
         </p:txBody>
       </p:sp>
-      <mc:AlternateContent xmlns:mc="http://schemas.openxmlformats.org/markup-compatibility/2006" xmlns:a14="http://schemas.microsoft.com/office/drawing/2010/main">
-        <mc:Choice Requires="a14">
+      <mc:AlternateContent xmlns:mc="http://schemas.openxmlformats.org/markup-compatibility/2006">
+        <mc:Choice xmlns:a14="http://schemas.microsoft.com/office/drawing/2010/main" Requires="a14">
           <p:sp>
             <p:nvSpPr>
               <p:cNvPr id="3" name="Content Placeholder 2">
@@ -6405,8 +9728,8 @@
             </p:nvSpPr>
             <p:spPr>
               <a:xfrm>
-                <a:off x="445477" y="1743197"/>
-                <a:ext cx="11596364" cy="4351338"/>
+                <a:off x="838199" y="1825625"/>
+                <a:ext cx="11115261" cy="4351338"/>
               </a:xfrm>
             </p:spPr>
             <p:txBody>
@@ -7026,7 +10349,7 @@
             </p:txBody>
           </p:sp>
         </mc:Choice>
-        <mc:Fallback xmlns="">
+        <mc:Fallback>
           <p:sp>
             <p:nvSpPr>
               <p:cNvPr id="3" name="Content Placeholder 2">
@@ -7045,13 +10368,13 @@
             </p:nvSpPr>
             <p:spPr>
               <a:xfrm>
-                <a:off x="445477" y="1743197"/>
-                <a:ext cx="11596364" cy="4351338"/>
+                <a:off x="838199" y="1825625"/>
+                <a:ext cx="11115261" cy="4351338"/>
               </a:xfrm>
               <a:blipFill>
                 <a:blip r:embed="rId2"/>
                 <a:stretch>
-                  <a:fillRect l="-946" t="-2521"/>
+                  <a:fillRect l="-912" t="-2326"/>
                 </a:stretch>
               </a:blipFill>
             </p:spPr>
@@ -7128,8 +10451,8 @@
           </a:p>
         </p:txBody>
       </p:sp>
-      <mc:AlternateContent xmlns:mc="http://schemas.openxmlformats.org/markup-compatibility/2006" xmlns:a14="http://schemas.microsoft.com/office/drawing/2010/main">
-        <mc:Choice Requires="a14">
+      <mc:AlternateContent xmlns:mc="http://schemas.openxmlformats.org/markup-compatibility/2006">
+        <mc:Choice xmlns:a14="http://schemas.microsoft.com/office/drawing/2010/main" Requires="a14">
           <p:sp>
             <p:nvSpPr>
               <p:cNvPr id="3" name="Content Placeholder 2">
@@ -7432,7 +10755,7 @@
             </p:txBody>
           </p:sp>
         </mc:Choice>
-        <mc:Fallback xmlns="">
+        <mc:Fallback>
           <p:sp>
             <p:nvSpPr>
               <p:cNvPr id="3" name="Content Placeholder 2">
@@ -7502,8 +10825,33 @@
           <a:chExt cx="0" cy="0"/>
         </a:xfrm>
       </p:grpSpPr>
-      <mc:AlternateContent xmlns:mc="http://schemas.openxmlformats.org/markup-compatibility/2006" xmlns:a14="http://schemas.microsoft.com/office/drawing/2010/main">
-        <mc:Choice Requires="a14">
+      <p:sp>
+        <p:nvSpPr>
+          <p:cNvPr id="2" name="Title 1">
+            <a:extLst>
+              <a:ext uri="{FF2B5EF4-FFF2-40B4-BE49-F238E27FC236}">
+                <a16:creationId xmlns:a16="http://schemas.microsoft.com/office/drawing/2014/main" id="{8627C4B7-FB0F-9DE2-B3CB-D26C4A520CFB}"/>
+              </a:ext>
+            </a:extLst>
+          </p:cNvPr>
+          <p:cNvSpPr>
+            <a:spLocks noGrp="1"/>
+          </p:cNvSpPr>
+          <p:nvPr>
+            <p:ph type="title"/>
+          </p:nvPr>
+        </p:nvSpPr>
+        <p:spPr/>
+        <p:txBody>
+          <a:bodyPr/>
+          <a:lstStyle/>
+          <a:p>
+            <a:endParaRPr lang="en-US"/>
+          </a:p>
+        </p:txBody>
+      </p:sp>
+      <mc:AlternateContent xmlns:mc="http://schemas.openxmlformats.org/markup-compatibility/2006">
+        <mc:Choice xmlns:a14="http://schemas.microsoft.com/office/drawing/2010/main" Requires="a14">
           <p:sp>
             <p:nvSpPr>
               <p:cNvPr id="3" name="Content Placeholder 2">
@@ -7520,12 +10868,7 @@
                 <p:ph idx="1"/>
               </p:nvPr>
             </p:nvSpPr>
-            <p:spPr>
-              <a:xfrm>
-                <a:off x="445477" y="652182"/>
-                <a:ext cx="10515600" cy="5442353"/>
-              </a:xfrm>
-            </p:spPr>
+            <p:spPr/>
             <p:txBody>
               <a:bodyPr>
                 <a:normAutofit/>
@@ -7986,7 +11329,7 @@
             </p:txBody>
           </p:sp>
         </mc:Choice>
-        <mc:Fallback xmlns="">
+        <mc:Fallback>
           <p:sp>
             <p:nvSpPr>
               <p:cNvPr id="3" name="Content Placeholder 2">
@@ -8004,14 +11347,10 @@
               </p:nvPr>
             </p:nvSpPr>
             <p:spPr>
-              <a:xfrm>
-                <a:off x="445477" y="652182"/>
-                <a:ext cx="10515600" cy="5442353"/>
-              </a:xfrm>
               <a:blipFill>
                 <a:blip r:embed="rId2"/>
                 <a:stretch>
-                  <a:fillRect l="-1327" t="-1860"/>
+                  <a:fillRect l="-1206" t="-2326" r="-844"/>
                 </a:stretch>
               </a:blipFill>
             </p:spPr>
@@ -8060,8 +11399,33 @@
           <a:chExt cx="0" cy="0"/>
         </a:xfrm>
       </p:grpSpPr>
-      <mc:AlternateContent xmlns:mc="http://schemas.openxmlformats.org/markup-compatibility/2006" xmlns:a14="http://schemas.microsoft.com/office/drawing/2010/main">
-        <mc:Choice Requires="a14">
+      <p:sp>
+        <p:nvSpPr>
+          <p:cNvPr id="2" name="Title 1">
+            <a:extLst>
+              <a:ext uri="{FF2B5EF4-FFF2-40B4-BE49-F238E27FC236}">
+                <a16:creationId xmlns:a16="http://schemas.microsoft.com/office/drawing/2014/main" id="{E5045C4D-A0E9-E9F8-9F98-9D6C8934A3CB}"/>
+              </a:ext>
+            </a:extLst>
+          </p:cNvPr>
+          <p:cNvSpPr>
+            <a:spLocks noGrp="1"/>
+          </p:cNvSpPr>
+          <p:nvPr>
+            <p:ph type="title"/>
+          </p:nvPr>
+        </p:nvSpPr>
+        <p:spPr/>
+        <p:txBody>
+          <a:bodyPr/>
+          <a:lstStyle/>
+          <a:p>
+            <a:endParaRPr lang="en-US"/>
+          </a:p>
+        </p:txBody>
+      </p:sp>
+      <mc:AlternateContent xmlns:mc="http://schemas.openxmlformats.org/markup-compatibility/2006">
+        <mc:Choice xmlns:a14="http://schemas.microsoft.com/office/drawing/2010/main" Requires="a14">
           <p:sp>
             <p:nvSpPr>
               <p:cNvPr id="3" name="Content Placeholder 2">
@@ -8078,14 +11442,11 @@
                 <p:ph idx="1"/>
               </p:nvPr>
             </p:nvSpPr>
-            <p:spPr>
-              <a:xfrm>
-                <a:off x="756000" y="216000"/>
-                <a:ext cx="10597800" cy="5960963"/>
-              </a:xfrm>
-            </p:spPr>
+            <p:spPr/>
             <p:txBody>
-              <a:bodyPr/>
+              <a:bodyPr>
+                <a:normAutofit fontScale="77500" lnSpcReduction="20000"/>
+              </a:bodyPr>
               <a:lstStyle/>
               <a:p>
                 <a:r>
@@ -9100,7 +12461,7 @@
             </p:txBody>
           </p:sp>
         </mc:Choice>
-        <mc:Fallback xmlns="">
+        <mc:Fallback>
           <p:sp>
             <p:nvSpPr>
               <p:cNvPr id="3" name="Content Placeholder 2">
@@ -9118,14 +12479,10 @@
               </p:nvPr>
             </p:nvSpPr>
             <p:spPr>
-              <a:xfrm>
-                <a:off x="756000" y="216000"/>
-                <a:ext cx="10597800" cy="5960963"/>
-              </a:xfrm>
               <a:blipFill>
                 <a:blip r:embed="rId2"/>
                 <a:stretch>
-                  <a:fillRect l="-1077" t="-1699"/>
+                  <a:fillRect l="-724" t="-2907"/>
                 </a:stretch>
               </a:blipFill>
             </p:spPr>
@@ -9507,8 +12864,33 @@
           <a:chExt cx="0" cy="0"/>
         </a:xfrm>
       </p:grpSpPr>
-      <mc:AlternateContent xmlns:mc="http://schemas.openxmlformats.org/markup-compatibility/2006" xmlns:a14="http://schemas.microsoft.com/office/drawing/2010/main">
-        <mc:Choice Requires="a14">
+      <p:sp>
+        <p:nvSpPr>
+          <p:cNvPr id="2" name="Title 1">
+            <a:extLst>
+              <a:ext uri="{FF2B5EF4-FFF2-40B4-BE49-F238E27FC236}">
+                <a16:creationId xmlns:a16="http://schemas.microsoft.com/office/drawing/2014/main" id="{367BD39E-FB4D-C882-7986-F2CC6FE11B6B}"/>
+              </a:ext>
+            </a:extLst>
+          </p:cNvPr>
+          <p:cNvSpPr>
+            <a:spLocks noGrp="1"/>
+          </p:cNvSpPr>
+          <p:nvPr>
+            <p:ph type="title"/>
+          </p:nvPr>
+        </p:nvSpPr>
+        <p:spPr/>
+        <p:txBody>
+          <a:bodyPr/>
+          <a:lstStyle/>
+          <a:p>
+            <a:endParaRPr lang="en-US"/>
+          </a:p>
+        </p:txBody>
+      </p:sp>
+      <mc:AlternateContent xmlns:mc="http://schemas.openxmlformats.org/markup-compatibility/2006">
+        <mc:Choice xmlns:a14="http://schemas.microsoft.com/office/drawing/2010/main" Requires="a14">
           <p:sp>
             <p:nvSpPr>
               <p:cNvPr id="3" name="Content Placeholder 2">
@@ -9525,12 +12907,7 @@
                 <p:ph idx="1"/>
               </p:nvPr>
             </p:nvSpPr>
-            <p:spPr>
-              <a:xfrm>
-                <a:off x="445477" y="652182"/>
-                <a:ext cx="10515600" cy="5442353"/>
-              </a:xfrm>
-            </p:spPr>
+            <p:spPr/>
             <p:txBody>
               <a:bodyPr>
                 <a:normAutofit/>
@@ -10002,7 +13379,7 @@
             </p:txBody>
           </p:sp>
         </mc:Choice>
-        <mc:Fallback xmlns="">
+        <mc:Fallback>
           <p:sp>
             <p:nvSpPr>
               <p:cNvPr id="3" name="Content Placeholder 2">
@@ -10020,14 +13397,10 @@
               </p:nvPr>
             </p:nvSpPr>
             <p:spPr>
-              <a:xfrm>
-                <a:off x="445477" y="652182"/>
-                <a:ext cx="10515600" cy="5442353"/>
-              </a:xfrm>
               <a:blipFill>
                 <a:blip r:embed="rId3"/>
                 <a:stretch>
-                  <a:fillRect l="-1327" t="-1860"/>
+                  <a:fillRect l="-1206" t="-2326" r="-844"/>
                 </a:stretch>
               </a:blipFill>
             </p:spPr>
@@ -10060,89 +13433,6 @@
 </file>
 
 <file path=ppt/slides/slide18.xml><?xml version="1.0" encoding="utf-8"?>
-<p:sld xmlns:a="http://schemas.openxmlformats.org/drawingml/2006/main" xmlns:r="http://schemas.openxmlformats.org/officeDocument/2006/relationships" xmlns:p="http://schemas.openxmlformats.org/presentationml/2006/main" show="0">
-  <p:cSld>
-    <p:spTree>
-      <p:nvGrpSpPr>
-        <p:cNvPr id="1" name=""/>
-        <p:cNvGrpSpPr/>
-        <p:nvPr/>
-      </p:nvGrpSpPr>
-      <p:grpSpPr>
-        <a:xfrm>
-          <a:off x="0" y="0"/>
-          <a:ext cx="0" cy="0"/>
-          <a:chOff x="0" y="0"/>
-          <a:chExt cx="0" cy="0"/>
-        </a:xfrm>
-      </p:grpSpPr>
-      <p:sp>
-        <p:nvSpPr>
-          <p:cNvPr id="2" name="Title 1">
-            <a:extLst>
-              <a:ext uri="{FF2B5EF4-FFF2-40B4-BE49-F238E27FC236}">
-                <a16:creationId xmlns:a16="http://schemas.microsoft.com/office/drawing/2014/main" id="{96965D79-7CCB-DA8B-7EE0-0A2C4695D882}"/>
-              </a:ext>
-            </a:extLst>
-          </p:cNvPr>
-          <p:cNvSpPr>
-            <a:spLocks noGrp="1"/>
-          </p:cNvSpPr>
-          <p:nvPr>
-            <p:ph type="title"/>
-          </p:nvPr>
-        </p:nvSpPr>
-        <p:spPr/>
-        <p:txBody>
-          <a:bodyPr/>
-          <a:lstStyle/>
-          <a:p>
-            <a:r>
-              <a:rPr lang="en-US" dirty="0"/>
-              <a:t>Quiz</a:t>
-            </a:r>
-          </a:p>
-        </p:txBody>
-      </p:sp>
-      <p:sp>
-        <p:nvSpPr>
-          <p:cNvPr id="3" name="Content Placeholder 2">
-            <a:extLst>
-              <a:ext uri="{FF2B5EF4-FFF2-40B4-BE49-F238E27FC236}">
-                <a16:creationId xmlns:a16="http://schemas.microsoft.com/office/drawing/2014/main" id="{31274D9A-0366-B723-20CF-4DE58439C0D4}"/>
-              </a:ext>
-            </a:extLst>
-          </p:cNvPr>
-          <p:cNvSpPr>
-            <a:spLocks noGrp="1"/>
-          </p:cNvSpPr>
-          <p:nvPr>
-            <p:ph idx="1"/>
-          </p:nvPr>
-        </p:nvSpPr>
-        <p:spPr/>
-        <p:txBody>
-          <a:bodyPr/>
-          <a:lstStyle/>
-          <a:p>
-            <a:endParaRPr lang="en-US"/>
-          </a:p>
-        </p:txBody>
-      </p:sp>
-    </p:spTree>
-    <p:extLst>
-      <p:ext uri="{BB962C8B-B14F-4D97-AF65-F5344CB8AC3E}">
-        <p14:creationId xmlns:p14="http://schemas.microsoft.com/office/powerpoint/2010/main" val="4286549381"/>
-      </p:ext>
-    </p:extLst>
-  </p:cSld>
-  <p:clrMapOvr>
-    <a:masterClrMapping/>
-  </p:clrMapOvr>
-</p:sld>
-</file>
-
-<file path=ppt/slides/slide19.xml><?xml version="1.0" encoding="utf-8"?>
 <p:sld xmlns:a="http://schemas.openxmlformats.org/drawingml/2006/main" xmlns:r="http://schemas.openxmlformats.org/officeDocument/2006/relationships" xmlns:p="http://schemas.openxmlformats.org/presentationml/2006/main">
   <p:cSld>
     <p:spTree>
@@ -10210,12 +13500,6 @@
           <a:p>
             <a:r>
               <a:rPr lang="en-US" dirty="0"/>
-              <a:t>Rotation by different shifts</a:t>
-            </a:r>
-          </a:p>
-          <a:p>
-            <a:r>
-              <a:rPr lang="en-US" dirty="0"/>
               <a:t>Key length the same as message length</a:t>
             </a:r>
           </a:p>
@@ -10234,537 +13518,7 @@
 </p:sld>
 </file>
 
-<file path=ppt/slides/slide2.xml><?xml version="1.0" encoding="utf-8"?>
-<p:sld xmlns:a="http://schemas.openxmlformats.org/drawingml/2006/main" xmlns:r="http://schemas.openxmlformats.org/officeDocument/2006/relationships" xmlns:p="http://schemas.openxmlformats.org/presentationml/2006/main">
-  <p:cSld>
-    <p:spTree>
-      <p:nvGrpSpPr>
-        <p:cNvPr id="1" name=""/>
-        <p:cNvGrpSpPr/>
-        <p:nvPr/>
-      </p:nvGrpSpPr>
-      <p:grpSpPr>
-        <a:xfrm>
-          <a:off x="0" y="0"/>
-          <a:ext cx="0" cy="0"/>
-          <a:chOff x="0" y="0"/>
-          <a:chExt cx="0" cy="0"/>
-        </a:xfrm>
-      </p:grpSpPr>
-      <p:sp>
-        <p:nvSpPr>
-          <p:cNvPr id="2" name="Title 1">
-            <a:extLst>
-              <a:ext uri="{FF2B5EF4-FFF2-40B4-BE49-F238E27FC236}">
-                <a16:creationId xmlns:a16="http://schemas.microsoft.com/office/drawing/2014/main" id="{5F81097A-AAC3-4FE2-AB3E-5E14BCFFE2B9}"/>
-              </a:ext>
-            </a:extLst>
-          </p:cNvPr>
-          <p:cNvSpPr>
-            <a:spLocks noGrp="1"/>
-          </p:cNvSpPr>
-          <p:nvPr>
-            <p:ph type="title"/>
-          </p:nvPr>
-        </p:nvSpPr>
-        <p:spPr/>
-        <p:txBody>
-          <a:bodyPr/>
-          <a:lstStyle/>
-          <a:p>
-            <a:r>
-              <a:rPr lang="en-US" dirty="0"/>
-              <a:t>Modern Cryptography </a:t>
-            </a:r>
-          </a:p>
-        </p:txBody>
-      </p:sp>
-      <p:sp>
-        <p:nvSpPr>
-          <p:cNvPr id="6" name="Rectangle 5">
-            <a:extLst>
-              <a:ext uri="{FF2B5EF4-FFF2-40B4-BE49-F238E27FC236}">
-                <a16:creationId xmlns:a16="http://schemas.microsoft.com/office/drawing/2014/main" id="{63CFCF88-C4AC-475E-8DD0-04CD389F3592}"/>
-              </a:ext>
-            </a:extLst>
-          </p:cNvPr>
-          <p:cNvSpPr/>
-          <p:nvPr/>
-        </p:nvSpPr>
-        <p:spPr>
-          <a:xfrm>
-            <a:off x="2667000" y="1737386"/>
-            <a:ext cx="1449638" cy="994172"/>
-          </a:xfrm>
-          <a:prstGeom prst="rect">
-            <a:avLst/>
-          </a:prstGeom>
-        </p:spPr>
-        <p:style>
-          <a:lnRef idx="2">
-            <a:schemeClr val="accent1">
-              <a:shade val="50000"/>
-            </a:schemeClr>
-          </a:lnRef>
-          <a:fillRef idx="1">
-            <a:schemeClr val="accent1"/>
-          </a:fillRef>
-          <a:effectRef idx="0">
-            <a:schemeClr val="accent1"/>
-          </a:effectRef>
-          <a:fontRef idx="minor">
-            <a:schemeClr val="lt1"/>
-          </a:fontRef>
-        </p:style>
-        <p:txBody>
-          <a:bodyPr rtlCol="0" anchor="ctr"/>
-          <a:lstStyle/>
-          <a:p>
-            <a:pPr algn="ctr" defTabSz="685800"/>
-            <a:r>
-              <a:rPr lang="en-US" sz="1650" b="1" dirty="0">
-                <a:solidFill>
-                  <a:prstClr val="white"/>
-                </a:solidFill>
-                <a:latin typeface="Georgia" panose="02040502050405020303"/>
-              </a:rPr>
-              <a:t>Definitions</a:t>
-            </a:r>
-          </a:p>
-        </p:txBody>
-      </p:sp>
-      <p:sp>
-        <p:nvSpPr>
-          <p:cNvPr id="7" name="Rectangle 6">
-            <a:extLst>
-              <a:ext uri="{FF2B5EF4-FFF2-40B4-BE49-F238E27FC236}">
-                <a16:creationId xmlns:a16="http://schemas.microsoft.com/office/drawing/2014/main" id="{55999C47-F592-4D96-8A8E-25F33250F5F1}"/>
-              </a:ext>
-            </a:extLst>
-          </p:cNvPr>
-          <p:cNvSpPr/>
-          <p:nvPr/>
-        </p:nvSpPr>
-        <p:spPr>
-          <a:xfrm>
-            <a:off x="4912007" y="1733135"/>
-            <a:ext cx="1843495" cy="994172"/>
-          </a:xfrm>
-          <a:prstGeom prst="rect">
-            <a:avLst/>
-          </a:prstGeom>
-        </p:spPr>
-        <p:style>
-          <a:lnRef idx="2">
-            <a:schemeClr val="accent1">
-              <a:shade val="50000"/>
-            </a:schemeClr>
-          </a:lnRef>
-          <a:fillRef idx="1">
-            <a:schemeClr val="accent1"/>
-          </a:fillRef>
-          <a:effectRef idx="0">
-            <a:schemeClr val="accent1"/>
-          </a:effectRef>
-          <a:fontRef idx="minor">
-            <a:schemeClr val="lt1"/>
-          </a:fontRef>
-        </p:style>
-        <p:txBody>
-          <a:bodyPr rtlCol="0" anchor="ctr"/>
-          <a:lstStyle/>
-          <a:p>
-            <a:pPr algn="ctr" defTabSz="685800"/>
-            <a:r>
-              <a:rPr lang="en-US" sz="1650" b="1" dirty="0">
-                <a:solidFill>
-                  <a:prstClr val="white"/>
-                </a:solidFill>
-                <a:latin typeface="Georgia" panose="02040502050405020303"/>
-              </a:rPr>
-              <a:t>Constructions</a:t>
-            </a:r>
-          </a:p>
-        </p:txBody>
-      </p:sp>
-      <p:sp>
-        <p:nvSpPr>
-          <p:cNvPr id="15" name="Oval 14">
-            <a:extLst>
-              <a:ext uri="{FF2B5EF4-FFF2-40B4-BE49-F238E27FC236}">
-                <a16:creationId xmlns:a16="http://schemas.microsoft.com/office/drawing/2014/main" id="{99F92670-CF4E-47FF-AA8A-05E8D6726162}"/>
-              </a:ext>
-            </a:extLst>
-          </p:cNvPr>
-          <p:cNvSpPr/>
-          <p:nvPr/>
-        </p:nvSpPr>
-        <p:spPr>
-          <a:xfrm>
-            <a:off x="5672531" y="3598093"/>
-            <a:ext cx="2333762" cy="817322"/>
-          </a:xfrm>
-          <a:prstGeom prst="ellipse">
-            <a:avLst/>
-          </a:prstGeom>
-          <a:solidFill>
-            <a:srgbClr val="00B050"/>
-          </a:solidFill>
-        </p:spPr>
-        <p:style>
-          <a:lnRef idx="2">
-            <a:schemeClr val="accent1">
-              <a:shade val="50000"/>
-            </a:schemeClr>
-          </a:lnRef>
-          <a:fillRef idx="1">
-            <a:schemeClr val="accent1"/>
-          </a:fillRef>
-          <a:effectRef idx="0">
-            <a:schemeClr val="accent1"/>
-          </a:effectRef>
-          <a:fontRef idx="minor">
-            <a:schemeClr val="lt1"/>
-          </a:fontRef>
-        </p:style>
-        <p:txBody>
-          <a:bodyPr rtlCol="0" anchor="ctr"/>
-          <a:lstStyle/>
-          <a:p>
-            <a:pPr algn="ctr" defTabSz="685800"/>
-            <a:r>
-              <a:rPr lang="en-US" sz="2000" dirty="0">
-                <a:solidFill>
-                  <a:prstClr val="white"/>
-                </a:solidFill>
-                <a:latin typeface="Georgia" panose="02040502050405020303"/>
-              </a:rPr>
-              <a:t>reductions</a:t>
-            </a:r>
-          </a:p>
-        </p:txBody>
-      </p:sp>
-      <p:sp>
-        <p:nvSpPr>
-          <p:cNvPr id="16" name="Oval 15">
-            <a:extLst>
-              <a:ext uri="{FF2B5EF4-FFF2-40B4-BE49-F238E27FC236}">
-                <a16:creationId xmlns:a16="http://schemas.microsoft.com/office/drawing/2014/main" id="{E9E70701-E1CA-449A-958F-9FD958A7842F}"/>
-              </a:ext>
-            </a:extLst>
-          </p:cNvPr>
-          <p:cNvSpPr/>
-          <p:nvPr/>
-        </p:nvSpPr>
-        <p:spPr>
-          <a:xfrm>
-            <a:off x="9157530" y="3598093"/>
-            <a:ext cx="2408664" cy="817322"/>
-          </a:xfrm>
-          <a:prstGeom prst="ellipse">
-            <a:avLst/>
-          </a:prstGeom>
-          <a:solidFill>
-            <a:srgbClr val="00B050"/>
-          </a:solidFill>
-        </p:spPr>
-        <p:style>
-          <a:lnRef idx="2">
-            <a:schemeClr val="accent1">
-              <a:shade val="50000"/>
-            </a:schemeClr>
-          </a:lnRef>
-          <a:fillRef idx="1">
-            <a:schemeClr val="accent1"/>
-          </a:fillRef>
-          <a:effectRef idx="0">
-            <a:schemeClr val="accent1"/>
-          </a:effectRef>
-          <a:fontRef idx="minor">
-            <a:schemeClr val="lt1"/>
-          </a:fontRef>
-        </p:style>
-        <p:txBody>
-          <a:bodyPr rtlCol="0" anchor="ctr"/>
-          <a:lstStyle/>
-          <a:p>
-            <a:pPr algn="ctr" defTabSz="685800"/>
-            <a:r>
-              <a:rPr lang="en-US" sz="2000" dirty="0">
-                <a:solidFill>
-                  <a:prstClr val="white"/>
-                </a:solidFill>
-                <a:latin typeface="Georgia" panose="02040502050405020303"/>
-              </a:rPr>
-              <a:t>assumptions</a:t>
-            </a:r>
-          </a:p>
-        </p:txBody>
-      </p:sp>
-      <p:sp>
-        <p:nvSpPr>
-          <p:cNvPr id="17" name="Rectangle 16">
-            <a:extLst>
-              <a:ext uri="{FF2B5EF4-FFF2-40B4-BE49-F238E27FC236}">
-                <a16:creationId xmlns:a16="http://schemas.microsoft.com/office/drawing/2014/main" id="{345F117B-C9A5-48A0-971F-C27A274FF299}"/>
-              </a:ext>
-            </a:extLst>
-          </p:cNvPr>
-          <p:cNvSpPr/>
-          <p:nvPr/>
-        </p:nvSpPr>
-        <p:spPr>
-          <a:xfrm>
-            <a:off x="7640311" y="1733135"/>
-            <a:ext cx="1843495" cy="994172"/>
-          </a:xfrm>
-          <a:prstGeom prst="rect">
-            <a:avLst/>
-          </a:prstGeom>
-        </p:spPr>
-        <p:style>
-          <a:lnRef idx="2">
-            <a:schemeClr val="accent1">
-              <a:shade val="50000"/>
-            </a:schemeClr>
-          </a:lnRef>
-          <a:fillRef idx="1">
-            <a:schemeClr val="accent1"/>
-          </a:fillRef>
-          <a:effectRef idx="0">
-            <a:schemeClr val="accent1"/>
-          </a:effectRef>
-          <a:fontRef idx="minor">
-            <a:schemeClr val="lt1"/>
-          </a:fontRef>
-        </p:style>
-        <p:txBody>
-          <a:bodyPr rtlCol="0" anchor="ctr"/>
-          <a:lstStyle/>
-          <a:p>
-            <a:pPr algn="ctr" defTabSz="685800"/>
-            <a:r>
-              <a:rPr lang="en-US" sz="1650" b="1" dirty="0">
-                <a:solidFill>
-                  <a:prstClr val="white"/>
-                </a:solidFill>
-                <a:latin typeface="Georgia" panose="02040502050405020303"/>
-              </a:rPr>
-              <a:t>Proof</a:t>
-            </a:r>
-          </a:p>
-        </p:txBody>
-      </p:sp>
-      <p:sp>
-        <p:nvSpPr>
-          <p:cNvPr id="21" name="Arrow: Right 20">
-            <a:extLst>
-              <a:ext uri="{FF2B5EF4-FFF2-40B4-BE49-F238E27FC236}">
-                <a16:creationId xmlns:a16="http://schemas.microsoft.com/office/drawing/2014/main" id="{30AEFA8A-0D38-4AD9-BEFF-651773655768}"/>
-              </a:ext>
-            </a:extLst>
-          </p:cNvPr>
-          <p:cNvSpPr/>
-          <p:nvPr/>
-        </p:nvSpPr>
-        <p:spPr>
-          <a:xfrm rot="8873894">
-            <a:off x="7337608" y="3045471"/>
-            <a:ext cx="757732" cy="255730"/>
-          </a:xfrm>
-          <a:prstGeom prst="rightArrow">
-            <a:avLst>
-              <a:gd name="adj1" fmla="val 50000"/>
-              <a:gd name="adj2" fmla="val 86595"/>
-            </a:avLst>
-          </a:prstGeom>
-          <a:solidFill>
-            <a:srgbClr val="FF0000"/>
-          </a:solidFill>
-        </p:spPr>
-        <p:style>
-          <a:lnRef idx="2">
-            <a:schemeClr val="accent1">
-              <a:shade val="50000"/>
-            </a:schemeClr>
-          </a:lnRef>
-          <a:fillRef idx="1">
-            <a:schemeClr val="accent1"/>
-          </a:fillRef>
-          <a:effectRef idx="0">
-            <a:schemeClr val="accent1"/>
-          </a:effectRef>
-          <a:fontRef idx="minor">
-            <a:schemeClr val="lt1"/>
-          </a:fontRef>
-        </p:style>
-        <p:txBody>
-          <a:bodyPr rtlCol="0" anchor="ctr"/>
-          <a:lstStyle/>
-          <a:p>
-            <a:pPr algn="ctr"/>
-            <a:endParaRPr lang="en-US"/>
-          </a:p>
-        </p:txBody>
-      </p:sp>
-      <p:sp>
-        <p:nvSpPr>
-          <p:cNvPr id="22" name="Arrow: Right 21">
-            <a:extLst>
-              <a:ext uri="{FF2B5EF4-FFF2-40B4-BE49-F238E27FC236}">
-                <a16:creationId xmlns:a16="http://schemas.microsoft.com/office/drawing/2014/main" id="{A76C7111-4A35-47E2-A380-2B07E5BF7F71}"/>
-              </a:ext>
-            </a:extLst>
-          </p:cNvPr>
-          <p:cNvSpPr/>
-          <p:nvPr/>
-        </p:nvSpPr>
-        <p:spPr>
-          <a:xfrm rot="2145852">
-            <a:off x="9104939" y="3132042"/>
-            <a:ext cx="757732" cy="255730"/>
-          </a:xfrm>
-          <a:prstGeom prst="rightArrow">
-            <a:avLst>
-              <a:gd name="adj1" fmla="val 50000"/>
-              <a:gd name="adj2" fmla="val 86595"/>
-            </a:avLst>
-          </a:prstGeom>
-          <a:solidFill>
-            <a:srgbClr val="FF0000"/>
-          </a:solidFill>
-        </p:spPr>
-        <p:style>
-          <a:lnRef idx="2">
-            <a:schemeClr val="accent1">
-              <a:shade val="50000"/>
-            </a:schemeClr>
-          </a:lnRef>
-          <a:fillRef idx="1">
-            <a:schemeClr val="accent1"/>
-          </a:fillRef>
-          <a:effectRef idx="0">
-            <a:schemeClr val="accent1"/>
-          </a:effectRef>
-          <a:fontRef idx="minor">
-            <a:schemeClr val="lt1"/>
-          </a:fontRef>
-        </p:style>
-        <p:txBody>
-          <a:bodyPr rtlCol="0" anchor="ctr"/>
-          <a:lstStyle/>
-          <a:p>
-            <a:pPr algn="ctr"/>
-            <a:endParaRPr lang="en-US"/>
-          </a:p>
-        </p:txBody>
-      </p:sp>
-    </p:spTree>
-    <p:extLst>
-      <p:ext uri="{BB962C8B-B14F-4D97-AF65-F5344CB8AC3E}">
-        <p14:creationId xmlns:p14="http://schemas.microsoft.com/office/powerpoint/2010/main" val="2153812710"/>
-      </p:ext>
-    </p:extLst>
-  </p:cSld>
-  <p:clrMapOvr>
-    <a:masterClrMapping/>
-  </p:clrMapOvr>
-</p:sld>
-</file>
-
-<file path=ppt/slides/slide20.xml><?xml version="1.0" encoding="utf-8"?>
-<p:sld xmlns:a="http://schemas.openxmlformats.org/drawingml/2006/main" xmlns:r="http://schemas.openxmlformats.org/officeDocument/2006/relationships" xmlns:p="http://schemas.openxmlformats.org/presentationml/2006/main" show="0">
-  <p:cSld>
-    <p:spTree>
-      <p:nvGrpSpPr>
-        <p:cNvPr id="1" name=""/>
-        <p:cNvGrpSpPr/>
-        <p:nvPr/>
-      </p:nvGrpSpPr>
-      <p:grpSpPr>
-        <a:xfrm>
-          <a:off x="0" y="0"/>
-          <a:ext cx="0" cy="0"/>
-          <a:chOff x="0" y="0"/>
-          <a:chExt cx="0" cy="0"/>
-        </a:xfrm>
-      </p:grpSpPr>
-      <p:sp>
-        <p:nvSpPr>
-          <p:cNvPr id="2" name="Title 1">
-            <a:extLst>
-              <a:ext uri="{FF2B5EF4-FFF2-40B4-BE49-F238E27FC236}">
-                <a16:creationId xmlns:a16="http://schemas.microsoft.com/office/drawing/2014/main" id="{F9043F74-034E-4BDE-B982-7F6D0854C450}"/>
-              </a:ext>
-            </a:extLst>
-          </p:cNvPr>
-          <p:cNvSpPr>
-            <a:spLocks noGrp="1"/>
-          </p:cNvSpPr>
-          <p:nvPr>
-            <p:ph type="title"/>
-          </p:nvPr>
-        </p:nvSpPr>
-        <p:spPr/>
-        <p:txBody>
-          <a:bodyPr/>
-          <a:lstStyle/>
-          <a:p>
-            <a:r>
-              <a:rPr lang="en-US" dirty="0"/>
-              <a:t>Rotation vs modular addition </a:t>
-            </a:r>
-          </a:p>
-        </p:txBody>
-      </p:sp>
-      <p:sp>
-        <p:nvSpPr>
-          <p:cNvPr id="3" name="Content Placeholder 2">
-            <a:extLst>
-              <a:ext uri="{FF2B5EF4-FFF2-40B4-BE49-F238E27FC236}">
-                <a16:creationId xmlns:a16="http://schemas.microsoft.com/office/drawing/2014/main" id="{A331CB3C-B56D-4719-8BED-2BED4E1E1662}"/>
-              </a:ext>
-            </a:extLst>
-          </p:cNvPr>
-          <p:cNvSpPr>
-            <a:spLocks noGrp="1"/>
-          </p:cNvSpPr>
-          <p:nvPr>
-            <p:ph idx="1"/>
-          </p:nvPr>
-        </p:nvSpPr>
-        <p:spPr/>
-        <p:txBody>
-          <a:bodyPr/>
-          <a:lstStyle/>
-          <a:p>
-            <a:r>
-              <a:rPr lang="en-US" dirty="0"/>
-              <a:t>M: r   K: 24  --  C:  p</a:t>
-            </a:r>
-          </a:p>
-          <a:p>
-            <a:r>
-              <a:rPr lang="en-US" dirty="0"/>
-              <a:t>18 + 24 =  16 mod 26</a:t>
-            </a:r>
-          </a:p>
-        </p:txBody>
-      </p:sp>
-    </p:spTree>
-    <p:extLst>
-      <p:ext uri="{BB962C8B-B14F-4D97-AF65-F5344CB8AC3E}">
-        <p14:creationId xmlns:p14="http://schemas.microsoft.com/office/powerpoint/2010/main" val="1672580099"/>
-      </p:ext>
-    </p:extLst>
-  </p:cSld>
-  <p:clrMapOvr>
-    <a:masterClrMapping/>
-  </p:clrMapOvr>
-</p:sld>
-</file>
-
-<file path=ppt/slides/slide21.xml><?xml version="1.0" encoding="utf-8"?>
+<file path=ppt/slides/slide19.xml><?xml version="1.0" encoding="utf-8"?>
 <p:sld xmlns:a="http://schemas.openxmlformats.org/drawingml/2006/main" xmlns:r="http://schemas.openxmlformats.org/officeDocument/2006/relationships" xmlns:p="http://schemas.openxmlformats.org/presentationml/2006/main">
   <p:cSld>
     <p:spTree>
@@ -11901,7 +14655,470 @@
 </p:sld>
 </file>
 
-<file path=ppt/slides/slide22.xml><?xml version="1.0" encoding="utf-8"?>
+<file path=ppt/slides/slide2.xml><?xml version="1.0" encoding="utf-8"?>
+<p:sld xmlns:a="http://schemas.openxmlformats.org/drawingml/2006/main" xmlns:r="http://schemas.openxmlformats.org/officeDocument/2006/relationships" xmlns:p="http://schemas.openxmlformats.org/presentationml/2006/main">
+  <p:cSld>
+    <p:spTree>
+      <p:nvGrpSpPr>
+        <p:cNvPr id="1" name=""/>
+        <p:cNvGrpSpPr/>
+        <p:nvPr/>
+      </p:nvGrpSpPr>
+      <p:grpSpPr>
+        <a:xfrm>
+          <a:off x="0" y="0"/>
+          <a:ext cx="0" cy="0"/>
+          <a:chOff x="0" y="0"/>
+          <a:chExt cx="0" cy="0"/>
+        </a:xfrm>
+      </p:grpSpPr>
+      <p:sp>
+        <p:nvSpPr>
+          <p:cNvPr id="2" name="Title 1">
+            <a:extLst>
+              <a:ext uri="{FF2B5EF4-FFF2-40B4-BE49-F238E27FC236}">
+                <a16:creationId xmlns:a16="http://schemas.microsoft.com/office/drawing/2014/main" id="{5F81097A-AAC3-4FE2-AB3E-5E14BCFFE2B9}"/>
+              </a:ext>
+            </a:extLst>
+          </p:cNvPr>
+          <p:cNvSpPr>
+            <a:spLocks noGrp="1"/>
+          </p:cNvSpPr>
+          <p:nvPr>
+            <p:ph type="title"/>
+          </p:nvPr>
+        </p:nvSpPr>
+        <p:spPr/>
+        <p:txBody>
+          <a:bodyPr/>
+          <a:lstStyle/>
+          <a:p>
+            <a:r>
+              <a:rPr lang="en-US" dirty="0"/>
+              <a:t>Modern Cryptography </a:t>
+            </a:r>
+          </a:p>
+        </p:txBody>
+      </p:sp>
+      <p:sp>
+        <p:nvSpPr>
+          <p:cNvPr id="3" name="Content Placeholder 2">
+            <a:extLst>
+              <a:ext uri="{FF2B5EF4-FFF2-40B4-BE49-F238E27FC236}">
+                <a16:creationId xmlns:a16="http://schemas.microsoft.com/office/drawing/2014/main" id="{8A2A8D64-38CF-CCBD-3591-C7AAD2ED08AE}"/>
+              </a:ext>
+            </a:extLst>
+          </p:cNvPr>
+          <p:cNvSpPr>
+            <a:spLocks noGrp="1"/>
+          </p:cNvSpPr>
+          <p:nvPr>
+            <p:ph idx="1"/>
+          </p:nvPr>
+        </p:nvSpPr>
+        <p:spPr/>
+        <p:txBody>
+          <a:bodyPr/>
+          <a:lstStyle/>
+          <a:p>
+            <a:endParaRPr lang="en-US" dirty="0"/>
+          </a:p>
+        </p:txBody>
+      </p:sp>
+      <p:sp>
+        <p:nvSpPr>
+          <p:cNvPr id="6" name="Rectangle 5">
+            <a:extLst>
+              <a:ext uri="{FF2B5EF4-FFF2-40B4-BE49-F238E27FC236}">
+                <a16:creationId xmlns:a16="http://schemas.microsoft.com/office/drawing/2014/main" id="{63CFCF88-C4AC-475E-8DD0-04CD389F3592}"/>
+              </a:ext>
+            </a:extLst>
+          </p:cNvPr>
+          <p:cNvSpPr/>
+          <p:nvPr/>
+        </p:nvSpPr>
+        <p:spPr>
+          <a:xfrm>
+            <a:off x="2667000" y="1737386"/>
+            <a:ext cx="1449638" cy="994172"/>
+          </a:xfrm>
+          <a:prstGeom prst="rect">
+            <a:avLst/>
+          </a:prstGeom>
+        </p:spPr>
+        <p:style>
+          <a:lnRef idx="2">
+            <a:schemeClr val="accent1">
+              <a:shade val="50000"/>
+            </a:schemeClr>
+          </a:lnRef>
+          <a:fillRef idx="1">
+            <a:schemeClr val="accent1"/>
+          </a:fillRef>
+          <a:effectRef idx="0">
+            <a:schemeClr val="accent1"/>
+          </a:effectRef>
+          <a:fontRef idx="minor">
+            <a:schemeClr val="lt1"/>
+          </a:fontRef>
+        </p:style>
+        <p:txBody>
+          <a:bodyPr rtlCol="0" anchor="ctr"/>
+          <a:lstStyle/>
+          <a:p>
+            <a:pPr algn="ctr" defTabSz="685800"/>
+            <a:r>
+              <a:rPr lang="en-US" sz="1650" b="1" dirty="0">
+                <a:solidFill>
+                  <a:prstClr val="white"/>
+                </a:solidFill>
+                <a:latin typeface="Georgia" panose="02040502050405020303"/>
+              </a:rPr>
+              <a:t>Definitions</a:t>
+            </a:r>
+          </a:p>
+        </p:txBody>
+      </p:sp>
+      <p:sp>
+        <p:nvSpPr>
+          <p:cNvPr id="7" name="Rectangle 6">
+            <a:extLst>
+              <a:ext uri="{FF2B5EF4-FFF2-40B4-BE49-F238E27FC236}">
+                <a16:creationId xmlns:a16="http://schemas.microsoft.com/office/drawing/2014/main" id="{55999C47-F592-4D96-8A8E-25F33250F5F1}"/>
+              </a:ext>
+            </a:extLst>
+          </p:cNvPr>
+          <p:cNvSpPr/>
+          <p:nvPr/>
+        </p:nvSpPr>
+        <p:spPr>
+          <a:xfrm>
+            <a:off x="4912007" y="1733135"/>
+            <a:ext cx="1843495" cy="994172"/>
+          </a:xfrm>
+          <a:prstGeom prst="rect">
+            <a:avLst/>
+          </a:prstGeom>
+        </p:spPr>
+        <p:style>
+          <a:lnRef idx="2">
+            <a:schemeClr val="accent1">
+              <a:shade val="50000"/>
+            </a:schemeClr>
+          </a:lnRef>
+          <a:fillRef idx="1">
+            <a:schemeClr val="accent1"/>
+          </a:fillRef>
+          <a:effectRef idx="0">
+            <a:schemeClr val="accent1"/>
+          </a:effectRef>
+          <a:fontRef idx="minor">
+            <a:schemeClr val="lt1"/>
+          </a:fontRef>
+        </p:style>
+        <p:txBody>
+          <a:bodyPr rtlCol="0" anchor="ctr"/>
+          <a:lstStyle/>
+          <a:p>
+            <a:pPr algn="ctr" defTabSz="685800"/>
+            <a:r>
+              <a:rPr lang="en-US" sz="1650" b="1" dirty="0">
+                <a:solidFill>
+                  <a:prstClr val="white"/>
+                </a:solidFill>
+                <a:latin typeface="Georgia" panose="02040502050405020303"/>
+              </a:rPr>
+              <a:t>Constructions</a:t>
+            </a:r>
+          </a:p>
+        </p:txBody>
+      </p:sp>
+      <p:sp>
+        <p:nvSpPr>
+          <p:cNvPr id="15" name="Oval 14">
+            <a:extLst>
+              <a:ext uri="{FF2B5EF4-FFF2-40B4-BE49-F238E27FC236}">
+                <a16:creationId xmlns:a16="http://schemas.microsoft.com/office/drawing/2014/main" id="{99F92670-CF4E-47FF-AA8A-05E8D6726162}"/>
+              </a:ext>
+            </a:extLst>
+          </p:cNvPr>
+          <p:cNvSpPr/>
+          <p:nvPr/>
+        </p:nvSpPr>
+        <p:spPr>
+          <a:xfrm>
+            <a:off x="5672531" y="3598093"/>
+            <a:ext cx="2333762" cy="817322"/>
+          </a:xfrm>
+          <a:prstGeom prst="ellipse">
+            <a:avLst/>
+          </a:prstGeom>
+          <a:solidFill>
+            <a:srgbClr val="00B050"/>
+          </a:solidFill>
+        </p:spPr>
+        <p:style>
+          <a:lnRef idx="2">
+            <a:schemeClr val="accent1">
+              <a:shade val="50000"/>
+            </a:schemeClr>
+          </a:lnRef>
+          <a:fillRef idx="1">
+            <a:schemeClr val="accent1"/>
+          </a:fillRef>
+          <a:effectRef idx="0">
+            <a:schemeClr val="accent1"/>
+          </a:effectRef>
+          <a:fontRef idx="minor">
+            <a:schemeClr val="lt1"/>
+          </a:fontRef>
+        </p:style>
+        <p:txBody>
+          <a:bodyPr rtlCol="0" anchor="ctr"/>
+          <a:lstStyle/>
+          <a:p>
+            <a:pPr algn="ctr" defTabSz="685800"/>
+            <a:r>
+              <a:rPr lang="en-US" sz="2000" dirty="0">
+                <a:solidFill>
+                  <a:prstClr val="white"/>
+                </a:solidFill>
+                <a:latin typeface="Georgia" panose="02040502050405020303"/>
+              </a:rPr>
+              <a:t>reductions</a:t>
+            </a:r>
+          </a:p>
+        </p:txBody>
+      </p:sp>
+      <p:sp>
+        <p:nvSpPr>
+          <p:cNvPr id="16" name="Oval 15">
+            <a:extLst>
+              <a:ext uri="{FF2B5EF4-FFF2-40B4-BE49-F238E27FC236}">
+                <a16:creationId xmlns:a16="http://schemas.microsoft.com/office/drawing/2014/main" id="{E9E70701-E1CA-449A-958F-9FD958A7842F}"/>
+              </a:ext>
+            </a:extLst>
+          </p:cNvPr>
+          <p:cNvSpPr/>
+          <p:nvPr/>
+        </p:nvSpPr>
+        <p:spPr>
+          <a:xfrm>
+            <a:off x="9157530" y="3598093"/>
+            <a:ext cx="2408664" cy="817322"/>
+          </a:xfrm>
+          <a:prstGeom prst="ellipse">
+            <a:avLst/>
+          </a:prstGeom>
+          <a:solidFill>
+            <a:srgbClr val="00B050"/>
+          </a:solidFill>
+        </p:spPr>
+        <p:style>
+          <a:lnRef idx="2">
+            <a:schemeClr val="accent1">
+              <a:shade val="50000"/>
+            </a:schemeClr>
+          </a:lnRef>
+          <a:fillRef idx="1">
+            <a:schemeClr val="accent1"/>
+          </a:fillRef>
+          <a:effectRef idx="0">
+            <a:schemeClr val="accent1"/>
+          </a:effectRef>
+          <a:fontRef idx="minor">
+            <a:schemeClr val="lt1"/>
+          </a:fontRef>
+        </p:style>
+        <p:txBody>
+          <a:bodyPr rtlCol="0" anchor="ctr"/>
+          <a:lstStyle/>
+          <a:p>
+            <a:pPr algn="ctr" defTabSz="685800"/>
+            <a:r>
+              <a:rPr lang="en-US" sz="2000" dirty="0">
+                <a:solidFill>
+                  <a:prstClr val="white"/>
+                </a:solidFill>
+                <a:latin typeface="Georgia" panose="02040502050405020303"/>
+              </a:rPr>
+              <a:t>assumptions</a:t>
+            </a:r>
+          </a:p>
+        </p:txBody>
+      </p:sp>
+      <p:sp>
+        <p:nvSpPr>
+          <p:cNvPr id="17" name="Rectangle 16">
+            <a:extLst>
+              <a:ext uri="{FF2B5EF4-FFF2-40B4-BE49-F238E27FC236}">
+                <a16:creationId xmlns:a16="http://schemas.microsoft.com/office/drawing/2014/main" id="{345F117B-C9A5-48A0-971F-C27A274FF299}"/>
+              </a:ext>
+            </a:extLst>
+          </p:cNvPr>
+          <p:cNvSpPr/>
+          <p:nvPr/>
+        </p:nvSpPr>
+        <p:spPr>
+          <a:xfrm>
+            <a:off x="7640311" y="1733135"/>
+            <a:ext cx="1843495" cy="994172"/>
+          </a:xfrm>
+          <a:prstGeom prst="rect">
+            <a:avLst/>
+          </a:prstGeom>
+        </p:spPr>
+        <p:style>
+          <a:lnRef idx="2">
+            <a:schemeClr val="accent1">
+              <a:shade val="50000"/>
+            </a:schemeClr>
+          </a:lnRef>
+          <a:fillRef idx="1">
+            <a:schemeClr val="accent1"/>
+          </a:fillRef>
+          <a:effectRef idx="0">
+            <a:schemeClr val="accent1"/>
+          </a:effectRef>
+          <a:fontRef idx="minor">
+            <a:schemeClr val="lt1"/>
+          </a:fontRef>
+        </p:style>
+        <p:txBody>
+          <a:bodyPr rtlCol="0" anchor="ctr"/>
+          <a:lstStyle/>
+          <a:p>
+            <a:pPr algn="ctr" defTabSz="685800"/>
+            <a:r>
+              <a:rPr lang="en-US" sz="1650" b="1" dirty="0">
+                <a:solidFill>
+                  <a:prstClr val="white"/>
+                </a:solidFill>
+                <a:latin typeface="Georgia" panose="02040502050405020303"/>
+              </a:rPr>
+              <a:t>Proof</a:t>
+            </a:r>
+          </a:p>
+        </p:txBody>
+      </p:sp>
+      <p:sp>
+        <p:nvSpPr>
+          <p:cNvPr id="21" name="Arrow: Right 20">
+            <a:extLst>
+              <a:ext uri="{FF2B5EF4-FFF2-40B4-BE49-F238E27FC236}">
+                <a16:creationId xmlns:a16="http://schemas.microsoft.com/office/drawing/2014/main" id="{30AEFA8A-0D38-4AD9-BEFF-651773655768}"/>
+              </a:ext>
+            </a:extLst>
+          </p:cNvPr>
+          <p:cNvSpPr/>
+          <p:nvPr/>
+        </p:nvSpPr>
+        <p:spPr>
+          <a:xfrm rot="8873894">
+            <a:off x="7337608" y="3045471"/>
+            <a:ext cx="757732" cy="255730"/>
+          </a:xfrm>
+          <a:prstGeom prst="rightArrow">
+            <a:avLst>
+              <a:gd name="adj1" fmla="val 50000"/>
+              <a:gd name="adj2" fmla="val 86595"/>
+            </a:avLst>
+          </a:prstGeom>
+          <a:solidFill>
+            <a:srgbClr val="FF0000"/>
+          </a:solidFill>
+        </p:spPr>
+        <p:style>
+          <a:lnRef idx="2">
+            <a:schemeClr val="accent1">
+              <a:shade val="50000"/>
+            </a:schemeClr>
+          </a:lnRef>
+          <a:fillRef idx="1">
+            <a:schemeClr val="accent1"/>
+          </a:fillRef>
+          <a:effectRef idx="0">
+            <a:schemeClr val="accent1"/>
+          </a:effectRef>
+          <a:fontRef idx="minor">
+            <a:schemeClr val="lt1"/>
+          </a:fontRef>
+        </p:style>
+        <p:txBody>
+          <a:bodyPr rtlCol="0" anchor="ctr"/>
+          <a:lstStyle/>
+          <a:p>
+            <a:pPr algn="ctr"/>
+            <a:endParaRPr lang="en-US"/>
+          </a:p>
+        </p:txBody>
+      </p:sp>
+      <p:sp>
+        <p:nvSpPr>
+          <p:cNvPr id="22" name="Arrow: Right 21">
+            <a:extLst>
+              <a:ext uri="{FF2B5EF4-FFF2-40B4-BE49-F238E27FC236}">
+                <a16:creationId xmlns:a16="http://schemas.microsoft.com/office/drawing/2014/main" id="{A76C7111-4A35-47E2-A380-2B07E5BF7F71}"/>
+              </a:ext>
+            </a:extLst>
+          </p:cNvPr>
+          <p:cNvSpPr/>
+          <p:nvPr/>
+        </p:nvSpPr>
+        <p:spPr>
+          <a:xfrm rot="2145852">
+            <a:off x="9104939" y="3132042"/>
+            <a:ext cx="757732" cy="255730"/>
+          </a:xfrm>
+          <a:prstGeom prst="rightArrow">
+            <a:avLst>
+              <a:gd name="adj1" fmla="val 50000"/>
+              <a:gd name="adj2" fmla="val 86595"/>
+            </a:avLst>
+          </a:prstGeom>
+          <a:solidFill>
+            <a:srgbClr val="FF0000"/>
+          </a:solidFill>
+        </p:spPr>
+        <p:style>
+          <a:lnRef idx="2">
+            <a:schemeClr val="accent1">
+              <a:shade val="50000"/>
+            </a:schemeClr>
+          </a:lnRef>
+          <a:fillRef idx="1">
+            <a:schemeClr val="accent1"/>
+          </a:fillRef>
+          <a:effectRef idx="0">
+            <a:schemeClr val="accent1"/>
+          </a:effectRef>
+          <a:fontRef idx="minor">
+            <a:schemeClr val="lt1"/>
+          </a:fontRef>
+        </p:style>
+        <p:txBody>
+          <a:bodyPr rtlCol="0" anchor="ctr"/>
+          <a:lstStyle/>
+          <a:p>
+            <a:pPr algn="ctr"/>
+            <a:endParaRPr lang="en-US"/>
+          </a:p>
+        </p:txBody>
+      </p:sp>
+    </p:spTree>
+    <p:extLst>
+      <p:ext uri="{BB962C8B-B14F-4D97-AF65-F5344CB8AC3E}">
+        <p14:creationId xmlns:p14="http://schemas.microsoft.com/office/powerpoint/2010/main" val="2153812710"/>
+      </p:ext>
+    </p:extLst>
+  </p:cSld>
+  <p:clrMapOvr>
+    <a:masterClrMapping/>
+  </p:clrMapOvr>
+</p:sld>
+</file>
+
+<file path=ppt/slides/slide20.xml><?xml version="1.0" encoding="utf-8"?>
 <p:sld xmlns:a="http://schemas.openxmlformats.org/drawingml/2006/main" xmlns:r="http://schemas.openxmlformats.org/officeDocument/2006/relationships" xmlns:p="http://schemas.openxmlformats.org/presentationml/2006/main">
   <p:cSld>
     <p:spTree>
@@ -11940,8 +15157,8 @@
           </a:p>
         </p:txBody>
       </p:sp>
-      <mc:AlternateContent xmlns:mc="http://schemas.openxmlformats.org/markup-compatibility/2006" xmlns:a14="http://schemas.microsoft.com/office/drawing/2010/main">
-        <mc:Choice Requires="a14">
+      <mc:AlternateContent xmlns:mc="http://schemas.openxmlformats.org/markup-compatibility/2006">
+        <mc:Choice xmlns:a14="http://schemas.microsoft.com/office/drawing/2010/main" Requires="a14">
           <p:sp>
             <p:nvSpPr>
               <p:cNvPr id="3" name="Content Placeholder 2"/>
@@ -12433,7 +15650,7 @@
             </p:txBody>
           </p:sp>
         </mc:Choice>
-        <mc:Fallback xmlns="">
+        <mc:Fallback>
           <p:sp>
             <p:nvSpPr>
               <p:cNvPr id="3" name="Content Placeholder 2"/>
@@ -12480,7 +15697,7 @@
 </p:sld>
 </file>
 
-<file path=ppt/slides/slide23.xml><?xml version="1.0" encoding="utf-8"?>
+<file path=ppt/slides/slide21.xml><?xml version="1.0" encoding="utf-8"?>
 <p:sld xmlns:a="http://schemas.openxmlformats.org/drawingml/2006/main" xmlns:r="http://schemas.openxmlformats.org/officeDocument/2006/relationships" xmlns:p="http://schemas.openxmlformats.org/presentationml/2006/main">
   <p:cSld>
     <p:spTree>
@@ -12517,6 +15734,31 @@
               <a:rPr lang="en-US" altLang="en-US" dirty="0"/>
               <a:t>One-time pad</a:t>
             </a:r>
+          </a:p>
+        </p:txBody>
+      </p:sp>
+      <p:sp>
+        <p:nvSpPr>
+          <p:cNvPr id="3" name="Content Placeholder 2">
+            <a:extLst>
+              <a:ext uri="{FF2B5EF4-FFF2-40B4-BE49-F238E27FC236}">
+                <a16:creationId xmlns:a16="http://schemas.microsoft.com/office/drawing/2014/main" id="{BD15CB30-D7E0-5743-741A-8361C999C836}"/>
+              </a:ext>
+            </a:extLst>
+          </p:cNvPr>
+          <p:cNvSpPr>
+            <a:spLocks noGrp="1"/>
+          </p:cNvSpPr>
+          <p:nvPr>
+            <p:ph idx="1"/>
+          </p:nvPr>
+        </p:nvSpPr>
+        <p:spPr/>
+        <p:txBody>
+          <a:bodyPr/>
+          <a:lstStyle/>
+          <a:p>
+            <a:endParaRPr lang="en-US"/>
           </a:p>
         </p:txBody>
       </p:sp>
@@ -13876,7 +17118,7 @@
 </p:sld>
 </file>
 
-<file path=ppt/slides/slide24.xml><?xml version="1.0" encoding="utf-8"?>
+<file path=ppt/slides/slide22.xml><?xml version="1.0" encoding="utf-8"?>
 <p:sld xmlns:a="http://schemas.openxmlformats.org/drawingml/2006/main" xmlns:r="http://schemas.openxmlformats.org/officeDocument/2006/relationships" xmlns:p="http://schemas.openxmlformats.org/presentationml/2006/main">
   <p:cSld>
     <p:spTree>
@@ -14313,7 +17555,7 @@
 </p:sld>
 </file>
 
-<file path=ppt/slides/slide25.xml><?xml version="1.0" encoding="utf-8"?>
+<file path=ppt/slides/slide23.xml><?xml version="1.0" encoding="utf-8"?>
 <p:sld xmlns:a="http://schemas.openxmlformats.org/drawingml/2006/main" xmlns:r="http://schemas.openxmlformats.org/officeDocument/2006/relationships" xmlns:p="http://schemas.openxmlformats.org/presentationml/2006/main">
   <p:cSld>
     <p:spTree>
@@ -14358,8 +17600,8 @@
           </a:p>
         </p:txBody>
       </p:sp>
-      <mc:AlternateContent xmlns:mc="http://schemas.openxmlformats.org/markup-compatibility/2006" xmlns:a14="http://schemas.microsoft.com/office/drawing/2010/main">
-        <mc:Choice Requires="a14">
+      <mc:AlternateContent xmlns:mc="http://schemas.openxmlformats.org/markup-compatibility/2006">
+        <mc:Choice xmlns:a14="http://schemas.microsoft.com/office/drawing/2010/main" Requires="a14">
           <p:sp>
             <p:nvSpPr>
               <p:cNvPr id="3" name="Content Placeholder 2">
@@ -14694,7 +17936,7 @@
             </p:txBody>
           </p:sp>
         </mc:Choice>
-        <mc:Fallback xmlns="">
+        <mc:Fallback>
           <p:sp>
             <p:nvSpPr>
               <p:cNvPr id="3" name="Content Placeholder 2">
@@ -14715,7 +17957,7 @@
               <a:blipFill>
                 <a:blip r:embed="rId2"/>
                 <a:stretch>
-                  <a:fillRect/>
+                  <a:fillRect l="-1086" t="-1744"/>
                 </a:stretch>
               </a:blipFill>
             </p:spPr>
@@ -14747,7 +17989,7 @@
 </p:sld>
 </file>
 
-<file path=ppt/slides/slide26.xml><?xml version="1.0" encoding="utf-8"?>
+<file path=ppt/slides/slide24.xml><?xml version="1.0" encoding="utf-8"?>
 <p:sld xmlns:a="http://schemas.openxmlformats.org/drawingml/2006/main" xmlns:r="http://schemas.openxmlformats.org/officeDocument/2006/relationships" xmlns:p="http://schemas.openxmlformats.org/presentationml/2006/main">
   <p:cSld>
     <p:spTree>
@@ -14792,8 +18034,8 @@
           </a:p>
         </p:txBody>
       </p:sp>
-      <mc:AlternateContent xmlns:mc="http://schemas.openxmlformats.org/markup-compatibility/2006" xmlns:a14="http://schemas.microsoft.com/office/drawing/2010/main">
-        <mc:Choice Requires="a14">
+      <mc:AlternateContent xmlns:mc="http://schemas.openxmlformats.org/markup-compatibility/2006">
+        <mc:Choice xmlns:a14="http://schemas.microsoft.com/office/drawing/2010/main" Requires="a14">
           <p:sp>
             <p:nvSpPr>
               <p:cNvPr id="3" name="Content Placeholder 2">
@@ -15380,7 +18622,7 @@
             </p:txBody>
           </p:sp>
         </mc:Choice>
-        <mc:Fallback xmlns="">
+        <mc:Fallback>
           <p:sp>
             <p:nvSpPr>
               <p:cNvPr id="3" name="Content Placeholder 2">
@@ -15401,7 +18643,7 @@
               <a:blipFill>
                 <a:blip r:embed="rId2"/>
                 <a:stretch>
-                  <a:fillRect/>
+                  <a:fillRect l="-1086" t="-16570"/>
                 </a:stretch>
               </a:blipFill>
             </p:spPr>
@@ -15659,96 +18901,7 @@
 </p:sld>
 </file>
 
-<file path=ppt/slides/slide27.xml><?xml version="1.0" encoding="utf-8"?>
-<p:sld xmlns:a="http://schemas.openxmlformats.org/drawingml/2006/main" xmlns:r="http://schemas.openxmlformats.org/officeDocument/2006/relationships" xmlns:p="http://schemas.openxmlformats.org/presentationml/2006/main">
-  <p:cSld>
-    <p:spTree>
-      <p:nvGrpSpPr>
-        <p:cNvPr id="1" name="">
-          <a:extLst>
-            <a:ext uri="{FF2B5EF4-FFF2-40B4-BE49-F238E27FC236}">
-              <a16:creationId xmlns:a16="http://schemas.microsoft.com/office/drawing/2014/main" id="{C050F6DA-8677-81CE-DDE6-585AC3A62384}"/>
-            </a:ext>
-          </a:extLst>
-        </p:cNvPr>
-        <p:cNvGrpSpPr/>
-        <p:nvPr/>
-      </p:nvGrpSpPr>
-      <p:grpSpPr>
-        <a:xfrm>
-          <a:off x="0" y="0"/>
-          <a:ext cx="0" cy="0"/>
-          <a:chOff x="0" y="0"/>
-          <a:chExt cx="0" cy="0"/>
-        </a:xfrm>
-      </p:grpSpPr>
-      <p:sp>
-        <p:nvSpPr>
-          <p:cNvPr id="2" name="Title 1">
-            <a:extLst>
-              <a:ext uri="{FF2B5EF4-FFF2-40B4-BE49-F238E27FC236}">
-                <a16:creationId xmlns:a16="http://schemas.microsoft.com/office/drawing/2014/main" id="{38FF41C3-D039-FB13-8669-191B81BE9158}"/>
-              </a:ext>
-            </a:extLst>
-          </p:cNvPr>
-          <p:cNvSpPr>
-            <a:spLocks noGrp="1"/>
-          </p:cNvSpPr>
-          <p:nvPr>
-            <p:ph type="title"/>
-          </p:nvPr>
-        </p:nvSpPr>
-        <p:spPr/>
-        <p:txBody>
-          <a:bodyPr/>
-          <a:lstStyle/>
-          <a:p>
-            <a:r>
-              <a:rPr lang="en-US" dirty="0"/>
-              <a:t>Quiz</a:t>
-            </a:r>
-          </a:p>
-        </p:txBody>
-      </p:sp>
-      <p:sp>
-        <p:nvSpPr>
-          <p:cNvPr id="3" name="Content Placeholder 2">
-            <a:extLst>
-              <a:ext uri="{FF2B5EF4-FFF2-40B4-BE49-F238E27FC236}">
-                <a16:creationId xmlns:a16="http://schemas.microsoft.com/office/drawing/2014/main" id="{B1A51A1C-4457-597D-181D-C3904EC27019}"/>
-              </a:ext>
-            </a:extLst>
-          </p:cNvPr>
-          <p:cNvSpPr>
-            <a:spLocks noGrp="1"/>
-          </p:cNvSpPr>
-          <p:nvPr>
-            <p:ph idx="1"/>
-          </p:nvPr>
-        </p:nvSpPr>
-        <p:spPr/>
-        <p:txBody>
-          <a:bodyPr/>
-          <a:lstStyle/>
-          <a:p>
-            <a:endParaRPr lang="en-US"/>
-          </a:p>
-        </p:txBody>
-      </p:sp>
-    </p:spTree>
-    <p:extLst>
-      <p:ext uri="{BB962C8B-B14F-4D97-AF65-F5344CB8AC3E}">
-        <p14:creationId xmlns:p14="http://schemas.microsoft.com/office/powerpoint/2010/main" val="545941336"/>
-      </p:ext>
-    </p:extLst>
-  </p:cSld>
-  <p:clrMapOvr>
-    <a:masterClrMapping/>
-  </p:clrMapOvr>
-</p:sld>
-</file>
-
-<file path=ppt/slides/slide28.xml><?xml version="1.0" encoding="utf-8"?>
+<file path=ppt/slides/slide25.xml><?xml version="1.0" encoding="utf-8"?>
 <p:sld xmlns:a="http://schemas.openxmlformats.org/drawingml/2006/main" xmlns:r="http://schemas.openxmlformats.org/officeDocument/2006/relationships" xmlns:p="http://schemas.openxmlformats.org/presentationml/2006/main">
   <p:cSld>
     <p:spTree>
@@ -15781,12 +18934,7 @@
             <p:ph type="title"/>
           </p:nvPr>
         </p:nvSpPr>
-        <p:spPr>
-          <a:xfrm>
-            <a:off x="445476" y="286726"/>
-            <a:ext cx="11697217" cy="1325563"/>
-          </a:xfrm>
-        </p:spPr>
+        <p:spPr/>
         <p:txBody>
           <a:bodyPr/>
           <a:lstStyle/>
@@ -15802,8 +18950,8 @@
           </a:p>
         </p:txBody>
       </p:sp>
-      <mc:AlternateContent xmlns:mc="http://schemas.openxmlformats.org/markup-compatibility/2006" xmlns:a14="http://schemas.microsoft.com/office/drawing/2010/main">
-        <mc:Choice Requires="a14">
+      <mc:AlternateContent xmlns:mc="http://schemas.openxmlformats.org/markup-compatibility/2006">
+        <mc:Choice xmlns:a14="http://schemas.microsoft.com/office/drawing/2010/main" Requires="a14">
           <p:sp>
             <p:nvSpPr>
               <p:cNvPr id="3" name="Content Placeholder 2">
@@ -15822,8 +18970,8 @@
             </p:nvSpPr>
             <p:spPr>
               <a:xfrm>
-                <a:off x="82446" y="1303066"/>
-                <a:ext cx="6258511" cy="4876800"/>
+                <a:off x="757765" y="1416703"/>
+                <a:ext cx="5969928" cy="4351338"/>
               </a:xfrm>
             </p:spPr>
             <p:txBody>
@@ -16231,7 +19379,7 @@
             </p:txBody>
           </p:sp>
         </mc:Choice>
-        <mc:Fallback xmlns="">
+        <mc:Fallback>
           <p:sp>
             <p:nvSpPr>
               <p:cNvPr id="3" name="Content Placeholder 2">
@@ -16250,13 +19398,13 @@
             </p:nvSpPr>
             <p:spPr>
               <a:xfrm>
-                <a:off x="82446" y="1303066"/>
-                <a:ext cx="6258511" cy="4876800"/>
+                <a:off x="757765" y="1416703"/>
+                <a:ext cx="5969928" cy="4351338"/>
               </a:xfrm>
               <a:blipFill>
                 <a:blip r:embed="rId3"/>
                 <a:stretch>
-                  <a:fillRect l="-1215" t="-2597" r="-607"/>
+                  <a:fillRect l="-1062" t="-2907" r="-2760"/>
                 </a:stretch>
               </a:blipFill>
             </p:spPr>
@@ -17223,7 +20371,7 @@
 </p:sld>
 </file>
 
-<file path=ppt/slides/slide29.xml><?xml version="1.0" encoding="utf-8"?>
+<file path=ppt/slides/slide26.xml><?xml version="1.0" encoding="utf-8"?>
 <p:sld xmlns:a="http://schemas.openxmlformats.org/drawingml/2006/main" xmlns:r="http://schemas.openxmlformats.org/officeDocument/2006/relationships" xmlns:p="http://schemas.openxmlformats.org/presentationml/2006/main">
   <p:cSld>
     <p:spTree>
@@ -17268,8 +20416,8 @@
           </a:p>
         </p:txBody>
       </p:sp>
-      <mc:AlternateContent xmlns:mc="http://schemas.openxmlformats.org/markup-compatibility/2006" xmlns:a14="http://schemas.microsoft.com/office/drawing/2010/main">
-        <mc:Choice Requires="a14">
+      <mc:AlternateContent xmlns:mc="http://schemas.openxmlformats.org/markup-compatibility/2006">
+        <mc:Choice xmlns:a14="http://schemas.microsoft.com/office/drawing/2010/main" Requires="a14">
           <p:sp>
             <p:nvSpPr>
               <p:cNvPr id="3" name="Content Placeholder 2">
@@ -17759,7 +20907,7 @@
             </p:txBody>
           </p:sp>
         </mc:Choice>
-        <mc:Fallback xmlns="">
+        <mc:Fallback>
           <p:sp>
             <p:nvSpPr>
               <p:cNvPr id="3" name="Content Placeholder 2">
@@ -17780,7 +20928,7 @@
               <a:blipFill>
                 <a:blip r:embed="rId2"/>
                 <a:stretch>
-                  <a:fillRect l="-1206" t="-3198" r="-362" b="-291"/>
+                  <a:fillRect l="-1206" t="-3198" r="-844"/>
                 </a:stretch>
               </a:blipFill>
             </p:spPr>
@@ -17812,112 +20960,7 @@
 </p:sld>
 </file>
 
-<file path=ppt/slides/slide3.xml><?xml version="1.0" encoding="utf-8"?>
-<p:sld xmlns:a="http://schemas.openxmlformats.org/drawingml/2006/main" xmlns:r="http://schemas.openxmlformats.org/officeDocument/2006/relationships" xmlns:p="http://schemas.openxmlformats.org/presentationml/2006/main">
-  <p:cSld>
-    <p:spTree>
-      <p:nvGrpSpPr>
-        <p:cNvPr id="1" name=""/>
-        <p:cNvGrpSpPr/>
-        <p:nvPr/>
-      </p:nvGrpSpPr>
-      <p:grpSpPr>
-        <a:xfrm>
-          <a:off x="0" y="0"/>
-          <a:ext cx="0" cy="0"/>
-          <a:chOff x="0" y="0"/>
-          <a:chExt cx="0" cy="0"/>
-        </a:xfrm>
-      </p:grpSpPr>
-      <p:sp>
-        <p:nvSpPr>
-          <p:cNvPr id="2" name="Title 1">
-            <a:extLst>
-              <a:ext uri="{FF2B5EF4-FFF2-40B4-BE49-F238E27FC236}">
-                <a16:creationId xmlns:a16="http://schemas.microsoft.com/office/drawing/2014/main" id="{775E3D97-B01F-44C6-8C46-6ADD45488367}"/>
-              </a:ext>
-            </a:extLst>
-          </p:cNvPr>
-          <p:cNvSpPr>
-            <a:spLocks noGrp="1"/>
-          </p:cNvSpPr>
-          <p:nvPr>
-            <p:ph type="title"/>
-          </p:nvPr>
-        </p:nvSpPr>
-        <p:spPr/>
-        <p:txBody>
-          <a:bodyPr/>
-          <a:lstStyle/>
-          <a:p>
-            <a:r>
-              <a:rPr lang="en-US" dirty="0"/>
-              <a:t>Symmetric-key Encryption</a:t>
-            </a:r>
-          </a:p>
-        </p:txBody>
-      </p:sp>
-      <p:pic>
-        <p:nvPicPr>
-          <p:cNvPr id="3074" name="Picture 2" descr="Image result for symmetric encryption">
-            <a:extLst>
-              <a:ext uri="{FF2B5EF4-FFF2-40B4-BE49-F238E27FC236}">
-                <a16:creationId xmlns:a16="http://schemas.microsoft.com/office/drawing/2014/main" id="{67E2A111-96F2-4CEF-B692-EA79CB0145E4}"/>
-              </a:ext>
-            </a:extLst>
-          </p:cNvPr>
-          <p:cNvPicPr>
-            <a:picLocks noChangeAspect="1" noChangeArrowheads="1"/>
-          </p:cNvPicPr>
-          <p:nvPr/>
-        </p:nvPicPr>
-        <p:blipFill>
-          <a:blip r:embed="rId2">
-            <a:extLst>
-              <a:ext uri="{28A0092B-C50C-407E-A947-70E740481C1C}">
-                <a14:useLocalDpi xmlns:a14="http://schemas.microsoft.com/office/drawing/2010/main" val="0"/>
-              </a:ext>
-            </a:extLst>
-          </a:blip>
-          <a:srcRect/>
-          <a:stretch>
-            <a:fillRect/>
-          </a:stretch>
-        </p:blipFill>
-        <p:spPr bwMode="auto">
-          <a:xfrm>
-            <a:off x="3196858" y="1899454"/>
-            <a:ext cx="5369138" cy="2934140"/>
-          </a:xfrm>
-          <a:prstGeom prst="rect">
-            <a:avLst/>
-          </a:prstGeom>
-          <a:noFill/>
-          <a:extLst>
-            <a:ext uri="{909E8E84-426E-40DD-AFC4-6F175D3DCCD1}">
-              <a14:hiddenFill xmlns:a14="http://schemas.microsoft.com/office/drawing/2010/main">
-                <a:solidFill>
-                  <a:srgbClr val="FFFFFF"/>
-                </a:solidFill>
-              </a14:hiddenFill>
-            </a:ext>
-          </a:extLst>
-        </p:spPr>
-      </p:pic>
-    </p:spTree>
-    <p:extLst>
-      <p:ext uri="{BB962C8B-B14F-4D97-AF65-F5344CB8AC3E}">
-        <p14:creationId xmlns:p14="http://schemas.microsoft.com/office/powerpoint/2010/main" val="277675870"/>
-      </p:ext>
-    </p:extLst>
-  </p:cSld>
-  <p:clrMapOvr>
-    <a:masterClrMapping/>
-  </p:clrMapOvr>
-</p:sld>
-</file>
-
-<file path=ppt/slides/slide30.xml><?xml version="1.0" encoding="utf-8"?>
+<file path=ppt/slides/slide27.xml><?xml version="1.0" encoding="utf-8"?>
 <p:sld xmlns:a="http://schemas.openxmlformats.org/drawingml/2006/main" xmlns:r="http://schemas.openxmlformats.org/officeDocument/2006/relationships" xmlns:p="http://schemas.openxmlformats.org/presentationml/2006/main">
   <p:cSld>
     <p:spTree>
@@ -18571,8 +21614,8 @@
           </p:sp>
         </mc:Fallback>
       </mc:AlternateContent>
-      <mc:AlternateContent xmlns:mc="http://schemas.openxmlformats.org/markup-compatibility/2006" xmlns:a14="http://schemas.microsoft.com/office/drawing/2010/main">
-        <mc:Choice Requires="a14">
+      <mc:AlternateContent xmlns:mc="http://schemas.openxmlformats.org/markup-compatibility/2006">
+        <mc:Choice xmlns:a14="http://schemas.microsoft.com/office/drawing/2010/main" Requires="a14">
           <p:sp>
             <p:nvSpPr>
               <p:cNvPr id="18" name="TextBox 17">
@@ -18588,7 +21631,7 @@
             <p:spPr>
               <a:xfrm>
                 <a:off x="771840" y="4187980"/>
-                <a:ext cx="7329423" cy="1323439"/>
+                <a:ext cx="7329423" cy="1200329"/>
               </a:xfrm>
               <a:prstGeom prst="rect">
                 <a:avLst/>
@@ -18704,16 +21747,10 @@
               </a:p>
               <a:p>
                 <a:r>
-                  <a:rPr lang="en-US" sz="3200" dirty="0">
-                    <a:latin typeface="Georgia" panose="02040502050405020303" pitchFamily="18" charset="0"/>
-                  </a:rPr>
-                  <a:t>Otherwise</a:t>
-                </a:r>
-                <a:r>
                   <a:rPr lang="en-US" sz="2400" dirty="0">
                     <a:latin typeface="Georgia" panose="02040502050405020303" pitchFamily="18" charset="0"/>
                   </a:rPr>
-                  <a:t>, output random bit </a:t>
+                  <a:t>Otherwise, output random bit </a:t>
                 </a:r>
                 <a14:m>
                   <m:oMath xmlns:m="http://schemas.openxmlformats.org/officeDocument/2006/math">
@@ -18798,7 +21835,7 @@
             </p:txBody>
           </p:sp>
         </mc:Choice>
-        <mc:Fallback xmlns="">
+        <mc:Fallback>
           <p:sp>
             <p:nvSpPr>
               <p:cNvPr id="18" name="TextBox 17">
@@ -18816,7 +21853,7 @@
             <p:spPr>
               <a:xfrm>
                 <a:off x="771840" y="4187980"/>
-                <a:ext cx="7329423" cy="1323439"/>
+                <a:ext cx="7329423" cy="1200329"/>
               </a:xfrm>
               <a:prstGeom prst="rect">
                 <a:avLst/>
@@ -18824,7 +21861,7 @@
               <a:blipFill>
                 <a:blip r:embed="rId6"/>
                 <a:stretch>
-                  <a:fillRect l="-2076" t="-3810"/>
+                  <a:fillRect l="-1211" t="-4167"/>
                 </a:stretch>
               </a:blipFill>
             </p:spPr>
@@ -18891,8 +21928,8 @@
           </a:p>
         </p:txBody>
       </p:sp>
-      <mc:AlternateContent xmlns:mc="http://schemas.openxmlformats.org/markup-compatibility/2006" xmlns:a14="http://schemas.microsoft.com/office/drawing/2010/main">
-        <mc:Choice Requires="a14">
+      <mc:AlternateContent xmlns:mc="http://schemas.openxmlformats.org/markup-compatibility/2006">
+        <mc:Choice xmlns:a14="http://schemas.microsoft.com/office/drawing/2010/main" Requires="a14">
           <p:sp>
             <p:nvSpPr>
               <p:cNvPr id="13" name="TextBox 12">
@@ -19282,7 +22319,7 @@
                           </a:solidFill>
                           <a:latin typeface="Cambria Math" panose="02040503050406030204" pitchFamily="18" charset="0"/>
                         </a:rPr>
-                        <m:t>≠</m:t>
+                        <m:t>&gt;</m:t>
                       </m:r>
                       <m:func>
                         <m:funcPr>
@@ -19508,7 +22545,7 @@
             </p:txBody>
           </p:sp>
         </mc:Choice>
-        <mc:Fallback xmlns="">
+        <mc:Fallback>
           <p:sp>
             <p:nvSpPr>
               <p:cNvPr id="13" name="TextBox 12">
@@ -19566,7 +22603,7 @@
 </p:sld>
 </file>
 
-<file path=ppt/slides/slide31.xml><?xml version="1.0" encoding="utf-8"?>
+<file path=ppt/slides/slide28.xml><?xml version="1.0" encoding="utf-8"?>
 <p:sld xmlns:a="http://schemas.openxmlformats.org/drawingml/2006/main" xmlns:r="http://schemas.openxmlformats.org/officeDocument/2006/relationships" xmlns:p="http://schemas.openxmlformats.org/presentationml/2006/main">
   <p:cSld>
     <p:spTree>
@@ -19771,6 +22808,136 @@
 </p:sld>
 </file>
 
+<file path=ppt/slides/slide3.xml><?xml version="1.0" encoding="utf-8"?>
+<p:sld xmlns:a="http://schemas.openxmlformats.org/drawingml/2006/main" xmlns:r="http://schemas.openxmlformats.org/officeDocument/2006/relationships" xmlns:p="http://schemas.openxmlformats.org/presentationml/2006/main">
+  <p:cSld>
+    <p:spTree>
+      <p:nvGrpSpPr>
+        <p:cNvPr id="1" name=""/>
+        <p:cNvGrpSpPr/>
+        <p:nvPr/>
+      </p:nvGrpSpPr>
+      <p:grpSpPr>
+        <a:xfrm>
+          <a:off x="0" y="0"/>
+          <a:ext cx="0" cy="0"/>
+          <a:chOff x="0" y="0"/>
+          <a:chExt cx="0" cy="0"/>
+        </a:xfrm>
+      </p:grpSpPr>
+      <p:sp>
+        <p:nvSpPr>
+          <p:cNvPr id="2" name="Title 1">
+            <a:extLst>
+              <a:ext uri="{FF2B5EF4-FFF2-40B4-BE49-F238E27FC236}">
+                <a16:creationId xmlns:a16="http://schemas.microsoft.com/office/drawing/2014/main" id="{775E3D97-B01F-44C6-8C46-6ADD45488367}"/>
+              </a:ext>
+            </a:extLst>
+          </p:cNvPr>
+          <p:cNvSpPr>
+            <a:spLocks noGrp="1"/>
+          </p:cNvSpPr>
+          <p:nvPr>
+            <p:ph type="title"/>
+          </p:nvPr>
+        </p:nvSpPr>
+        <p:spPr/>
+        <p:txBody>
+          <a:bodyPr/>
+          <a:lstStyle/>
+          <a:p>
+            <a:r>
+              <a:rPr lang="en-US" dirty="0"/>
+              <a:t>Symmetric-key Encryption</a:t>
+            </a:r>
+          </a:p>
+        </p:txBody>
+      </p:sp>
+      <p:sp>
+        <p:nvSpPr>
+          <p:cNvPr id="3" name="Content Placeholder 2">
+            <a:extLst>
+              <a:ext uri="{FF2B5EF4-FFF2-40B4-BE49-F238E27FC236}">
+                <a16:creationId xmlns:a16="http://schemas.microsoft.com/office/drawing/2014/main" id="{C0436161-DA3B-1DC7-F218-E18729410133}"/>
+              </a:ext>
+            </a:extLst>
+          </p:cNvPr>
+          <p:cNvSpPr>
+            <a:spLocks noGrp="1"/>
+          </p:cNvSpPr>
+          <p:nvPr>
+            <p:ph idx="1"/>
+          </p:nvPr>
+        </p:nvSpPr>
+        <p:spPr/>
+        <p:txBody>
+          <a:bodyPr/>
+          <a:lstStyle/>
+          <a:p>
+            <a:endParaRPr lang="en-US"/>
+          </a:p>
+        </p:txBody>
+      </p:sp>
+      <p:pic>
+        <p:nvPicPr>
+          <p:cNvPr id="3074" name="Picture 2" descr="Image result for symmetric encryption">
+            <a:extLst>
+              <a:ext uri="{FF2B5EF4-FFF2-40B4-BE49-F238E27FC236}">
+                <a16:creationId xmlns:a16="http://schemas.microsoft.com/office/drawing/2014/main" id="{67E2A111-96F2-4CEF-B692-EA79CB0145E4}"/>
+              </a:ext>
+            </a:extLst>
+          </p:cNvPr>
+          <p:cNvPicPr>
+            <a:picLocks noChangeAspect="1" noChangeArrowheads="1"/>
+          </p:cNvPicPr>
+          <p:nvPr/>
+        </p:nvPicPr>
+        <p:blipFill>
+          <a:blip r:embed="rId2">
+            <a:extLst>
+              <a:ext uri="{28A0092B-C50C-407E-A947-70E740481C1C}">
+                <a14:useLocalDpi xmlns:a14="http://schemas.microsoft.com/office/drawing/2010/main" val="0"/>
+              </a:ext>
+            </a:extLst>
+          </a:blip>
+          <a:srcRect/>
+          <a:stretch>
+            <a:fillRect/>
+          </a:stretch>
+        </p:blipFill>
+        <p:spPr bwMode="auto">
+          <a:xfrm>
+            <a:off x="3196858" y="1899454"/>
+            <a:ext cx="5369138" cy="2934140"/>
+          </a:xfrm>
+          <a:prstGeom prst="rect">
+            <a:avLst/>
+          </a:prstGeom>
+          <a:noFill/>
+          <a:extLst>
+            <a:ext uri="{909E8E84-426E-40DD-AFC4-6F175D3DCCD1}">
+              <a14:hiddenFill xmlns:a14="http://schemas.microsoft.com/office/drawing/2010/main">
+                <a:solidFill>
+                  <a:srgbClr val="FFFFFF"/>
+                </a:solidFill>
+              </a14:hiddenFill>
+            </a:ext>
+          </a:extLst>
+        </p:spPr>
+      </p:pic>
+    </p:spTree>
+    <p:extLst>
+      <p:ext uri="{BB962C8B-B14F-4D97-AF65-F5344CB8AC3E}">
+        <p14:creationId xmlns:p14="http://schemas.microsoft.com/office/powerpoint/2010/main" val="277675870"/>
+      </p:ext>
+    </p:extLst>
+  </p:cSld>
+  <p:clrMapOvr>
+    <a:masterClrMapping/>
+  </p:clrMapOvr>
+</p:sld>
+</file>
+
 <file path=ppt/slides/slide4.xml><?xml version="1.0" encoding="utf-8"?>
 <p:sld xmlns:a="http://schemas.openxmlformats.org/drawingml/2006/main" xmlns:r="http://schemas.openxmlformats.org/officeDocument/2006/relationships" xmlns:p="http://schemas.openxmlformats.org/presentationml/2006/main">
   <p:cSld>
@@ -19816,8 +22983,8 @@
           </a:p>
         </p:txBody>
       </p:sp>
-      <mc:AlternateContent xmlns:mc="http://schemas.openxmlformats.org/markup-compatibility/2006" xmlns:a14="http://schemas.microsoft.com/office/drawing/2010/main">
-        <mc:Choice Requires="a14">
+      <mc:AlternateContent xmlns:mc="http://schemas.openxmlformats.org/markup-compatibility/2006">
+        <mc:Choice xmlns:a14="http://schemas.microsoft.com/office/drawing/2010/main" Requires="a14">
           <p:sp>
             <p:nvSpPr>
               <p:cNvPr id="3" name="Content Placeholder 2">
@@ -19834,12 +23001,7 @@
                 <p:ph idx="1"/>
               </p:nvPr>
             </p:nvSpPr>
-            <p:spPr>
-              <a:xfrm>
-                <a:off x="2152650" y="1524000"/>
-                <a:ext cx="7886700" cy="4876800"/>
-              </a:xfrm>
-            </p:spPr>
+            <p:spPr/>
             <p:txBody>
               <a:bodyPr>
                 <a:normAutofit/>
@@ -20063,7 +23225,7 @@
             </p:txBody>
           </p:sp>
         </mc:Choice>
-        <mc:Fallback xmlns="">
+        <mc:Fallback>
           <p:sp>
             <p:nvSpPr>
               <p:cNvPr id="3" name="Content Placeholder 2">
@@ -20081,14 +23243,10 @@
               </p:nvPr>
             </p:nvSpPr>
             <p:spPr>
-              <a:xfrm>
-                <a:off x="2152650" y="1524000"/>
-                <a:ext cx="7886700" cy="4876800"/>
-              </a:xfrm>
               <a:blipFill>
                 <a:blip r:embed="rId2"/>
                 <a:stretch>
-                  <a:fillRect l="-1447" t="-2338"/>
+                  <a:fillRect l="-1086" t="-2326"/>
                 </a:stretch>
               </a:blipFill>
             </p:spPr>
@@ -20159,8 +23317,8 @@
           </a:p>
         </p:txBody>
       </p:sp>
-      <mc:AlternateContent xmlns:mc="http://schemas.openxmlformats.org/markup-compatibility/2006" xmlns:a14="http://schemas.microsoft.com/office/drawing/2010/main">
-        <mc:Choice Requires="a14">
+      <mc:AlternateContent xmlns:mc="http://schemas.openxmlformats.org/markup-compatibility/2006">
+        <mc:Choice xmlns:a14="http://schemas.microsoft.com/office/drawing/2010/main" Requires="a14">
           <p:sp>
             <p:nvSpPr>
               <p:cNvPr id="3" name="Content Placeholder 2"/>
@@ -20240,7 +23398,7 @@
             </p:txBody>
           </p:sp>
         </mc:Choice>
-        <mc:Fallback xmlns="">
+        <mc:Fallback>
           <p:sp>
             <p:nvSpPr>
               <p:cNvPr id="3" name="Content Placeholder 2"/>
@@ -20255,7 +23413,7 @@
               <a:blipFill>
                 <a:blip r:embed="rId2"/>
                 <a:stretch>
-                  <a:fillRect t="-2521"/>
+                  <a:fillRect l="-1086" t="-2326"/>
                 </a:stretch>
               </a:blipFill>
             </p:spPr>
@@ -20332,8 +23490,8 @@
           </a:p>
         </p:txBody>
       </p:sp>
-      <mc:AlternateContent xmlns:mc="http://schemas.openxmlformats.org/markup-compatibility/2006" xmlns:a14="http://schemas.microsoft.com/office/drawing/2010/main">
-        <mc:Choice Requires="a14">
+      <mc:AlternateContent xmlns:mc="http://schemas.openxmlformats.org/markup-compatibility/2006">
+        <mc:Choice xmlns:a14="http://schemas.microsoft.com/office/drawing/2010/main" Requires="a14">
           <p:sp>
             <p:nvSpPr>
               <p:cNvPr id="3" name="Content Placeholder 2">
@@ -20350,12 +23508,7 @@
                 <p:ph idx="1"/>
               </p:nvPr>
             </p:nvSpPr>
-            <p:spPr>
-              <a:xfrm>
-                <a:off x="658906" y="1524000"/>
-                <a:ext cx="10428194" cy="4876800"/>
-              </a:xfrm>
-            </p:spPr>
+            <p:spPr/>
             <p:txBody>
               <a:bodyPr>
                 <a:normAutofit/>
@@ -20758,7 +23911,7 @@
             </p:txBody>
           </p:sp>
         </mc:Choice>
-        <mc:Fallback xmlns="">
+        <mc:Fallback>
           <p:sp>
             <p:nvSpPr>
               <p:cNvPr id="3" name="Content Placeholder 2">
@@ -20776,14 +23929,10 @@
               </p:nvPr>
             </p:nvSpPr>
             <p:spPr>
-              <a:xfrm>
-                <a:off x="658906" y="1524000"/>
-                <a:ext cx="10428194" cy="4876800"/>
-              </a:xfrm>
               <a:blipFill>
                 <a:blip r:embed="rId3"/>
                 <a:stretch>
-                  <a:fillRect l="-972" t="-2338"/>
+                  <a:fillRect l="-1086" t="-2326"/>
                 </a:stretch>
               </a:blipFill>
             </p:spPr>
@@ -20802,10 +23951,346 @@
           </p:sp>
         </mc:Fallback>
       </mc:AlternateContent>
+      <p:sp>
+        <p:nvSpPr>
+          <p:cNvPr id="12" name="Msg Box"/>
+          <p:cNvSpPr/>
+          <p:nvPr/>
+        </p:nvSpPr>
+        <p:spPr>
+          <a:xfrm>
+            <a:off x="1397000" y="5308600"/>
+            <a:ext cx="1905000" cy="711200"/>
+          </a:xfrm>
+          <a:prstGeom prst="roundRect">
+            <a:avLst/>
+          </a:prstGeom>
+          <a:solidFill>
+            <a:srgbClr val="EEF2F6"/>
+          </a:solidFill>
+          <a:ln w="12700">
+            <a:solidFill>
+              <a:srgbClr val="1F4E79"/>
+            </a:solidFill>
+          </a:ln>
+        </p:spPr>
+        <p:txBody>
+          <a:bodyPr wrap="none" lIns="45720" tIns="0" rIns="45720" bIns="0" anchor="ctr">
+            <a:noAutofit/>
+          </a:bodyPr>
+          <a:lstStyle/>
+          <a:p>
+            <a:pPr algn="ctr">
+              <a:buNone/>
+            </a:pPr>
+            <a:r>
+              <a:rPr lang="en-US" sz="2000" i="1" dirty="0">
+                <a:solidFill>
+                  <a:srgbClr val="1F4E79"/>
+                </a:solidFill>
+                <a:latin typeface="Cambria"/>
+              </a:rPr>
+              <a:t>m</a:t>
+            </a:r>
+          </a:p>
+        </p:txBody>
+      </p:sp>
+      <p:sp>
+        <p:nvSpPr>
+          <p:cNvPr id="13" name="Ct Box"/>
+          <p:cNvSpPr/>
+          <p:nvPr/>
+        </p:nvSpPr>
+        <p:spPr>
+          <a:xfrm>
+            <a:off x="5105400" y="5308600"/>
+            <a:ext cx="1905000" cy="711200"/>
+          </a:xfrm>
+          <a:prstGeom prst="roundRect">
+            <a:avLst/>
+          </a:prstGeom>
+          <a:solidFill>
+            <a:srgbClr val="E9F3F1"/>
+          </a:solidFill>
+          <a:ln w="12700">
+            <a:solidFill>
+              <a:srgbClr val="2E7D6F"/>
+            </a:solidFill>
+          </a:ln>
+        </p:spPr>
+        <p:txBody>
+          <a:bodyPr wrap="none" lIns="45720" tIns="0" rIns="45720" bIns="0" anchor="ctr">
+            <a:noAutofit/>
+          </a:bodyPr>
+          <a:lstStyle/>
+          <a:p>
+            <a:pPr algn="ctr">
+              <a:buNone/>
+            </a:pPr>
+            <a:r>
+              <a:rPr lang="en-US" sz="2000" i="1" dirty="0">
+                <a:solidFill>
+                  <a:srgbClr val="2E7D6F"/>
+                </a:solidFill>
+                <a:latin typeface="Cambria"/>
+              </a:rPr>
+              <a:t>c</a:t>
+            </a:r>
+          </a:p>
+        </p:txBody>
+      </p:sp>
+      <p:sp>
+        <p:nvSpPr>
+          <p:cNvPr id="14" name="Msg Box 2"/>
+          <p:cNvSpPr/>
+          <p:nvPr/>
+        </p:nvSpPr>
+        <p:spPr>
+          <a:xfrm>
+            <a:off x="8813800" y="5308600"/>
+            <a:ext cx="1905000" cy="711200"/>
+          </a:xfrm>
+          <a:prstGeom prst="roundRect">
+            <a:avLst/>
+          </a:prstGeom>
+          <a:solidFill>
+            <a:srgbClr val="EEF2F6"/>
+          </a:solidFill>
+          <a:ln w="12700">
+            <a:solidFill>
+              <a:srgbClr val="1F4E79"/>
+            </a:solidFill>
+          </a:ln>
+        </p:spPr>
+        <p:txBody>
+          <a:bodyPr wrap="none" lIns="45720" tIns="0" rIns="45720" bIns="0" anchor="ctr">
+            <a:noAutofit/>
+          </a:bodyPr>
+          <a:lstStyle/>
+          <a:p>
+            <a:pPr algn="ctr">
+              <a:buNone/>
+            </a:pPr>
+            <a:r>
+              <a:rPr lang="en-US" sz="2000" i="1" dirty="0">
+                <a:solidFill>
+                  <a:srgbClr val="1F4E79"/>
+                </a:solidFill>
+                <a:latin typeface="Cambria"/>
+              </a:rPr>
+              <a:t>m</a:t>
+            </a:r>
+          </a:p>
+        </p:txBody>
+      </p:sp>
+      <p:sp>
+        <p:nvSpPr>
+          <p:cNvPr id="15" name="Enc Arrow"/>
+          <p:cNvSpPr/>
+          <p:nvPr/>
+        </p:nvSpPr>
+        <p:spPr>
+          <a:xfrm>
+            <a:off x="3454400" y="5435600"/>
+            <a:ext cx="1498600" cy="457200"/>
+          </a:xfrm>
+          <a:prstGeom prst="rightArrow">
+            <a:avLst/>
+          </a:prstGeom>
+          <a:solidFill>
+            <a:srgbClr val="1F4E79"/>
+          </a:solidFill>
+          <a:ln>
+            <a:noFill/>
+          </a:ln>
+        </p:spPr>
+        <p:txBody>
+          <a:bodyPr wrap="none" lIns="45720" tIns="0" rIns="45720" bIns="0" anchor="ctr">
+            <a:noAutofit/>
+          </a:bodyPr>
+          <a:lstStyle/>
+          <a:p>
+            <a:pPr algn="ctr">
+              <a:buNone/>
+            </a:pPr>
+            <a:r>
+              <a:rPr lang="en-US" sz="1400" dirty="0">
+                <a:solidFill>
+                  <a:srgbClr val="FFFFFF"/>
+                </a:solidFill>
+                <a:latin typeface="Cambria"/>
+              </a:rPr>
+              <a:t>Enc(k, ·)</a:t>
+            </a:r>
+          </a:p>
+        </p:txBody>
+      </p:sp>
+      <p:sp>
+        <p:nvSpPr>
+          <p:cNvPr id="16" name="Dec Arrow"/>
+          <p:cNvSpPr/>
+          <p:nvPr/>
+        </p:nvSpPr>
+        <p:spPr>
+          <a:xfrm>
+            <a:off x="7162800" y="5435600"/>
+            <a:ext cx="1498600" cy="457200"/>
+          </a:xfrm>
+          <a:prstGeom prst="rightArrow">
+            <a:avLst/>
+          </a:prstGeom>
+          <a:solidFill>
+            <a:srgbClr val="2E7D6F"/>
+          </a:solidFill>
+          <a:ln>
+            <a:noFill/>
+          </a:ln>
+        </p:spPr>
+        <p:txBody>
+          <a:bodyPr wrap="none" lIns="45720" tIns="0" rIns="45720" bIns="0" anchor="ctr">
+            <a:noAutofit/>
+          </a:bodyPr>
+          <a:lstStyle/>
+          <a:p>
+            <a:pPr algn="ctr">
+              <a:buNone/>
+            </a:pPr>
+            <a:r>
+              <a:rPr lang="en-US" sz="1400" dirty="0">
+                <a:solidFill>
+                  <a:srgbClr val="FFFFFF"/>
+                </a:solidFill>
+                <a:latin typeface="Cambria"/>
+              </a:rPr>
+              <a:t>Dec(k, ·)</a:t>
+            </a:r>
+          </a:p>
+        </p:txBody>
+      </p:sp>
+      <p:sp>
+        <p:nvSpPr>
+          <p:cNvPr id="17" name="Cap1"/>
+          <p:cNvSpPr/>
+          <p:nvPr/>
+        </p:nvSpPr>
+        <p:spPr>
+          <a:xfrm>
+            <a:off x="1397000" y="6096000"/>
+            <a:ext cx="1905000" cy="254000"/>
+          </a:xfrm>
+          <a:prstGeom prst="rect">
+            <a:avLst/>
+          </a:prstGeom>
+          <a:noFill/>
+          <a:ln>
+            <a:noFill/>
+          </a:ln>
+        </p:spPr>
+        <p:txBody>
+          <a:bodyPr wrap="none" lIns="45720" tIns="0" rIns="45720" bIns="0" anchor="ctr">
+            <a:noAutofit/>
+          </a:bodyPr>
+          <a:lstStyle/>
+          <a:p>
+            <a:pPr algn="ctr">
+              <a:buNone/>
+            </a:pPr>
+            <a:r>
+              <a:rPr lang="en-US" sz="1400" dirty="0">
+                <a:solidFill>
+                  <a:srgbClr val="4A5866"/>
+                </a:solidFill>
+                <a:latin typeface="Corbel"/>
+              </a:rPr>
+              <a:t>message</a:t>
+            </a:r>
+          </a:p>
+        </p:txBody>
+      </p:sp>
+      <p:sp>
+        <p:nvSpPr>
+          <p:cNvPr id="18" name="Cap2"/>
+          <p:cNvSpPr/>
+          <p:nvPr/>
+        </p:nvSpPr>
+        <p:spPr>
+          <a:xfrm>
+            <a:off x="5105400" y="6096000"/>
+            <a:ext cx="1905000" cy="254000"/>
+          </a:xfrm>
+          <a:prstGeom prst="rect">
+            <a:avLst/>
+          </a:prstGeom>
+          <a:noFill/>
+          <a:ln>
+            <a:noFill/>
+          </a:ln>
+        </p:spPr>
+        <p:txBody>
+          <a:bodyPr wrap="none" lIns="45720" tIns="0" rIns="45720" bIns="0" anchor="ctr">
+            <a:noAutofit/>
+          </a:bodyPr>
+          <a:lstStyle/>
+          <a:p>
+            <a:pPr algn="ctr">
+              <a:buNone/>
+            </a:pPr>
+            <a:r>
+              <a:rPr lang="en-US" sz="1400" dirty="0">
+                <a:solidFill>
+                  <a:srgbClr val="4A5866"/>
+                </a:solidFill>
+                <a:latin typeface="Corbel"/>
+              </a:rPr>
+              <a:t>ciphertext</a:t>
+            </a:r>
+          </a:p>
+        </p:txBody>
+      </p:sp>
+      <p:sp>
+        <p:nvSpPr>
+          <p:cNvPr id="19" name="Cap3"/>
+          <p:cNvSpPr/>
+          <p:nvPr/>
+        </p:nvSpPr>
+        <p:spPr>
+          <a:xfrm>
+            <a:off x="8813800" y="6096000"/>
+            <a:ext cx="1905000" cy="254000"/>
+          </a:xfrm>
+          <a:prstGeom prst="rect">
+            <a:avLst/>
+          </a:prstGeom>
+          <a:noFill/>
+          <a:ln>
+            <a:noFill/>
+          </a:ln>
+        </p:spPr>
+        <p:txBody>
+          <a:bodyPr wrap="none" lIns="45720" tIns="0" rIns="45720" bIns="0" anchor="ctr">
+            <a:noAutofit/>
+          </a:bodyPr>
+          <a:lstStyle/>
+          <a:p>
+            <a:pPr algn="ctr">
+              <a:buNone/>
+            </a:pPr>
+            <a:r>
+              <a:rPr lang="en-US" sz="1400" dirty="0">
+                <a:solidFill>
+                  <a:srgbClr val="4A5866"/>
+                </a:solidFill>
+                <a:latin typeface="Corbel"/>
+              </a:rPr>
+              <a:t>same message back</a:t>
+            </a:r>
+          </a:p>
+        </p:txBody>
+      </p:sp>
     </p:spTree>
     <p:extLst>
       <p:ext uri="{BB962C8B-B14F-4D97-AF65-F5344CB8AC3E}">
-        <p14:creationId xmlns:p14="http://schemas.microsoft.com/office/powerpoint/2010/main" val="2325272607"/>
+        <p14:creationId xmlns:p14="http://schemas.microsoft.com/office/powerpoint/2010/main" val="990481652"/>
       </p:ext>
     </p:extLst>
   </p:cSld>
@@ -20854,8 +24339,8 @@
           </a:p>
         </p:txBody>
       </p:sp>
-      <mc:AlternateContent xmlns:mc="http://schemas.openxmlformats.org/markup-compatibility/2006" xmlns:a14="http://schemas.microsoft.com/office/drawing/2010/main">
-        <mc:Choice Requires="a14">
+      <mc:AlternateContent xmlns:mc="http://schemas.openxmlformats.org/markup-compatibility/2006">
+        <mc:Choice xmlns:a14="http://schemas.microsoft.com/office/drawing/2010/main" Requires="a14">
           <p:sp>
             <p:nvSpPr>
               <p:cNvPr id="3" name="Content Placeholder 2"/>
@@ -21210,7 +24695,7 @@
             </p:txBody>
           </p:sp>
         </mc:Choice>
-        <mc:Fallback xmlns="">
+        <mc:Fallback>
           <p:sp>
             <p:nvSpPr>
               <p:cNvPr id="3" name="Content Placeholder 2"/>
@@ -21225,7 +24710,7 @@
               <a:blipFill>
                 <a:blip r:embed="rId3"/>
                 <a:stretch>
-                  <a:fillRect l="-1086" t="-2326"/>
+                  <a:fillRect l="-1086" t="-2326" r="-362"/>
                 </a:stretch>
               </a:blipFill>
             </p:spPr>
@@ -21296,8 +24781,8 @@
           </a:p>
         </p:txBody>
       </p:sp>
-      <mc:AlternateContent xmlns:mc="http://schemas.openxmlformats.org/markup-compatibility/2006" xmlns:a14="http://schemas.microsoft.com/office/drawing/2010/main">
-        <mc:Choice Requires="a14">
+      <mc:AlternateContent xmlns:mc="http://schemas.openxmlformats.org/markup-compatibility/2006">
+        <mc:Choice xmlns:a14="http://schemas.microsoft.com/office/drawing/2010/main" Requires="a14">
           <p:sp>
             <p:nvSpPr>
               <p:cNvPr id="3" name="Content Placeholder 2"/>
@@ -21589,7 +25074,7 @@
             </p:txBody>
           </p:sp>
         </mc:Choice>
-        <mc:Fallback xmlns="">
+        <mc:Fallback>
           <p:sp>
             <p:nvSpPr>
               <p:cNvPr id="3" name="Content Placeholder 2"/>
@@ -21604,7 +25089,7 @@
               <a:blipFill>
                 <a:blip r:embed="rId2"/>
                 <a:stretch>
-                  <a:fillRect l="-1043" t="-2521"/>
+                  <a:fillRect l="-1086" t="-2326"/>
                 </a:stretch>
               </a:blipFill>
             </p:spPr>
@@ -21681,8 +25166,8 @@
           </a:p>
         </p:txBody>
       </p:sp>
-      <mc:AlternateContent xmlns:mc="http://schemas.openxmlformats.org/markup-compatibility/2006" xmlns:a14="http://schemas.microsoft.com/office/drawing/2010/main">
-        <mc:Choice Requires="a14">
+      <mc:AlternateContent xmlns:mc="http://schemas.openxmlformats.org/markup-compatibility/2006">
+        <mc:Choice xmlns:a14="http://schemas.microsoft.com/office/drawing/2010/main" Requires="a14">
           <p:sp>
             <p:nvSpPr>
               <p:cNvPr id="3" name="Content Placeholder 2">
@@ -21699,12 +25184,7 @@
                 <p:ph idx="1"/>
               </p:nvPr>
             </p:nvSpPr>
-            <p:spPr>
-              <a:xfrm>
-                <a:off x="1169895" y="1524000"/>
-                <a:ext cx="10448364" cy="4876800"/>
-              </a:xfrm>
-            </p:spPr>
+            <p:spPr/>
             <p:txBody>
               <a:bodyPr>
                 <a:normAutofit/>
@@ -22135,7 +25615,7 @@
             </p:txBody>
           </p:sp>
         </mc:Choice>
-        <mc:Fallback xmlns="">
+        <mc:Fallback>
           <p:sp>
             <p:nvSpPr>
               <p:cNvPr id="3" name="Content Placeholder 2">
@@ -22153,14 +25633,10 @@
               </p:nvPr>
             </p:nvSpPr>
             <p:spPr>
-              <a:xfrm>
-                <a:off x="1169895" y="1524000"/>
-                <a:ext cx="10448364" cy="4876800"/>
-              </a:xfrm>
               <a:blipFill>
                 <a:blip r:embed="rId3"/>
                 <a:stretch>
-                  <a:fillRect l="-1094" t="-2338" r="-729"/>
+                  <a:fillRect l="-1086" t="-2326"/>
                 </a:stretch>
               </a:blipFill>
             </p:spPr>
@@ -22508,6 +25984,321 @@
 </file>
 
 <file path=ppt/theme/theme2.xml><?xml version="1.0" encoding="utf-8"?>
+<a:theme xmlns:a="http://schemas.openxmlformats.org/drawingml/2006/main" name="Office Theme [1788231017392]">
+  <a:themeElements>
+    <a:clrScheme name="Office">
+      <a:dk1>
+        <a:srgbClr val="16212E"/>
+      </a:dk1>
+      <a:lt1>
+        <a:srgbClr val="FFFFFF"/>
+      </a:lt1>
+      <a:dk2>
+        <a:srgbClr val="1F4E79"/>
+      </a:dk2>
+      <a:lt2>
+        <a:srgbClr val="EEF2F6"/>
+      </a:lt2>
+      <a:accent1>
+        <a:srgbClr val="1F4E79"/>
+      </a:accent1>
+      <a:accent2>
+        <a:srgbClr val="B5502A"/>
+      </a:accent2>
+      <a:accent3>
+        <a:srgbClr val="2E7D6F"/>
+      </a:accent3>
+      <a:accent4>
+        <a:srgbClr val="6B7A8F"/>
+      </a:accent4>
+      <a:accent5>
+        <a:srgbClr val="C79A2E"/>
+      </a:accent5>
+      <a:accent6>
+        <a:srgbClr val="7A5C9E"/>
+      </a:accent6>
+      <a:hlink>
+        <a:srgbClr val="467886"/>
+      </a:hlink>
+      <a:folHlink>
+        <a:srgbClr val="96607D"/>
+      </a:folHlink>
+    </a:clrScheme>
+    <a:fontScheme name="Office">
+      <a:majorFont>
+        <a:latin typeface="Cambria" panose="02110004020202020204"/>
+        <a:ea typeface=""/>
+        <a:cs typeface=""/>
+        <a:font script="Jpan" typeface="游ゴシック Light"/>
+        <a:font script="Hang" typeface="맑은 고딕"/>
+        <a:font script="Hans" typeface="等线 Light"/>
+        <a:font script="Hant" typeface="新細明體"/>
+        <a:font script="Arab" typeface="Times New Roman"/>
+        <a:font script="Hebr" typeface="Times New Roman"/>
+        <a:font script="Thai" typeface="Angsana New"/>
+        <a:font script="Ethi" typeface="Nyala"/>
+        <a:font script="Beng" typeface="Vrinda"/>
+        <a:font script="Gujr" typeface="Shruti"/>
+        <a:font script="Khmr" typeface="MoolBoran"/>
+        <a:font script="Knda" typeface="Tunga"/>
+        <a:font script="Guru" typeface="Raavi"/>
+        <a:font script="Cans" typeface="Euphemia"/>
+        <a:font script="Cher" typeface="Plantagenet Cherokee"/>
+        <a:font script="Yiii" typeface="Microsoft Yi Baiti"/>
+        <a:font script="Tibt" typeface="Microsoft Himalaya"/>
+        <a:font script="Thaa" typeface="MV Boli"/>
+        <a:font script="Deva" typeface="Mangal"/>
+        <a:font script="Telu" typeface="Gautami"/>
+        <a:font script="Taml" typeface="Latha"/>
+        <a:font script="Syrc" typeface="Estrangelo Edessa"/>
+        <a:font script="Orya" typeface="Kalinga"/>
+        <a:font script="Mlym" typeface="Kartika"/>
+        <a:font script="Laoo" typeface="DokChampa"/>
+        <a:font script="Sinh" typeface="Iskoola Pota"/>
+        <a:font script="Mong" typeface="Mongolian Baiti"/>
+        <a:font script="Viet" typeface="Times New Roman"/>
+        <a:font script="Uigh" typeface="Microsoft Uighur"/>
+        <a:font script="Geor" typeface="Sylfaen"/>
+        <a:font script="Armn" typeface="Arial"/>
+        <a:font script="Bugi" typeface="Leelawadee UI"/>
+        <a:font script="Bopo" typeface="Microsoft JhengHei"/>
+        <a:font script="Java" typeface="Javanese Text"/>
+        <a:font script="Lisu" typeface="Segoe UI"/>
+        <a:font script="Mymr" typeface="Myanmar Text"/>
+        <a:font script="Nkoo" typeface="Ebrima"/>
+        <a:font script="Olck" typeface="Nirmala UI"/>
+        <a:font script="Osma" typeface="Ebrima"/>
+        <a:font script="Phag" typeface="Phagspa"/>
+        <a:font script="Syrn" typeface="Estrangelo Edessa"/>
+        <a:font script="Syrj" typeface="Estrangelo Edessa"/>
+        <a:font script="Syre" typeface="Estrangelo Edessa"/>
+        <a:font script="Sora" typeface="Nirmala UI"/>
+        <a:font script="Tale" typeface="Microsoft Tai Le"/>
+        <a:font script="Talu" typeface="Microsoft New Tai Lue"/>
+        <a:font script="Tfng" typeface="Ebrima"/>
+      </a:majorFont>
+      <a:minorFont>
+        <a:latin typeface="Corbel" panose="02110004020202020204"/>
+        <a:ea typeface=""/>
+        <a:cs typeface=""/>
+        <a:font script="Jpan" typeface="游ゴシック"/>
+        <a:font script="Hang" typeface="맑은 고딕"/>
+        <a:font script="Hans" typeface="等线"/>
+        <a:font script="Hant" typeface="新細明體"/>
+        <a:font script="Arab" typeface="Arial"/>
+        <a:font script="Hebr" typeface="Arial"/>
+        <a:font script="Thai" typeface="Cordia New"/>
+        <a:font script="Ethi" typeface="Nyala"/>
+        <a:font script="Beng" typeface="Vrinda"/>
+        <a:font script="Gujr" typeface="Shruti"/>
+        <a:font script="Khmr" typeface="DaunPenh"/>
+        <a:font script="Knda" typeface="Tunga"/>
+        <a:font script="Guru" typeface="Raavi"/>
+        <a:font script="Cans" typeface="Euphemia"/>
+        <a:font script="Cher" typeface="Plantagenet Cherokee"/>
+        <a:font script="Yiii" typeface="Microsoft Yi Baiti"/>
+        <a:font script="Tibt" typeface="Microsoft Himalaya"/>
+        <a:font script="Thaa" typeface="MV Boli"/>
+        <a:font script="Deva" typeface="Mangal"/>
+        <a:font script="Telu" typeface="Gautami"/>
+        <a:font script="Taml" typeface="Latha"/>
+        <a:font script="Syrc" typeface="Estrangelo Edessa"/>
+        <a:font script="Orya" typeface="Kalinga"/>
+        <a:font script="Mlym" typeface="Kartika"/>
+        <a:font script="Laoo" typeface="DokChampa"/>
+        <a:font script="Sinh" typeface="Iskoola Pota"/>
+        <a:font script="Mong" typeface="Mongolian Baiti"/>
+        <a:font script="Viet" typeface="Arial"/>
+        <a:font script="Uigh" typeface="Microsoft Uighur"/>
+        <a:font script="Geor" typeface="Sylfaen"/>
+        <a:font script="Armn" typeface="Arial"/>
+        <a:font script="Bugi" typeface="Leelawadee UI"/>
+        <a:font script="Bopo" typeface="Microsoft JhengHei"/>
+        <a:font script="Java" typeface="Javanese Text"/>
+        <a:font script="Lisu" typeface="Segoe UI"/>
+        <a:font script="Mymr" typeface="Myanmar Text"/>
+        <a:font script="Nkoo" typeface="Ebrima"/>
+        <a:font script="Olck" typeface="Nirmala UI"/>
+        <a:font script="Osma" typeface="Ebrima"/>
+        <a:font script="Phag" typeface="Phagspa"/>
+        <a:font script="Syrn" typeface="Estrangelo Edessa"/>
+        <a:font script="Syrj" typeface="Estrangelo Edessa"/>
+        <a:font script="Syre" typeface="Estrangelo Edessa"/>
+        <a:font script="Sora" typeface="Nirmala UI"/>
+        <a:font script="Tale" typeface="Microsoft Tai Le"/>
+        <a:font script="Talu" typeface="Microsoft New Tai Lue"/>
+        <a:font script="Tfng" typeface="Ebrima"/>
+      </a:minorFont>
+    </a:fontScheme>
+    <a:fmtScheme name="Office">
+      <a:fillStyleLst>
+        <a:solidFill>
+          <a:schemeClr val="phClr"/>
+        </a:solidFill>
+        <a:gradFill rotWithShape="1">
+          <a:gsLst>
+            <a:gs pos="0">
+              <a:schemeClr val="phClr">
+                <a:lumMod val="110000"/>
+                <a:satMod val="105000"/>
+                <a:tint val="67000"/>
+              </a:schemeClr>
+            </a:gs>
+            <a:gs pos="50000">
+              <a:schemeClr val="phClr">
+                <a:lumMod val="105000"/>
+                <a:satMod val="103000"/>
+                <a:tint val="73000"/>
+              </a:schemeClr>
+            </a:gs>
+            <a:gs pos="100000">
+              <a:schemeClr val="phClr">
+                <a:lumMod val="105000"/>
+                <a:satMod val="109000"/>
+                <a:tint val="81000"/>
+              </a:schemeClr>
+            </a:gs>
+          </a:gsLst>
+          <a:lin ang="5400000" scaled="0"/>
+        </a:gradFill>
+        <a:gradFill rotWithShape="1">
+          <a:gsLst>
+            <a:gs pos="0">
+              <a:schemeClr val="phClr">
+                <a:satMod val="103000"/>
+                <a:lumMod val="102000"/>
+                <a:tint val="94000"/>
+              </a:schemeClr>
+            </a:gs>
+            <a:gs pos="50000">
+              <a:schemeClr val="phClr">
+                <a:satMod val="110000"/>
+                <a:lumMod val="100000"/>
+                <a:shade val="100000"/>
+              </a:schemeClr>
+            </a:gs>
+            <a:gs pos="100000">
+              <a:schemeClr val="phClr">
+                <a:lumMod val="99000"/>
+                <a:satMod val="120000"/>
+                <a:shade val="78000"/>
+              </a:schemeClr>
+            </a:gs>
+          </a:gsLst>
+          <a:lin ang="5400000" scaled="0"/>
+        </a:gradFill>
+      </a:fillStyleLst>
+      <a:lnStyleLst>
+        <a:ln w="12700" cap="flat" cmpd="sng" algn="ctr">
+          <a:solidFill>
+            <a:schemeClr val="phClr"/>
+          </a:solidFill>
+          <a:prstDash val="solid"/>
+          <a:miter lim="800000"/>
+        </a:ln>
+        <a:ln w="19050" cap="flat" cmpd="sng" algn="ctr">
+          <a:solidFill>
+            <a:schemeClr val="phClr"/>
+          </a:solidFill>
+          <a:prstDash val="solid"/>
+          <a:miter lim="800000"/>
+        </a:ln>
+        <a:ln w="25400" cap="flat" cmpd="sng" algn="ctr">
+          <a:solidFill>
+            <a:schemeClr val="phClr"/>
+          </a:solidFill>
+          <a:prstDash val="solid"/>
+          <a:miter lim="800000"/>
+        </a:ln>
+      </a:lnStyleLst>
+      <a:effectStyleLst>
+        <a:effectStyle>
+          <a:effectLst/>
+        </a:effectStyle>
+        <a:effectStyle>
+          <a:effectLst/>
+        </a:effectStyle>
+        <a:effectStyle>
+          <a:effectLst>
+            <a:outerShdw blurRad="57150" dist="19050" dir="5400000" algn="ctr" rotWithShape="0">
+              <a:srgbClr val="000000">
+                <a:alpha val="63000"/>
+              </a:srgbClr>
+            </a:outerShdw>
+          </a:effectLst>
+        </a:effectStyle>
+      </a:effectStyleLst>
+      <a:bgFillStyleLst>
+        <a:solidFill>
+          <a:schemeClr val="phClr"/>
+        </a:solidFill>
+        <a:solidFill>
+          <a:schemeClr val="phClr">
+            <a:tint val="95000"/>
+            <a:satMod val="170000"/>
+          </a:schemeClr>
+        </a:solidFill>
+        <a:gradFill rotWithShape="1">
+          <a:gsLst>
+            <a:gs pos="0">
+              <a:schemeClr val="phClr">
+                <a:tint val="93000"/>
+                <a:satMod val="150000"/>
+                <a:shade val="98000"/>
+                <a:lumMod val="102000"/>
+              </a:schemeClr>
+            </a:gs>
+            <a:gs pos="50000">
+              <a:schemeClr val="phClr">
+                <a:tint val="98000"/>
+                <a:satMod val="130000"/>
+                <a:shade val="90000"/>
+                <a:lumMod val="103000"/>
+              </a:schemeClr>
+            </a:gs>
+            <a:gs pos="100000">
+              <a:schemeClr val="phClr">
+                <a:shade val="63000"/>
+                <a:satMod val="120000"/>
+              </a:schemeClr>
+            </a:gs>
+          </a:gsLst>
+          <a:lin ang="5400000" scaled="0"/>
+        </a:gradFill>
+      </a:bgFillStyleLst>
+    </a:fmtScheme>
+  </a:themeElements>
+  <a:objectDefaults>
+    <a:lnDef>
+      <a:spPr/>
+      <a:bodyPr/>
+      <a:lstStyle/>
+      <a:style>
+        <a:lnRef idx="2">
+          <a:schemeClr val="accent1"/>
+        </a:lnRef>
+        <a:fillRef idx="0">
+          <a:schemeClr val="accent1"/>
+        </a:fillRef>
+        <a:effectRef idx="1">
+          <a:schemeClr val="accent1"/>
+        </a:effectRef>
+        <a:fontRef idx="minor">
+          <a:schemeClr val="tx1"/>
+        </a:fontRef>
+      </a:style>
+    </a:lnDef>
+  </a:objectDefaults>
+  <a:extraClrSchemeLst/>
+  <a:extLst>
+    <a:ext uri="{05A4C25C-085E-4340-85A3-A5531E510DB2}">
+      <thm15:themeFamily xmlns:thm15="http://schemas.microsoft.com/office/thememl/2012/main" name="Office Theme" id="{2E142A2C-CD16-42D6-873A-C26D2A0506FA}" vid="{1BDDFF52-6CD6-40A5-AB3C-68EB2F1E4D0A}"/>
+    </a:ext>
+  </a:extLst>
+</a:theme>
+</file>
+
+<file path=ppt/theme/theme3.xml><?xml version="1.0" encoding="utf-8"?>
 <a:theme xmlns:a="http://schemas.openxmlformats.org/drawingml/2006/main" name="Office Theme">
   <a:themeElements>
     <a:clrScheme name="Office">
@@ -22820,4 +26611,26 @@
     </a:ext>
   </a:extLst>
 </a:theme>
+</file>
+
+<file path=ppt/webextensions/taskpanes.xml><?xml version="1.0" encoding="utf-8"?>
+<wetp:taskpanes xmlns:wetp="http://schemas.microsoft.com/office/webextensions/taskpanes/2010/11">
+  <wetp:taskpane dockstate="right" visibility="0" width="350" row="0">
+    <wetp:webextensionref xmlns:r="http://schemas.openxmlformats.org/officeDocument/2006/relationships" r:id="rId1"/>
+  </wetp:taskpane>
+</wetp:taskpanes>
+</file>
+
+<file path=ppt/webextensions/webextension1.xml><?xml version="1.0" encoding="utf-8"?>
+<we:webextension xmlns:we="http://schemas.microsoft.com/office/webextensions/webextension/2010/11" id="{C4C98483-B6D8-684C-80BE-21358E90FD0F}">
+  <we:reference id="wa200010001" version="1.0.0.1" store="en-US" storeType="OMEX"/>
+  <we:alternateReferences>
+    <we:reference id="wa200010001" version="1.0.0.1" store="en-US" storeType="OMEX"/>
+  </we:alternateReferences>
+  <we:properties>
+    <we:property name="claude.fileId" value="&quot;d7957bb2-9ca3-4461-8814-e2c2a0797c10&quot;"/>
+  </we:properties>
+  <we:bindings/>
+  <we:snapshot xmlns:r="http://schemas.openxmlformats.org/officeDocument/2006/relationships"/>
+</we:webextension>
 </file>